--- a/tests/corpus/pptx/generated/charts-details.pptx
+++ b/tests/corpus/pptx/generated/charts-details.pptx
@@ -218,7 +218,7 @@
               </c14:invertSolidFillFmt>
             </c:ext>
             <c:ext xmlns:c16="http://schemas.microsoft.com/office/drawing/2014/chart" uri="{C3380CC4-5D6E-409C-BE32-E72D297353CC}">
-              <c16:uniqueId val="{00000000-EA4E-4496-81B5-EE9721C23A0C}"/>
+              <c16:uniqueId val="{00000000-E5AC-453A-B7E2-2CB1464BBC10}"/>
             </c:ext>
           </c:extLst>
         </c:ser>
@@ -295,7 +295,7 @@
           </c:val>
           <c:extLst>
             <c:ext xmlns:c16="http://schemas.microsoft.com/office/drawing/2014/chart" uri="{C3380CC4-5D6E-409C-BE32-E72D297353CC}">
-              <c16:uniqueId val="{00000001-EA4E-4496-81B5-EE9721C23A0C}"/>
+              <c16:uniqueId val="{00000001-E5AC-453A-B7E2-2CB1464BBC10}"/>
             </c:ext>
           </c:extLst>
         </c:ser>
@@ -309,11 +309,11 @@
         </c:dLbls>
         <c:gapWidth val="219"/>
         <c:overlap val="-27"/>
-        <c:axId val="762690351"/>
-        <c:axId val="1293295183"/>
+        <c:axId val="5541200"/>
+        <c:axId val="1193382576"/>
       </c:barChart>
       <c:catAx>
-        <c:axId val="762690351"/>
+        <c:axId val="5541200"/>
         <c:scaling>
           <c:orientation val="minMax"/>
         </c:scaling>
@@ -356,7 +356,7 @@
             <a:endParaRPr lang="de-DE"/>
           </a:p>
         </c:txPr>
-        <c:crossAx val="1293295183"/>
+        <c:crossAx val="1193382576"/>
         <c:crosses val="autoZero"/>
         <c:auto val="1"/>
         <c:lblAlgn val="ctr"/>
@@ -364,7 +364,7 @@
         <c:noMultiLvlLbl val="0"/>
       </c:catAx>
       <c:valAx>
-        <c:axId val="1293295183"/>
+        <c:axId val="1193382576"/>
         <c:scaling>
           <c:orientation val="minMax"/>
         </c:scaling>
@@ -415,7 +415,7 @@
             <a:endParaRPr lang="de-DE"/>
           </a:p>
         </c:txPr>
-        <c:crossAx val="762690351"/>
+        <c:crossAx val="5541200"/>
         <c:crosses val="autoZero"/>
         <c:crossBetween val="between"/>
       </c:valAx>
@@ -590,7 +590,7 @@
           </c:val>
           <c:extLst>
             <c:ext xmlns:c16="http://schemas.microsoft.com/office/drawing/2014/chart" uri="{C3380CC4-5D6E-409C-BE32-E72D297353CC}">
-              <c16:uniqueId val="{00000000-2EC0-42D7-9A20-0DBBD52B7655}"/>
+              <c16:uniqueId val="{00000000-FDF9-40CF-9FBA-1BFC5126B945}"/>
             </c:ext>
           </c:extLst>
         </c:ser>
@@ -661,7 +661,7 @@
           </c:val>
           <c:extLst>
             <c:ext xmlns:c16="http://schemas.microsoft.com/office/drawing/2014/chart" uri="{C3380CC4-5D6E-409C-BE32-E72D297353CC}">
-              <c16:uniqueId val="{00000001-2EC0-42D7-9A20-0DBBD52B7655}"/>
+              <c16:uniqueId val="{00000001-FDF9-40CF-9FBA-1BFC5126B945}"/>
             </c:ext>
           </c:extLst>
         </c:ser>
@@ -732,7 +732,7 @@
           </c:val>
           <c:extLst>
             <c:ext xmlns:c16="http://schemas.microsoft.com/office/drawing/2014/chart" uri="{C3380CC4-5D6E-409C-BE32-E72D297353CC}">
-              <c16:uniqueId val="{00000002-2EC0-42D7-9A20-0DBBD52B7655}"/>
+              <c16:uniqueId val="{00000002-FDF9-40CF-9FBA-1BFC5126B945}"/>
             </c:ext>
           </c:extLst>
         </c:ser>
@@ -746,11 +746,11 @@
         </c:dLbls>
         <c:gapWidth val="219"/>
         <c:overlap val="-27"/>
-        <c:axId val="1529861360"/>
-        <c:axId val="1293498703"/>
+        <c:axId val="9931744"/>
+        <c:axId val="1193318256"/>
       </c:barChart>
       <c:catAx>
-        <c:axId val="1529861360"/>
+        <c:axId val="9931744"/>
         <c:scaling>
           <c:orientation val="minMax"/>
         </c:scaling>
@@ -793,7 +793,7 @@
             <a:endParaRPr lang="de-DE"/>
           </a:p>
         </c:txPr>
-        <c:crossAx val="1293498703"/>
+        <c:crossAx val="1193318256"/>
         <c:crosses val="autoZero"/>
         <c:auto val="1"/>
         <c:lblAlgn val="ctr"/>
@@ -801,7 +801,7 @@
         <c:noMultiLvlLbl val="0"/>
       </c:catAx>
       <c:valAx>
-        <c:axId val="1293498703"/>
+        <c:axId val="1193318256"/>
         <c:scaling>
           <c:orientation val="minMax"/>
         </c:scaling>
@@ -852,7 +852,7 @@
             <a:endParaRPr lang="de-DE"/>
           </a:p>
         </c:txPr>
-        <c:crossAx val="1529861360"/>
+        <c:crossAx val="9931744"/>
         <c:crosses val="autoZero"/>
         <c:crossBetween val="between"/>
       </c:valAx>
@@ -1074,7 +1074,7 @@
           <c:bubble3D val="0"/>
           <c:extLst>
             <c:ext xmlns:c16="http://schemas.microsoft.com/office/drawing/2014/chart" uri="{C3380CC4-5D6E-409C-BE32-E72D297353CC}">
-              <c16:uniqueId val="{00000000-F952-4C88-9305-B5EF48086852}"/>
+              <c16:uniqueId val="{00000000-FD6D-4A63-B7B5-FD4369761B74}"/>
             </c:ext>
           </c:extLst>
         </c:ser>
@@ -1088,11 +1088,11 @@
         </c:dLbls>
         <c:bubbleScale val="100"/>
         <c:showNegBubbles val="0"/>
-        <c:axId val="1303157263"/>
-        <c:axId val="1293511183"/>
+        <c:axId val="7285984"/>
+        <c:axId val="1193317776"/>
       </c:bubbleChart>
       <c:valAx>
-        <c:axId val="1303157263"/>
+        <c:axId val="7285984"/>
         <c:scaling>
           <c:orientation val="minMax"/>
         </c:scaling>
@@ -1149,12 +1149,12 @@
             <a:endParaRPr lang="de-DE"/>
           </a:p>
         </c:txPr>
-        <c:crossAx val="1293511183"/>
+        <c:crossAx val="1193317776"/>
         <c:crosses val="autoZero"/>
         <c:crossBetween val="midCat"/>
       </c:valAx>
       <c:valAx>
-        <c:axId val="1293511183"/>
+        <c:axId val="1193317776"/>
         <c:scaling>
           <c:orientation val="minMax"/>
         </c:scaling>
@@ -1211,7 +1211,7 @@
             <a:endParaRPr lang="de-DE"/>
           </a:p>
         </c:txPr>
-        <c:crossAx val="1303157263"/>
+        <c:crossAx val="7285984"/>
         <c:crosses val="autoZero"/>
         <c:crossBetween val="midCat"/>
       </c:valAx>
@@ -1377,7 +1377,7 @@
           </c:val>
           <c:extLst>
             <c:ext xmlns:c16="http://schemas.microsoft.com/office/drawing/2014/chart" uri="{C3380CC4-5D6E-409C-BE32-E72D297353CC}">
-              <c16:uniqueId val="{00000000-2C46-4E81-A1A2-F1830123E671}"/>
+              <c16:uniqueId val="{00000000-F0EC-435C-BB41-A4B49D094CC9}"/>
             </c:ext>
           </c:extLst>
         </c:ser>
@@ -1449,7 +1449,7 @@
           </c:val>
           <c:extLst>
             <c:ext xmlns:c16="http://schemas.microsoft.com/office/drawing/2014/chart" uri="{C3380CC4-5D6E-409C-BE32-E72D297353CC}">
-              <c16:uniqueId val="{00000001-2C46-4E81-A1A2-F1830123E671}"/>
+              <c16:uniqueId val="{00000001-F0EC-435C-BB41-A4B49D094CC9}"/>
             </c:ext>
           </c:extLst>
         </c:ser>
@@ -1463,11 +1463,11 @@
         </c:dLbls>
         <c:gapWidth val="219"/>
         <c:overlap val="-27"/>
-        <c:axId val="1305973295"/>
-        <c:axId val="1293342703"/>
+        <c:axId val="1987030751"/>
+        <c:axId val="1193437296"/>
       </c:barChart>
       <c:catAx>
-        <c:axId val="1305973295"/>
+        <c:axId val="1987030751"/>
         <c:scaling>
           <c:orientation val="minMax"/>
         </c:scaling>
@@ -1510,7 +1510,7 @@
             <a:endParaRPr lang="de-DE"/>
           </a:p>
         </c:txPr>
-        <c:crossAx val="1293342703"/>
+        <c:crossAx val="1193437296"/>
         <c:crosses val="autoZero"/>
         <c:auto val="1"/>
         <c:lblAlgn val="ctr"/>
@@ -1518,7 +1518,7 @@
         <c:noMultiLvlLbl val="0"/>
       </c:catAx>
       <c:valAx>
-        <c:axId val="1293342703"/>
+        <c:axId val="1193437296"/>
         <c:scaling>
           <c:orientation val="minMax"/>
         </c:scaling>
@@ -1569,7 +1569,7 @@
             <a:endParaRPr lang="de-DE"/>
           </a:p>
         </c:txPr>
-        <c:crossAx val="1305973295"/>
+        <c:crossAx val="1987030751"/>
         <c:crosses val="autoZero"/>
         <c:crossBetween val="between"/>
         <c:dispUnits>
@@ -1816,7 +1816,7 @@
           <c:smooth val="0"/>
           <c:extLst>
             <c:ext xmlns:c16="http://schemas.microsoft.com/office/drawing/2014/chart" uri="{C3380CC4-5D6E-409C-BE32-E72D297353CC}">
-              <c16:uniqueId val="{00000000-456F-4EFA-820D-D049B8FEFAB6}"/>
+              <c16:uniqueId val="{00000000-5BD0-4FF6-95FA-CDA1D93BCF44}"/>
             </c:ext>
           </c:extLst>
         </c:ser>
@@ -1829,11 +1829,11 @@
           <c:showBubbleSize val="0"/>
         </c:dLbls>
         <c:smooth val="0"/>
-        <c:axId val="1319064351"/>
-        <c:axId val="1293414703"/>
+        <c:axId val="49323520"/>
+        <c:axId val="1193483856"/>
       </c:lineChart>
       <c:catAx>
-        <c:axId val="1319064351"/>
+        <c:axId val="49323520"/>
         <c:scaling>
           <c:orientation val="minMax"/>
         </c:scaling>
@@ -1876,7 +1876,7 @@
             <a:endParaRPr lang="de-DE"/>
           </a:p>
         </c:txPr>
-        <c:crossAx val="1293414703"/>
+        <c:crossAx val="1193483856"/>
         <c:crosses val="autoZero"/>
         <c:auto val="1"/>
         <c:lblAlgn val="ctr"/>
@@ -1886,7 +1886,7 @@
         <c:noMultiLvlLbl val="0"/>
       </c:catAx>
       <c:valAx>
-        <c:axId val="1293414703"/>
+        <c:axId val="1193483856"/>
         <c:scaling>
           <c:orientation val="minMax"/>
         </c:scaling>
@@ -1937,7 +1937,7 @@
             <a:endParaRPr lang="de-DE"/>
           </a:p>
         </c:txPr>
-        <c:crossAx val="1319064351"/>
+        <c:crossAx val="49323520"/>
         <c:crosses val="autoZero"/>
         <c:crossBetween val="between"/>
         <c:dispUnits>
@@ -2147,7 +2147,7 @@
           </c:val>
           <c:extLst>
             <c:ext xmlns:c16="http://schemas.microsoft.com/office/drawing/2014/chart" uri="{C3380CC4-5D6E-409C-BE32-E72D297353CC}">
-              <c16:uniqueId val="{00000000-BF6C-451D-AA6B-2A2846B9DFE2}"/>
+              <c16:uniqueId val="{00000000-6EF6-4809-856B-8EA1D231904A}"/>
             </c:ext>
           </c:extLst>
         </c:ser>
@@ -2161,11 +2161,11 @@
         </c:dLbls>
         <c:gapWidth val="219"/>
         <c:overlap val="-27"/>
-        <c:axId val="762693599"/>
-        <c:axId val="1293417103"/>
+        <c:axId val="49307744"/>
+        <c:axId val="1193478576"/>
       </c:barChart>
       <c:dateAx>
-        <c:axId val="762693599"/>
+        <c:axId val="49307744"/>
         <c:scaling>
           <c:orientation val="minMax"/>
         </c:scaling>
@@ -2208,14 +2208,14 @@
             <a:endParaRPr lang="de-DE"/>
           </a:p>
         </c:txPr>
-        <c:crossAx val="1293417103"/>
+        <c:crossAx val="1193478576"/>
         <c:crosses val="autoZero"/>
         <c:auto val="0"/>
         <c:lblOffset val="100"/>
         <c:baseTimeUnit val="months"/>
       </c:dateAx>
       <c:valAx>
-        <c:axId val="1293417103"/>
+        <c:axId val="1193478576"/>
         <c:scaling>
           <c:orientation val="minMax"/>
         </c:scaling>
@@ -2266,7 +2266,7 @@
             <a:endParaRPr lang="de-DE"/>
           </a:p>
         </c:txPr>
-        <c:crossAx val="762693599"/>
+        <c:crossAx val="49307744"/>
         <c:crosses val="autoZero"/>
         <c:crossBetween val="between"/>
       </c:valAx>
@@ -2539,7 +2539,7 @@
           </c:val>
           <c:extLst>
             <c:ext xmlns:c16="http://schemas.microsoft.com/office/drawing/2014/chart" uri="{C3380CC4-5D6E-409C-BE32-E72D297353CC}">
-              <c16:uniqueId val="{00000000-E6DB-4114-9782-40588D0A98A6}"/>
+              <c16:uniqueId val="{00000000-A7F0-4FCA-A3FF-97B46DA82327}"/>
             </c:ext>
           </c:extLst>
         </c:ser>
@@ -2838,7 +2838,7 @@
           </c:val>
           <c:extLst>
             <c:ext xmlns:c16="http://schemas.microsoft.com/office/drawing/2014/chart" uri="{C3380CC4-5D6E-409C-BE32-E72D297353CC}">
-              <c16:uniqueId val="{00000000-19DA-45BD-9B55-6D1D20519AED}"/>
+              <c16:uniqueId val="{00000000-4D23-4B0E-9467-BFB82660AAFA}"/>
             </c:ext>
           </c:extLst>
         </c:ser>
@@ -3022,7 +3022,7 @@
             </c:spPr>
             <c:extLst>
               <c:ext xmlns:c16="http://schemas.microsoft.com/office/drawing/2014/chart" uri="{C3380CC4-5D6E-409C-BE32-E72D297353CC}">
-                <c16:uniqueId val="{00000001-B93C-4005-941A-8028D2A0672E}"/>
+                <c16:uniqueId val="{00000001-6BAE-440B-B6E0-77F1BD464184}"/>
               </c:ext>
             </c:extLst>
           </c:dPt>
@@ -3042,7 +3042,7 @@
             </c:spPr>
             <c:extLst>
               <c:ext xmlns:c16="http://schemas.microsoft.com/office/drawing/2014/chart" uri="{C3380CC4-5D6E-409C-BE32-E72D297353CC}">
-                <c16:uniqueId val="{00000002-B93C-4005-941A-8028D2A0672E}"/>
+                <c16:uniqueId val="{00000002-6BAE-440B-B6E0-77F1BD464184}"/>
               </c:ext>
             </c:extLst>
           </c:dPt>
@@ -3062,7 +3062,7 @@
             </c:spPr>
             <c:extLst>
               <c:ext xmlns:c16="http://schemas.microsoft.com/office/drawing/2014/chart" uri="{C3380CC4-5D6E-409C-BE32-E72D297353CC}">
-                <c16:uniqueId val="{00000003-B93C-4005-941A-8028D2A0672E}"/>
+                <c16:uniqueId val="{00000003-6BAE-440B-B6E0-77F1BD464184}"/>
               </c:ext>
             </c:extLst>
           </c:dPt>
@@ -3130,7 +3130,7 @@
               <c:extLst>
                 <c:ext xmlns:c15="http://schemas.microsoft.com/office/drawing/2012/chart" uri="{CE6537A1-D6FC-4f65-9D91-7224C49458BB}"/>
                 <c:ext xmlns:c16="http://schemas.microsoft.com/office/drawing/2014/chart" uri="{C3380CC4-5D6E-409C-BE32-E72D297353CC}">
-                  <c16:uniqueId val="{00000001-B93C-4005-941A-8028D2A0672E}"/>
+                  <c16:uniqueId val="{00000001-6BAE-440B-B6E0-77F1BD464184}"/>
                 </c:ext>
               </c:extLst>
             </c:dLbl>
@@ -3152,7 +3152,7 @@
               <c:extLst>
                 <c:ext xmlns:c15="http://schemas.microsoft.com/office/drawing/2012/chart" uri="{CE6537A1-D6FC-4f65-9D91-7224C49458BB}"/>
                 <c:ext xmlns:c16="http://schemas.microsoft.com/office/drawing/2014/chart" uri="{C3380CC4-5D6E-409C-BE32-E72D297353CC}">
-                  <c16:uniqueId val="{00000002-B93C-4005-941A-8028D2A0672E}"/>
+                  <c16:uniqueId val="{00000002-6BAE-440B-B6E0-77F1BD464184}"/>
                 </c:ext>
               </c:extLst>
             </c:dLbl>
@@ -3174,7 +3174,7 @@
               <c:extLst>
                 <c:ext xmlns:c15="http://schemas.microsoft.com/office/drawing/2012/chart" uri="{CE6537A1-D6FC-4f65-9D91-7224C49458BB}"/>
                 <c:ext xmlns:c16="http://schemas.microsoft.com/office/drawing/2014/chart" uri="{C3380CC4-5D6E-409C-BE32-E72D297353CC}">
-                  <c16:uniqueId val="{00000003-B93C-4005-941A-8028D2A0672E}"/>
+                  <c16:uniqueId val="{00000003-6BAE-440B-B6E0-77F1BD464184}"/>
                 </c:ext>
               </c:extLst>
             </c:dLbl>
@@ -3288,7 +3288,7 @@
           </c:val>
           <c:extLst>
             <c:ext xmlns:c16="http://schemas.microsoft.com/office/drawing/2014/chart" uri="{C3380CC4-5D6E-409C-BE32-E72D297353CC}">
-              <c16:uniqueId val="{00000000-B93C-4005-941A-8028D2A0672E}"/>
+              <c16:uniqueId val="{00000000-6BAE-440B-B6E0-77F1BD464184}"/>
             </c:ext>
           </c:extLst>
         </c:ser>
@@ -3507,7 +3507,7 @@
           </c:val>
           <c:extLst>
             <c:ext xmlns:c16="http://schemas.microsoft.com/office/drawing/2014/chart" uri="{C3380CC4-5D6E-409C-BE32-E72D297353CC}">
-              <c16:uniqueId val="{00000000-2D78-4C18-9ACC-D4B19181B82F}"/>
+              <c16:uniqueId val="{00000000-21DE-4DEF-84CC-ABF7B6A94DDD}"/>
             </c:ext>
           </c:extLst>
         </c:ser>
@@ -3535,6 +3535,78 @@
             <a:effectLst/>
           </c:spPr>
           <c:invertIfNegative val="0"/>
+          <c:dLbls>
+            <c:dLbl>
+              <c:idx val="2"/>
+              <c:tx>
+                <c:rich>
+                  <a:bodyPr/>
+                  <a:lstStyle/>
+                  <a:p>
+                    <a:r>
+                      <a:rPr lang="de-DE"/>
+                      <a:t>Own text</a:t>
+                    </a:r>
+                  </a:p>
+                </c:rich>
+              </c:tx>
+              <c:showLegendKey val="0"/>
+              <c:showVal val="1"/>
+              <c:showCatName val="0"/>
+              <c:showSerName val="0"/>
+              <c:showPercent val="0"/>
+              <c:showBubbleSize val="0"/>
+              <c:extLst>
+                <c:ext xmlns:c15="http://schemas.microsoft.com/office/drawing/2012/chart" uri="{CE6537A1-D6FC-4f65-9D91-7224C49458BB}">
+                  <c15:showDataLabelsRange val="0"/>
+                </c:ext>
+                <c:ext xmlns:c16="http://schemas.microsoft.com/office/drawing/2014/chart" uri="{C3380CC4-5D6E-409C-BE32-E72D297353CC}">
+                  <c16:uniqueId val="{00000003-21DE-4DEF-84CC-ABF7B6A94DDD}"/>
+                </c:ext>
+              </c:extLst>
+            </c:dLbl>
+            <c:spPr>
+              <a:noFill/>
+              <a:ln>
+                <a:noFill/>
+              </a:ln>
+              <a:effectLst/>
+            </c:spPr>
+            <c:txPr>
+              <a:bodyPr rot="0" spcFirstLastPara="1" vertOverflow="ellipsis" vert="horz" wrap="square" lIns="38100" tIns="19050" rIns="38100" bIns="19050" anchor="ctr" anchorCtr="1">
+                <a:spAutoFit/>
+              </a:bodyPr>
+              <a:lstStyle/>
+              <a:p>
+                <a:pPr>
+                  <a:defRPr sz="1197" b="0" i="0" u="none" strike="noStrike" kern="1200" baseline="0">
+                    <a:solidFill>
+                      <a:schemeClr val="tx1">
+                        <a:lumMod val="75000"/>
+                        <a:lumOff val="25000"/>
+                      </a:schemeClr>
+                    </a:solidFill>
+                    <a:latin typeface="+mn-lt"/>
+                    <a:ea typeface="+mn-ea"/>
+                    <a:cs typeface="+mn-cs"/>
+                  </a:defRPr>
+                </a:pPr>
+                <a:endParaRPr lang="de-DE"/>
+              </a:p>
+            </c:txPr>
+            <c:showLegendKey val="0"/>
+            <c:showVal val="1"/>
+            <c:showCatName val="0"/>
+            <c:showSerName val="0"/>
+            <c:showPercent val="0"/>
+            <c:showBubbleSize val="0"/>
+            <c:showLeaderLines val="0"/>
+            <c:extLst>
+              <c:ext xmlns:c15="http://schemas.microsoft.com/office/drawing/2012/chart" uri="{CE6537A1-D6FC-4f65-9D91-7224C49458BB}">
+                <c15:showLeaderLines val="0"/>
+              </c:ext>
+            </c:extLst>
+          </c:dLbls>
           <c:cat>
             <c:strRef>
               <c:f>Tabelle1!$A$2:$A$5</c:f>
@@ -3578,7 +3650,7 @@
           </c:val>
           <c:extLst>
             <c:ext xmlns:c16="http://schemas.microsoft.com/office/drawing/2014/chart" uri="{C3380CC4-5D6E-409C-BE32-E72D297353CC}">
-              <c16:uniqueId val="{00000001-2D78-4C18-9ACC-D4B19181B82F}"/>
+              <c16:uniqueId val="{00000001-21DE-4DEF-84CC-ABF7B6A94DDD}"/>
             </c:ext>
           </c:extLst>
         </c:ser>
@@ -3649,7 +3721,7 @@
           </c:val>
           <c:extLst>
             <c:ext xmlns:c16="http://schemas.microsoft.com/office/drawing/2014/chart" uri="{C3380CC4-5D6E-409C-BE32-E72D297353CC}">
-              <c16:uniqueId val="{00000002-2D78-4C18-9ACC-D4B19181B82F}"/>
+              <c16:uniqueId val="{00000002-21DE-4DEF-84CC-ABF7B6A94DDD}"/>
             </c:ext>
           </c:extLst>
         </c:ser>
@@ -3662,11 +3734,11 @@
           <c:showBubbleSize val="0"/>
         </c:dLbls>
         <c:gapWidth val="182"/>
-        <c:axId val="1529857184"/>
-        <c:axId val="1293502063"/>
+        <c:axId val="7288768"/>
+        <c:axId val="1193316816"/>
       </c:barChart>
       <c:catAx>
-        <c:axId val="1529857184"/>
+        <c:axId val="7288768"/>
         <c:scaling>
           <c:orientation val="minMax"/>
         </c:scaling>
@@ -3709,7 +3781,7 @@
             <a:endParaRPr lang="de-DE"/>
           </a:p>
         </c:txPr>
-        <c:crossAx val="1293502063"/>
+        <c:crossAx val="1193316816"/>
         <c:crosses val="autoZero"/>
         <c:auto val="1"/>
         <c:lblAlgn val="ctr"/>
@@ -3717,7 +3789,7 @@
         <c:noMultiLvlLbl val="0"/>
       </c:catAx>
       <c:valAx>
-        <c:axId val="1293502063"/>
+        <c:axId val="1193316816"/>
         <c:scaling>
           <c:orientation val="minMax"/>
         </c:scaling>
@@ -3768,7 +3840,7 @@
             <a:endParaRPr lang="de-DE"/>
           </a:p>
         </c:txPr>
-        <c:crossAx val="1529857184"/>
+        <c:crossAx val="7288768"/>
         <c:crosses val="autoZero"/>
         <c:crossBetween val="between"/>
       </c:valAx>
@@ -3933,7 +4005,7 @@
           </c:val>
           <c:extLst>
             <c:ext xmlns:c16="http://schemas.microsoft.com/office/drawing/2014/chart" uri="{C3380CC4-5D6E-409C-BE32-E72D297353CC}">
-              <c16:uniqueId val="{00000000-F2AA-449A-A273-A02BACD51C5A}"/>
+              <c16:uniqueId val="{00000000-D815-4B43-AE13-B0677E3EDC61}"/>
             </c:ext>
           </c:extLst>
         </c:ser>
@@ -4004,7 +4076,7 @@
           </c:val>
           <c:extLst>
             <c:ext xmlns:c16="http://schemas.microsoft.com/office/drawing/2014/chart" uri="{C3380CC4-5D6E-409C-BE32-E72D297353CC}">
-              <c16:uniqueId val="{00000001-F2AA-449A-A273-A02BACD51C5A}"/>
+              <c16:uniqueId val="{00000001-D815-4B43-AE13-B0677E3EDC61}"/>
             </c:ext>
           </c:extLst>
         </c:ser>
@@ -4075,7 +4147,7 @@
           </c:val>
           <c:extLst>
             <c:ext xmlns:c16="http://schemas.microsoft.com/office/drawing/2014/chart" uri="{C3380CC4-5D6E-409C-BE32-E72D297353CC}">
-              <c16:uniqueId val="{00000002-F2AA-449A-A273-A02BACD51C5A}"/>
+              <c16:uniqueId val="{00000002-D815-4B43-AE13-B0677E3EDC61}"/>
             </c:ext>
           </c:extLst>
         </c:ser>
@@ -4089,11 +4161,11 @@
         </c:dLbls>
         <c:gapWidth val="219"/>
         <c:overlap val="-27"/>
-        <c:axId val="1529851152"/>
-        <c:axId val="1293512623"/>
+        <c:axId val="9922928"/>
+        <c:axId val="1193309616"/>
       </c:barChart>
       <c:catAx>
-        <c:axId val="1529851152"/>
+        <c:axId val="9922928"/>
         <c:scaling>
           <c:orientation val="minMax"/>
         </c:scaling>
@@ -4136,7 +4208,7 @@
             <a:endParaRPr lang="de-DE"/>
           </a:p>
         </c:txPr>
-        <c:crossAx val="1293512623"/>
+        <c:crossAx val="1193309616"/>
         <c:crosses val="autoZero"/>
         <c:auto val="1"/>
         <c:lblAlgn val="ctr"/>
@@ -4144,7 +4216,7 @@
         <c:noMultiLvlLbl val="0"/>
       </c:catAx>
       <c:valAx>
-        <c:axId val="1293512623"/>
+        <c:axId val="1193309616"/>
         <c:scaling>
           <c:orientation val="minMax"/>
         </c:scaling>
@@ -4195,7 +4267,7 @@
             <a:endParaRPr lang="de-DE"/>
           </a:p>
         </c:txPr>
-        <c:crossAx val="1529851152"/>
+        <c:crossAx val="9922928"/>
         <c:crosses val="autoZero"/>
         <c:crossBetween val="between"/>
       </c:valAx>
@@ -4250,11 +4322,14 @@
     </c:extLst>
   </c:chart>
   <c:spPr>
-    <a:noFill/>
+    <a:solidFill>
+      <a:srgbClr val="F2F2F2"/>
+    </a:solidFill>
     <a:ln w="38100">
-      <a:noFill/>
+      <a:solidFill>
+        <a:srgbClr val="C00000"/>
+      </a:solidFill>
     </a:ln>
-    <a:effectLst/>
   </c:spPr>
   <c:txPr>
     <a:bodyPr/>
@@ -10376,7 +10451,7 @@
           <p:cNvPr id="2" name="Titel 1">
             <a:extLst>
               <a:ext uri="{FF2B5EF4-FFF2-40B4-BE49-F238E27FC236}">
-                <a16:creationId xmlns:a16="http://schemas.microsoft.com/office/drawing/2014/main" id="{C5EC9F1E-5580-D8E0-16FD-872062022832}"/>
+                <a16:creationId xmlns:a16="http://schemas.microsoft.com/office/drawing/2014/main" id="{0E19AFC3-E2A8-0DB5-FA14-964B6BD91643}"/>
               </a:ext>
             </a:extLst>
           </p:cNvPr>
@@ -10413,7 +10488,7 @@
           <p:cNvPr id="3" name="Untertitel 2">
             <a:extLst>
               <a:ext uri="{FF2B5EF4-FFF2-40B4-BE49-F238E27FC236}">
-                <a16:creationId xmlns:a16="http://schemas.microsoft.com/office/drawing/2014/main" id="{9705955A-DF0A-732A-14CE-AC123A971536}"/>
+                <a16:creationId xmlns:a16="http://schemas.microsoft.com/office/drawing/2014/main" id="{C1846205-EA0C-5F50-859D-C74B12E690C4}"/>
               </a:ext>
             </a:extLst>
           </p:cNvPr>
@@ -10483,7 +10558,7 @@
           <p:cNvPr id="4" name="Datumsplatzhalter 3">
             <a:extLst>
               <a:ext uri="{FF2B5EF4-FFF2-40B4-BE49-F238E27FC236}">
-                <a16:creationId xmlns:a16="http://schemas.microsoft.com/office/drawing/2014/main" id="{AD11646B-BAD1-1E65-E3D4-56E6866F1C14}"/>
+                <a16:creationId xmlns:a16="http://schemas.microsoft.com/office/drawing/2014/main" id="{EDA5AE3A-74CE-22FD-E5BA-EAAF42A3D420}"/>
               </a:ext>
             </a:extLst>
           </p:cNvPr>
@@ -10499,7 +10574,7 @@
           <a:bodyPr/>
           <a:lstStyle/>
           <a:p>
-            <a:fld id="{B4E8FD0B-BEC3-452C-A2F9-2CBD7A952C52}" type="datetimeFigureOut">
+            <a:fld id="{C9962047-E2C8-4734-A689-668B36BC6A1D}" type="datetimeFigureOut">
               <a:rPr lang="de-DE" smtClean="0"/>
               <a:t>09.10.2026</a:t>
             </a:fld>
@@ -10512,7 +10587,7 @@
           <p:cNvPr id="5" name="Fußzeilenplatzhalter 4">
             <a:extLst>
               <a:ext uri="{FF2B5EF4-FFF2-40B4-BE49-F238E27FC236}">
-                <a16:creationId xmlns:a16="http://schemas.microsoft.com/office/drawing/2014/main" id="{ADCA7B39-1263-62BF-50AE-A96DC6359B77}"/>
+                <a16:creationId xmlns:a16="http://schemas.microsoft.com/office/drawing/2014/main" id="{738389DF-8F8B-F67A-4E2E-0FBA7C6C2FAA}"/>
               </a:ext>
             </a:extLst>
           </p:cNvPr>
@@ -10537,7 +10612,7 @@
           <p:cNvPr id="6" name="Foliennummernplatzhalter 5">
             <a:extLst>
               <a:ext uri="{FF2B5EF4-FFF2-40B4-BE49-F238E27FC236}">
-                <a16:creationId xmlns:a16="http://schemas.microsoft.com/office/drawing/2014/main" id="{88E8EB8F-9DB9-2CC8-D8D0-64D0209EC077}"/>
+                <a16:creationId xmlns:a16="http://schemas.microsoft.com/office/drawing/2014/main" id="{E0B13E69-EB74-15BE-C901-50856BA54F44}"/>
               </a:ext>
             </a:extLst>
           </p:cNvPr>
@@ -10553,7 +10628,7 @@
           <a:bodyPr/>
           <a:lstStyle/>
           <a:p>
-            <a:fld id="{06CF1C40-8559-485A-BBC3-736EEB89885C}" type="slidenum">
+            <a:fld id="{377935EF-6752-464A-9B81-BA8CABB6107B}" type="slidenum">
               <a:rPr lang="de-DE" smtClean="0"/>
               <a:t>‹Nr.›</a:t>
             </a:fld>
@@ -10564,7 +10639,7 @@
     </p:spTree>
     <p:extLst>
       <p:ext uri="{BB962C8B-B14F-4D97-AF65-F5344CB8AC3E}">
-        <p14:creationId xmlns:p14="http://schemas.microsoft.com/office/powerpoint/2010/main" val="739931701"/>
+        <p14:creationId xmlns:p14="http://schemas.microsoft.com/office/powerpoint/2010/main" val="2394947834"/>
       </p:ext>
     </p:extLst>
   </p:cSld>
@@ -10596,7 +10671,7 @@
           <p:cNvPr id="2" name="Titel 1">
             <a:extLst>
               <a:ext uri="{FF2B5EF4-FFF2-40B4-BE49-F238E27FC236}">
-                <a16:creationId xmlns:a16="http://schemas.microsoft.com/office/drawing/2014/main" id="{BD89F417-D650-4FC9-2C74-1254088B0AD6}"/>
+                <a16:creationId xmlns:a16="http://schemas.microsoft.com/office/drawing/2014/main" id="{C4849DA7-7AED-0292-B6D9-40887B4DD5A8}"/>
               </a:ext>
             </a:extLst>
           </p:cNvPr>
@@ -10624,7 +10699,7 @@
           <p:cNvPr id="3" name="Vertikaler Textplatzhalter 2">
             <a:extLst>
               <a:ext uri="{FF2B5EF4-FFF2-40B4-BE49-F238E27FC236}">
-                <a16:creationId xmlns:a16="http://schemas.microsoft.com/office/drawing/2014/main" id="{CBE94306-47B2-761A-59F0-B48B49E1F2D6}"/>
+                <a16:creationId xmlns:a16="http://schemas.microsoft.com/office/drawing/2014/main" id="{19AFBBA2-E78A-ACF3-95CF-DD21CD9A5BDE}"/>
               </a:ext>
             </a:extLst>
           </p:cNvPr>
@@ -10681,7 +10756,7 @@
           <p:cNvPr id="4" name="Datumsplatzhalter 3">
             <a:extLst>
               <a:ext uri="{FF2B5EF4-FFF2-40B4-BE49-F238E27FC236}">
-                <a16:creationId xmlns:a16="http://schemas.microsoft.com/office/drawing/2014/main" id="{7D7D29D2-A7B7-54D7-8E38-702EE04B4DA0}"/>
+                <a16:creationId xmlns:a16="http://schemas.microsoft.com/office/drawing/2014/main" id="{D03AA1D4-2CCE-57D2-34F6-D5FC6F1499A8}"/>
               </a:ext>
             </a:extLst>
           </p:cNvPr>
@@ -10697,7 +10772,7 @@
           <a:bodyPr/>
           <a:lstStyle/>
           <a:p>
-            <a:fld id="{B4E8FD0B-BEC3-452C-A2F9-2CBD7A952C52}" type="datetimeFigureOut">
+            <a:fld id="{C9962047-E2C8-4734-A689-668B36BC6A1D}" type="datetimeFigureOut">
               <a:rPr lang="de-DE" smtClean="0"/>
               <a:t>09.10.2026</a:t>
             </a:fld>
@@ -10710,7 +10785,7 @@
           <p:cNvPr id="5" name="Fußzeilenplatzhalter 4">
             <a:extLst>
               <a:ext uri="{FF2B5EF4-FFF2-40B4-BE49-F238E27FC236}">
-                <a16:creationId xmlns:a16="http://schemas.microsoft.com/office/drawing/2014/main" id="{51D69989-6A14-6BDA-6B8D-9FBF22DA0346}"/>
+                <a16:creationId xmlns:a16="http://schemas.microsoft.com/office/drawing/2014/main" id="{C3CA4FBF-7890-AEBE-8904-11F0CDF1D7FF}"/>
               </a:ext>
             </a:extLst>
           </p:cNvPr>
@@ -10735,7 +10810,7 @@
           <p:cNvPr id="6" name="Foliennummernplatzhalter 5">
             <a:extLst>
               <a:ext uri="{FF2B5EF4-FFF2-40B4-BE49-F238E27FC236}">
-                <a16:creationId xmlns:a16="http://schemas.microsoft.com/office/drawing/2014/main" id="{D8BFBA7D-4102-34C2-E8BD-B3EFF6CC0EDE}"/>
+                <a16:creationId xmlns:a16="http://schemas.microsoft.com/office/drawing/2014/main" id="{376AB75F-77AB-FAB0-6AB7-06FA29349283}"/>
               </a:ext>
             </a:extLst>
           </p:cNvPr>
@@ -10751,7 +10826,7 @@
           <a:bodyPr/>
           <a:lstStyle/>
           <a:p>
-            <a:fld id="{06CF1C40-8559-485A-BBC3-736EEB89885C}" type="slidenum">
+            <a:fld id="{377935EF-6752-464A-9B81-BA8CABB6107B}" type="slidenum">
               <a:rPr lang="de-DE" smtClean="0"/>
               <a:t>‹Nr.›</a:t>
             </a:fld>
@@ -10762,7 +10837,7 @@
     </p:spTree>
     <p:extLst>
       <p:ext uri="{BB962C8B-B14F-4D97-AF65-F5344CB8AC3E}">
-        <p14:creationId xmlns:p14="http://schemas.microsoft.com/office/powerpoint/2010/main" val="503979405"/>
+        <p14:creationId xmlns:p14="http://schemas.microsoft.com/office/powerpoint/2010/main" val="3674571750"/>
       </p:ext>
     </p:extLst>
   </p:cSld>
@@ -10794,7 +10869,7 @@
           <p:cNvPr id="2" name="Vertikaler Titel 1">
             <a:extLst>
               <a:ext uri="{FF2B5EF4-FFF2-40B4-BE49-F238E27FC236}">
-                <a16:creationId xmlns:a16="http://schemas.microsoft.com/office/drawing/2014/main" id="{D0FD614E-F4FF-C2F8-D385-A0B876C3337E}"/>
+                <a16:creationId xmlns:a16="http://schemas.microsoft.com/office/drawing/2014/main" id="{61B5C6B4-CEB1-973A-B66F-DDF332725F9D}"/>
               </a:ext>
             </a:extLst>
           </p:cNvPr>
@@ -10827,7 +10902,7 @@
           <p:cNvPr id="3" name="Vertikaler Textplatzhalter 2">
             <a:extLst>
               <a:ext uri="{FF2B5EF4-FFF2-40B4-BE49-F238E27FC236}">
-                <a16:creationId xmlns:a16="http://schemas.microsoft.com/office/drawing/2014/main" id="{6ADB33A3-61D2-E35B-FEA2-C4F9CA26396D}"/>
+                <a16:creationId xmlns:a16="http://schemas.microsoft.com/office/drawing/2014/main" id="{13A9F277-C525-C6A8-1F77-74D63B364017}"/>
               </a:ext>
             </a:extLst>
           </p:cNvPr>
@@ -10889,7 +10964,7 @@
           <p:cNvPr id="4" name="Datumsplatzhalter 3">
             <a:extLst>
               <a:ext uri="{FF2B5EF4-FFF2-40B4-BE49-F238E27FC236}">
-                <a16:creationId xmlns:a16="http://schemas.microsoft.com/office/drawing/2014/main" id="{885BE9BD-5D74-6614-27D3-C3479CC09C4D}"/>
+                <a16:creationId xmlns:a16="http://schemas.microsoft.com/office/drawing/2014/main" id="{7408698F-AA60-FF9D-F9CA-419A9A43638C}"/>
               </a:ext>
             </a:extLst>
           </p:cNvPr>
@@ -10905,7 +10980,7 @@
           <a:bodyPr/>
           <a:lstStyle/>
           <a:p>
-            <a:fld id="{B4E8FD0B-BEC3-452C-A2F9-2CBD7A952C52}" type="datetimeFigureOut">
+            <a:fld id="{C9962047-E2C8-4734-A689-668B36BC6A1D}" type="datetimeFigureOut">
               <a:rPr lang="de-DE" smtClean="0"/>
               <a:t>09.10.2026</a:t>
             </a:fld>
@@ -10918,7 +10993,7 @@
           <p:cNvPr id="5" name="Fußzeilenplatzhalter 4">
             <a:extLst>
               <a:ext uri="{FF2B5EF4-FFF2-40B4-BE49-F238E27FC236}">
-                <a16:creationId xmlns:a16="http://schemas.microsoft.com/office/drawing/2014/main" id="{E1846674-6ACF-8E6D-AA92-A930D1D35111}"/>
+                <a16:creationId xmlns:a16="http://schemas.microsoft.com/office/drawing/2014/main" id="{8FBD0E1D-B72E-A129-CA21-69F1DBD6293F}"/>
               </a:ext>
             </a:extLst>
           </p:cNvPr>
@@ -10943,7 +11018,7 @@
           <p:cNvPr id="6" name="Foliennummernplatzhalter 5">
             <a:extLst>
               <a:ext uri="{FF2B5EF4-FFF2-40B4-BE49-F238E27FC236}">
-                <a16:creationId xmlns:a16="http://schemas.microsoft.com/office/drawing/2014/main" id="{D95DD264-BA10-ADCF-CE68-BEA6ECC9C1A1}"/>
+                <a16:creationId xmlns:a16="http://schemas.microsoft.com/office/drawing/2014/main" id="{688DD645-A71D-6926-E961-E7C2D7D31B18}"/>
               </a:ext>
             </a:extLst>
           </p:cNvPr>
@@ -10959,7 +11034,7 @@
           <a:bodyPr/>
           <a:lstStyle/>
           <a:p>
-            <a:fld id="{06CF1C40-8559-485A-BBC3-736EEB89885C}" type="slidenum">
+            <a:fld id="{377935EF-6752-464A-9B81-BA8CABB6107B}" type="slidenum">
               <a:rPr lang="de-DE" smtClean="0"/>
               <a:t>‹Nr.›</a:t>
             </a:fld>
@@ -10970,7 +11045,7 @@
     </p:spTree>
     <p:extLst>
       <p:ext uri="{BB962C8B-B14F-4D97-AF65-F5344CB8AC3E}">
-        <p14:creationId xmlns:p14="http://schemas.microsoft.com/office/powerpoint/2010/main" val="3020246724"/>
+        <p14:creationId xmlns:p14="http://schemas.microsoft.com/office/powerpoint/2010/main" val="2929395954"/>
       </p:ext>
     </p:extLst>
   </p:cSld>
@@ -11002,7 +11077,7 @@
           <p:cNvPr id="2" name="Titel 1">
             <a:extLst>
               <a:ext uri="{FF2B5EF4-FFF2-40B4-BE49-F238E27FC236}">
-                <a16:creationId xmlns:a16="http://schemas.microsoft.com/office/drawing/2014/main" id="{365F2B8B-9BF6-4B0F-6416-5E09376D3C43}"/>
+                <a16:creationId xmlns:a16="http://schemas.microsoft.com/office/drawing/2014/main" id="{61FB3DD5-27B6-8F7E-68A9-637A294793F8}"/>
               </a:ext>
             </a:extLst>
           </p:cNvPr>
@@ -11030,7 +11105,7 @@
           <p:cNvPr id="3" name="Inhaltsplatzhalter 2">
             <a:extLst>
               <a:ext uri="{FF2B5EF4-FFF2-40B4-BE49-F238E27FC236}">
-                <a16:creationId xmlns:a16="http://schemas.microsoft.com/office/drawing/2014/main" id="{A9CE7B19-ECEA-0901-E246-A6E5681218A2}"/>
+                <a16:creationId xmlns:a16="http://schemas.microsoft.com/office/drawing/2014/main" id="{6D158EB9-F8FF-D110-14AB-3C052A020577}"/>
               </a:ext>
             </a:extLst>
           </p:cNvPr>
@@ -11087,7 +11162,7 @@
           <p:cNvPr id="4" name="Datumsplatzhalter 3">
             <a:extLst>
               <a:ext uri="{FF2B5EF4-FFF2-40B4-BE49-F238E27FC236}">
-                <a16:creationId xmlns:a16="http://schemas.microsoft.com/office/drawing/2014/main" id="{4A104947-F0DB-0810-33F7-DFF1A4270D63}"/>
+                <a16:creationId xmlns:a16="http://schemas.microsoft.com/office/drawing/2014/main" id="{2140605A-56DD-BFF6-4334-653E0EDA353E}"/>
               </a:ext>
             </a:extLst>
           </p:cNvPr>
@@ -11103,7 +11178,7 @@
           <a:bodyPr/>
           <a:lstStyle/>
           <a:p>
-            <a:fld id="{B4E8FD0B-BEC3-452C-A2F9-2CBD7A952C52}" type="datetimeFigureOut">
+            <a:fld id="{C9962047-E2C8-4734-A689-668B36BC6A1D}" type="datetimeFigureOut">
               <a:rPr lang="de-DE" smtClean="0"/>
               <a:t>09.10.2026</a:t>
             </a:fld>
@@ -11116,7 +11191,7 @@
           <p:cNvPr id="5" name="Fußzeilenplatzhalter 4">
             <a:extLst>
               <a:ext uri="{FF2B5EF4-FFF2-40B4-BE49-F238E27FC236}">
-                <a16:creationId xmlns:a16="http://schemas.microsoft.com/office/drawing/2014/main" id="{8C5F5F15-2A0D-94FC-1C99-E889CBF02F75}"/>
+                <a16:creationId xmlns:a16="http://schemas.microsoft.com/office/drawing/2014/main" id="{6FC32648-F6AA-F1C2-99A2-218274DDF7A5}"/>
               </a:ext>
             </a:extLst>
           </p:cNvPr>
@@ -11141,7 +11216,7 @@
           <p:cNvPr id="6" name="Foliennummernplatzhalter 5">
             <a:extLst>
               <a:ext uri="{FF2B5EF4-FFF2-40B4-BE49-F238E27FC236}">
-                <a16:creationId xmlns:a16="http://schemas.microsoft.com/office/drawing/2014/main" id="{C279FD78-1D8E-4362-EC12-3AFC0FB8C2C4}"/>
+                <a16:creationId xmlns:a16="http://schemas.microsoft.com/office/drawing/2014/main" id="{00EFE42B-2473-9A30-2702-4DF340EE2D08}"/>
               </a:ext>
             </a:extLst>
           </p:cNvPr>
@@ -11157,7 +11232,7 @@
           <a:bodyPr/>
           <a:lstStyle/>
           <a:p>
-            <a:fld id="{06CF1C40-8559-485A-BBC3-736EEB89885C}" type="slidenum">
+            <a:fld id="{377935EF-6752-464A-9B81-BA8CABB6107B}" type="slidenum">
               <a:rPr lang="de-DE" smtClean="0"/>
               <a:t>‹Nr.›</a:t>
             </a:fld>
@@ -11168,7 +11243,7 @@
     </p:spTree>
     <p:extLst>
       <p:ext uri="{BB962C8B-B14F-4D97-AF65-F5344CB8AC3E}">
-        <p14:creationId xmlns:p14="http://schemas.microsoft.com/office/powerpoint/2010/main" val="918293886"/>
+        <p14:creationId xmlns:p14="http://schemas.microsoft.com/office/powerpoint/2010/main" val="426050687"/>
       </p:ext>
     </p:extLst>
   </p:cSld>
@@ -11200,7 +11275,7 @@
           <p:cNvPr id="2" name="Titel 1">
             <a:extLst>
               <a:ext uri="{FF2B5EF4-FFF2-40B4-BE49-F238E27FC236}">
-                <a16:creationId xmlns:a16="http://schemas.microsoft.com/office/drawing/2014/main" id="{43E6FD47-17CA-092F-39F7-956C5A553F0F}"/>
+                <a16:creationId xmlns:a16="http://schemas.microsoft.com/office/drawing/2014/main" id="{8348A74A-664C-4C2C-D379-5C858A3B255D}"/>
               </a:ext>
             </a:extLst>
           </p:cNvPr>
@@ -11237,7 +11312,7 @@
           <p:cNvPr id="3" name="Textplatzhalter 2">
             <a:extLst>
               <a:ext uri="{FF2B5EF4-FFF2-40B4-BE49-F238E27FC236}">
-                <a16:creationId xmlns:a16="http://schemas.microsoft.com/office/drawing/2014/main" id="{B7017595-20BC-4C00-2D41-BAC9FBC47256}"/>
+                <a16:creationId xmlns:a16="http://schemas.microsoft.com/office/drawing/2014/main" id="{F7C2EF23-F764-395D-3CFD-067C5959ED84}"/>
               </a:ext>
             </a:extLst>
           </p:cNvPr>
@@ -11362,7 +11437,7 @@
           <p:cNvPr id="4" name="Datumsplatzhalter 3">
             <a:extLst>
               <a:ext uri="{FF2B5EF4-FFF2-40B4-BE49-F238E27FC236}">
-                <a16:creationId xmlns:a16="http://schemas.microsoft.com/office/drawing/2014/main" id="{AB470668-1C68-60D8-58EF-A2BF3D45E337}"/>
+                <a16:creationId xmlns:a16="http://schemas.microsoft.com/office/drawing/2014/main" id="{388DA0E3-530D-1FE4-0EDF-C98C6AA3E857}"/>
               </a:ext>
             </a:extLst>
           </p:cNvPr>
@@ -11378,7 +11453,7 @@
           <a:bodyPr/>
           <a:lstStyle/>
           <a:p>
-            <a:fld id="{B4E8FD0B-BEC3-452C-A2F9-2CBD7A952C52}" type="datetimeFigureOut">
+            <a:fld id="{C9962047-E2C8-4734-A689-668B36BC6A1D}" type="datetimeFigureOut">
               <a:rPr lang="de-DE" smtClean="0"/>
               <a:t>09.10.2026</a:t>
             </a:fld>
@@ -11391,7 +11466,7 @@
           <p:cNvPr id="5" name="Fußzeilenplatzhalter 4">
             <a:extLst>
               <a:ext uri="{FF2B5EF4-FFF2-40B4-BE49-F238E27FC236}">
-                <a16:creationId xmlns:a16="http://schemas.microsoft.com/office/drawing/2014/main" id="{6C41BE4E-118A-D759-1FA0-200A86EB3927}"/>
+                <a16:creationId xmlns:a16="http://schemas.microsoft.com/office/drawing/2014/main" id="{634E895F-102F-88CC-0D58-64E8AB55B896}"/>
               </a:ext>
             </a:extLst>
           </p:cNvPr>
@@ -11416,7 +11491,7 @@
           <p:cNvPr id="6" name="Foliennummernplatzhalter 5">
             <a:extLst>
               <a:ext uri="{FF2B5EF4-FFF2-40B4-BE49-F238E27FC236}">
-                <a16:creationId xmlns:a16="http://schemas.microsoft.com/office/drawing/2014/main" id="{09DD1F21-C473-CDF9-080F-3238F795DED6}"/>
+                <a16:creationId xmlns:a16="http://schemas.microsoft.com/office/drawing/2014/main" id="{E31EB99E-A574-C128-D371-7EE6CE5E724E}"/>
               </a:ext>
             </a:extLst>
           </p:cNvPr>
@@ -11432,7 +11507,7 @@
           <a:bodyPr/>
           <a:lstStyle/>
           <a:p>
-            <a:fld id="{06CF1C40-8559-485A-BBC3-736EEB89885C}" type="slidenum">
+            <a:fld id="{377935EF-6752-464A-9B81-BA8CABB6107B}" type="slidenum">
               <a:rPr lang="de-DE" smtClean="0"/>
               <a:t>‹Nr.›</a:t>
             </a:fld>
@@ -11443,7 +11518,7 @@
     </p:spTree>
     <p:extLst>
       <p:ext uri="{BB962C8B-B14F-4D97-AF65-F5344CB8AC3E}">
-        <p14:creationId xmlns:p14="http://schemas.microsoft.com/office/powerpoint/2010/main" val="3515609582"/>
+        <p14:creationId xmlns:p14="http://schemas.microsoft.com/office/powerpoint/2010/main" val="1768514542"/>
       </p:ext>
     </p:extLst>
   </p:cSld>
@@ -11475,7 +11550,7 @@
           <p:cNvPr id="2" name="Titel 1">
             <a:extLst>
               <a:ext uri="{FF2B5EF4-FFF2-40B4-BE49-F238E27FC236}">
-                <a16:creationId xmlns:a16="http://schemas.microsoft.com/office/drawing/2014/main" id="{00B677F5-70D7-C905-543F-0AF0DD7DBB11}"/>
+                <a16:creationId xmlns:a16="http://schemas.microsoft.com/office/drawing/2014/main" id="{CC1E92D4-B7F2-72BC-B05B-F6BAFA631085}"/>
               </a:ext>
             </a:extLst>
           </p:cNvPr>
@@ -11503,7 +11578,7 @@
           <p:cNvPr id="3" name="Inhaltsplatzhalter 2">
             <a:extLst>
               <a:ext uri="{FF2B5EF4-FFF2-40B4-BE49-F238E27FC236}">
-                <a16:creationId xmlns:a16="http://schemas.microsoft.com/office/drawing/2014/main" id="{AC53D1F5-7020-E5E4-ED02-A6790629F958}"/>
+                <a16:creationId xmlns:a16="http://schemas.microsoft.com/office/drawing/2014/main" id="{8FBE7488-6420-F35D-0C79-FA4A43351BD5}"/>
               </a:ext>
             </a:extLst>
           </p:cNvPr>
@@ -11565,7 +11640,7 @@
           <p:cNvPr id="4" name="Inhaltsplatzhalter 3">
             <a:extLst>
               <a:ext uri="{FF2B5EF4-FFF2-40B4-BE49-F238E27FC236}">
-                <a16:creationId xmlns:a16="http://schemas.microsoft.com/office/drawing/2014/main" id="{18A7CC6E-5DE0-C62C-FBF7-FF7ED7CC73B8}"/>
+                <a16:creationId xmlns:a16="http://schemas.microsoft.com/office/drawing/2014/main" id="{208D87BB-9096-D5C7-3D69-61A7FAE26020}"/>
               </a:ext>
             </a:extLst>
           </p:cNvPr>
@@ -11627,7 +11702,7 @@
           <p:cNvPr id="5" name="Datumsplatzhalter 4">
             <a:extLst>
               <a:ext uri="{FF2B5EF4-FFF2-40B4-BE49-F238E27FC236}">
-                <a16:creationId xmlns:a16="http://schemas.microsoft.com/office/drawing/2014/main" id="{96AB99AB-FEC0-2AE8-16A2-49E497AD617C}"/>
+                <a16:creationId xmlns:a16="http://schemas.microsoft.com/office/drawing/2014/main" id="{9D92772D-6ABC-0E35-9415-D8C972A349B2}"/>
               </a:ext>
             </a:extLst>
           </p:cNvPr>
@@ -11643,7 +11718,7 @@
           <a:bodyPr/>
           <a:lstStyle/>
           <a:p>
-            <a:fld id="{B4E8FD0B-BEC3-452C-A2F9-2CBD7A952C52}" type="datetimeFigureOut">
+            <a:fld id="{C9962047-E2C8-4734-A689-668B36BC6A1D}" type="datetimeFigureOut">
               <a:rPr lang="de-DE" smtClean="0"/>
               <a:t>09.10.2026</a:t>
             </a:fld>
@@ -11656,7 +11731,7 @@
           <p:cNvPr id="6" name="Fußzeilenplatzhalter 5">
             <a:extLst>
               <a:ext uri="{FF2B5EF4-FFF2-40B4-BE49-F238E27FC236}">
-                <a16:creationId xmlns:a16="http://schemas.microsoft.com/office/drawing/2014/main" id="{869A92CD-0BD0-A058-38F1-D21D3802C897}"/>
+                <a16:creationId xmlns:a16="http://schemas.microsoft.com/office/drawing/2014/main" id="{6679E43D-3355-3D46-A3D4-099A5DF83AB0}"/>
               </a:ext>
             </a:extLst>
           </p:cNvPr>
@@ -11681,7 +11756,7 @@
           <p:cNvPr id="7" name="Foliennummernplatzhalter 6">
             <a:extLst>
               <a:ext uri="{FF2B5EF4-FFF2-40B4-BE49-F238E27FC236}">
-                <a16:creationId xmlns:a16="http://schemas.microsoft.com/office/drawing/2014/main" id="{124135F3-C779-303A-919D-EC7CD0D9EB03}"/>
+                <a16:creationId xmlns:a16="http://schemas.microsoft.com/office/drawing/2014/main" id="{25CD6765-E1CA-00F0-65D7-4567100FFB1A}"/>
               </a:ext>
             </a:extLst>
           </p:cNvPr>
@@ -11697,7 +11772,7 @@
           <a:bodyPr/>
           <a:lstStyle/>
           <a:p>
-            <a:fld id="{06CF1C40-8559-485A-BBC3-736EEB89885C}" type="slidenum">
+            <a:fld id="{377935EF-6752-464A-9B81-BA8CABB6107B}" type="slidenum">
               <a:rPr lang="de-DE" smtClean="0"/>
               <a:t>‹Nr.›</a:t>
             </a:fld>
@@ -11708,7 +11783,7 @@
     </p:spTree>
     <p:extLst>
       <p:ext uri="{BB962C8B-B14F-4D97-AF65-F5344CB8AC3E}">
-        <p14:creationId xmlns:p14="http://schemas.microsoft.com/office/powerpoint/2010/main" val="2898741277"/>
+        <p14:creationId xmlns:p14="http://schemas.microsoft.com/office/powerpoint/2010/main" val="1895703322"/>
       </p:ext>
     </p:extLst>
   </p:cSld>
@@ -11740,7 +11815,7 @@
           <p:cNvPr id="2" name="Titel 1">
             <a:extLst>
               <a:ext uri="{FF2B5EF4-FFF2-40B4-BE49-F238E27FC236}">
-                <a16:creationId xmlns:a16="http://schemas.microsoft.com/office/drawing/2014/main" id="{CEAFFA45-AC0B-4464-D6A2-50E6A9953F96}"/>
+                <a16:creationId xmlns:a16="http://schemas.microsoft.com/office/drawing/2014/main" id="{35AEEBCF-22B6-3F98-49F5-B9F2DDB8EFC6}"/>
               </a:ext>
             </a:extLst>
           </p:cNvPr>
@@ -11773,7 +11848,7 @@
           <p:cNvPr id="3" name="Textplatzhalter 2">
             <a:extLst>
               <a:ext uri="{FF2B5EF4-FFF2-40B4-BE49-F238E27FC236}">
-                <a16:creationId xmlns:a16="http://schemas.microsoft.com/office/drawing/2014/main" id="{296432AF-8787-B929-9568-44B386BAAC6D}"/>
+                <a16:creationId xmlns:a16="http://schemas.microsoft.com/office/drawing/2014/main" id="{A5F20308-E00A-7CAD-AC4D-CE341DABCCFE}"/>
               </a:ext>
             </a:extLst>
           </p:cNvPr>
@@ -11844,7 +11919,7 @@
           <p:cNvPr id="4" name="Inhaltsplatzhalter 3">
             <a:extLst>
               <a:ext uri="{FF2B5EF4-FFF2-40B4-BE49-F238E27FC236}">
-                <a16:creationId xmlns:a16="http://schemas.microsoft.com/office/drawing/2014/main" id="{8905409D-90DF-E1A2-2226-BE73822DED43}"/>
+                <a16:creationId xmlns:a16="http://schemas.microsoft.com/office/drawing/2014/main" id="{0091D037-9438-722B-9293-9ADE566ACF3D}"/>
               </a:ext>
             </a:extLst>
           </p:cNvPr>
@@ -11906,7 +11981,7 @@
           <p:cNvPr id="5" name="Textplatzhalter 4">
             <a:extLst>
               <a:ext uri="{FF2B5EF4-FFF2-40B4-BE49-F238E27FC236}">
-                <a16:creationId xmlns:a16="http://schemas.microsoft.com/office/drawing/2014/main" id="{8BE0BD9E-0D68-EDA3-D367-6C680CA29B44}"/>
+                <a16:creationId xmlns:a16="http://schemas.microsoft.com/office/drawing/2014/main" id="{FA259019-FB91-8673-0A6B-8F7EAA389946}"/>
               </a:ext>
             </a:extLst>
           </p:cNvPr>
@@ -11977,7 +12052,7 @@
           <p:cNvPr id="6" name="Inhaltsplatzhalter 5">
             <a:extLst>
               <a:ext uri="{FF2B5EF4-FFF2-40B4-BE49-F238E27FC236}">
-                <a16:creationId xmlns:a16="http://schemas.microsoft.com/office/drawing/2014/main" id="{84B3A2B7-7ADA-2773-CAF5-BFC4D3EF963A}"/>
+                <a16:creationId xmlns:a16="http://schemas.microsoft.com/office/drawing/2014/main" id="{A7535323-9854-90E8-BFF9-0AC471B1A13D}"/>
               </a:ext>
             </a:extLst>
           </p:cNvPr>
@@ -12039,7 +12114,7 @@
           <p:cNvPr id="7" name="Datumsplatzhalter 6">
             <a:extLst>
               <a:ext uri="{FF2B5EF4-FFF2-40B4-BE49-F238E27FC236}">
-                <a16:creationId xmlns:a16="http://schemas.microsoft.com/office/drawing/2014/main" id="{BDC3BCC1-DB9F-0FEA-B120-A49B0AC9E53B}"/>
+                <a16:creationId xmlns:a16="http://schemas.microsoft.com/office/drawing/2014/main" id="{5E3BF176-98A9-141F-6BAB-A109C3C63F64}"/>
               </a:ext>
             </a:extLst>
           </p:cNvPr>
@@ -12055,7 +12130,7 @@
           <a:bodyPr/>
           <a:lstStyle/>
           <a:p>
-            <a:fld id="{B4E8FD0B-BEC3-452C-A2F9-2CBD7A952C52}" type="datetimeFigureOut">
+            <a:fld id="{C9962047-E2C8-4734-A689-668B36BC6A1D}" type="datetimeFigureOut">
               <a:rPr lang="de-DE" smtClean="0"/>
               <a:t>09.10.2026</a:t>
             </a:fld>
@@ -12068,7 +12143,7 @@
           <p:cNvPr id="8" name="Fußzeilenplatzhalter 7">
             <a:extLst>
               <a:ext uri="{FF2B5EF4-FFF2-40B4-BE49-F238E27FC236}">
-                <a16:creationId xmlns:a16="http://schemas.microsoft.com/office/drawing/2014/main" id="{7F23B08C-46E3-8818-918C-7EA56543B557}"/>
+                <a16:creationId xmlns:a16="http://schemas.microsoft.com/office/drawing/2014/main" id="{E45AE3F5-3FEB-498F-2F35-BF711F86D22B}"/>
               </a:ext>
             </a:extLst>
           </p:cNvPr>
@@ -12093,7 +12168,7 @@
           <p:cNvPr id="9" name="Foliennummernplatzhalter 8">
             <a:extLst>
               <a:ext uri="{FF2B5EF4-FFF2-40B4-BE49-F238E27FC236}">
-                <a16:creationId xmlns:a16="http://schemas.microsoft.com/office/drawing/2014/main" id="{730179BD-1E14-8BA4-24CD-330CD91A5F7E}"/>
+                <a16:creationId xmlns:a16="http://schemas.microsoft.com/office/drawing/2014/main" id="{2D456F18-35F1-5141-B2C7-101CE2210F35}"/>
               </a:ext>
             </a:extLst>
           </p:cNvPr>
@@ -12109,7 +12184,7 @@
           <a:bodyPr/>
           <a:lstStyle/>
           <a:p>
-            <a:fld id="{06CF1C40-8559-485A-BBC3-736EEB89885C}" type="slidenum">
+            <a:fld id="{377935EF-6752-464A-9B81-BA8CABB6107B}" type="slidenum">
               <a:rPr lang="de-DE" smtClean="0"/>
               <a:t>‹Nr.›</a:t>
             </a:fld>
@@ -12120,7 +12195,7 @@
     </p:spTree>
     <p:extLst>
       <p:ext uri="{BB962C8B-B14F-4D97-AF65-F5344CB8AC3E}">
-        <p14:creationId xmlns:p14="http://schemas.microsoft.com/office/powerpoint/2010/main" val="1828910930"/>
+        <p14:creationId xmlns:p14="http://schemas.microsoft.com/office/powerpoint/2010/main" val="3958652924"/>
       </p:ext>
     </p:extLst>
   </p:cSld>
@@ -12152,7 +12227,7 @@
           <p:cNvPr id="2" name="Titel 1">
             <a:extLst>
               <a:ext uri="{FF2B5EF4-FFF2-40B4-BE49-F238E27FC236}">
-                <a16:creationId xmlns:a16="http://schemas.microsoft.com/office/drawing/2014/main" id="{5C2A7B97-8DEF-175E-3F3D-E5D2135C449F}"/>
+                <a16:creationId xmlns:a16="http://schemas.microsoft.com/office/drawing/2014/main" id="{0CD36973-E164-7F2F-ADE1-74B16AAC3BA9}"/>
               </a:ext>
             </a:extLst>
           </p:cNvPr>
@@ -12180,7 +12255,7 @@
           <p:cNvPr id="3" name="Datumsplatzhalter 2">
             <a:extLst>
               <a:ext uri="{FF2B5EF4-FFF2-40B4-BE49-F238E27FC236}">
-                <a16:creationId xmlns:a16="http://schemas.microsoft.com/office/drawing/2014/main" id="{42567BD4-FDB9-5DAF-20E9-9BAD2B814CE4}"/>
+                <a16:creationId xmlns:a16="http://schemas.microsoft.com/office/drawing/2014/main" id="{8749C6C8-1B0E-7363-2D9E-AC01F791350A}"/>
               </a:ext>
             </a:extLst>
           </p:cNvPr>
@@ -12196,7 +12271,7 @@
           <a:bodyPr/>
           <a:lstStyle/>
           <a:p>
-            <a:fld id="{B4E8FD0B-BEC3-452C-A2F9-2CBD7A952C52}" type="datetimeFigureOut">
+            <a:fld id="{C9962047-E2C8-4734-A689-668B36BC6A1D}" type="datetimeFigureOut">
               <a:rPr lang="de-DE" smtClean="0"/>
               <a:t>09.10.2026</a:t>
             </a:fld>
@@ -12209,7 +12284,7 @@
           <p:cNvPr id="4" name="Fußzeilenplatzhalter 3">
             <a:extLst>
               <a:ext uri="{FF2B5EF4-FFF2-40B4-BE49-F238E27FC236}">
-                <a16:creationId xmlns:a16="http://schemas.microsoft.com/office/drawing/2014/main" id="{EDAC47A1-F9EE-AF3F-8479-D68EA5A81308}"/>
+                <a16:creationId xmlns:a16="http://schemas.microsoft.com/office/drawing/2014/main" id="{96B94F9A-7AC6-02E3-C999-C2446E8F6EEE}"/>
               </a:ext>
             </a:extLst>
           </p:cNvPr>
@@ -12234,7 +12309,7 @@
           <p:cNvPr id="5" name="Foliennummernplatzhalter 4">
             <a:extLst>
               <a:ext uri="{FF2B5EF4-FFF2-40B4-BE49-F238E27FC236}">
-                <a16:creationId xmlns:a16="http://schemas.microsoft.com/office/drawing/2014/main" id="{9DDFD52D-8BA3-393A-6DF4-BC8F350662E7}"/>
+                <a16:creationId xmlns:a16="http://schemas.microsoft.com/office/drawing/2014/main" id="{07B18CDE-6776-F703-01D8-B5CE5256F1EB}"/>
               </a:ext>
             </a:extLst>
           </p:cNvPr>
@@ -12250,7 +12325,7 @@
           <a:bodyPr/>
           <a:lstStyle/>
           <a:p>
-            <a:fld id="{06CF1C40-8559-485A-BBC3-736EEB89885C}" type="slidenum">
+            <a:fld id="{377935EF-6752-464A-9B81-BA8CABB6107B}" type="slidenum">
               <a:rPr lang="de-DE" smtClean="0"/>
               <a:t>‹Nr.›</a:t>
             </a:fld>
@@ -12261,7 +12336,7 @@
     </p:spTree>
     <p:extLst>
       <p:ext uri="{BB962C8B-B14F-4D97-AF65-F5344CB8AC3E}">
-        <p14:creationId xmlns:p14="http://schemas.microsoft.com/office/powerpoint/2010/main" val="273121254"/>
+        <p14:creationId xmlns:p14="http://schemas.microsoft.com/office/powerpoint/2010/main" val="169783146"/>
       </p:ext>
     </p:extLst>
   </p:cSld>
@@ -12293,7 +12368,7 @@
           <p:cNvPr id="2" name="Datumsplatzhalter 1">
             <a:extLst>
               <a:ext uri="{FF2B5EF4-FFF2-40B4-BE49-F238E27FC236}">
-                <a16:creationId xmlns:a16="http://schemas.microsoft.com/office/drawing/2014/main" id="{D0F1519A-1A86-3D15-6FF7-15162C7868DE}"/>
+                <a16:creationId xmlns:a16="http://schemas.microsoft.com/office/drawing/2014/main" id="{158E9554-FA0B-F30E-7A88-E7B924E35B11}"/>
               </a:ext>
             </a:extLst>
           </p:cNvPr>
@@ -12309,7 +12384,7 @@
           <a:bodyPr/>
           <a:lstStyle/>
           <a:p>
-            <a:fld id="{B4E8FD0B-BEC3-452C-A2F9-2CBD7A952C52}" type="datetimeFigureOut">
+            <a:fld id="{C9962047-E2C8-4734-A689-668B36BC6A1D}" type="datetimeFigureOut">
               <a:rPr lang="de-DE" smtClean="0"/>
               <a:t>09.10.2026</a:t>
             </a:fld>
@@ -12322,7 +12397,7 @@
           <p:cNvPr id="3" name="Fußzeilenplatzhalter 2">
             <a:extLst>
               <a:ext uri="{FF2B5EF4-FFF2-40B4-BE49-F238E27FC236}">
-                <a16:creationId xmlns:a16="http://schemas.microsoft.com/office/drawing/2014/main" id="{B7D0363A-58A0-CA64-D74D-C0203C17328E}"/>
+                <a16:creationId xmlns:a16="http://schemas.microsoft.com/office/drawing/2014/main" id="{3F52906A-5827-DA11-1C5B-D48FAF9FFE0E}"/>
               </a:ext>
             </a:extLst>
           </p:cNvPr>
@@ -12347,7 +12422,7 @@
           <p:cNvPr id="4" name="Foliennummernplatzhalter 3">
             <a:extLst>
               <a:ext uri="{FF2B5EF4-FFF2-40B4-BE49-F238E27FC236}">
-                <a16:creationId xmlns:a16="http://schemas.microsoft.com/office/drawing/2014/main" id="{EB4CF888-C865-B7F7-6FCC-7B8400AAB56F}"/>
+                <a16:creationId xmlns:a16="http://schemas.microsoft.com/office/drawing/2014/main" id="{8F9DC859-2261-56C1-6BC7-8A8A748F9A52}"/>
               </a:ext>
             </a:extLst>
           </p:cNvPr>
@@ -12363,7 +12438,7 @@
           <a:bodyPr/>
           <a:lstStyle/>
           <a:p>
-            <a:fld id="{06CF1C40-8559-485A-BBC3-736EEB89885C}" type="slidenum">
+            <a:fld id="{377935EF-6752-464A-9B81-BA8CABB6107B}" type="slidenum">
               <a:rPr lang="de-DE" smtClean="0"/>
               <a:t>‹Nr.›</a:t>
             </a:fld>
@@ -12374,7 +12449,7 @@
     </p:spTree>
     <p:extLst>
       <p:ext uri="{BB962C8B-B14F-4D97-AF65-F5344CB8AC3E}">
-        <p14:creationId xmlns:p14="http://schemas.microsoft.com/office/powerpoint/2010/main" val="3183152453"/>
+        <p14:creationId xmlns:p14="http://schemas.microsoft.com/office/powerpoint/2010/main" val="1177588628"/>
       </p:ext>
     </p:extLst>
   </p:cSld>
@@ -12406,7 +12481,7 @@
           <p:cNvPr id="2" name="Titel 1">
             <a:extLst>
               <a:ext uri="{FF2B5EF4-FFF2-40B4-BE49-F238E27FC236}">
-                <a16:creationId xmlns:a16="http://schemas.microsoft.com/office/drawing/2014/main" id="{EE197ACE-99FB-787D-FA51-BED56889926E}"/>
+                <a16:creationId xmlns:a16="http://schemas.microsoft.com/office/drawing/2014/main" id="{C308A7BC-173E-1950-4483-C7EB83B61D49}"/>
               </a:ext>
             </a:extLst>
           </p:cNvPr>
@@ -12443,7 +12518,7 @@
           <p:cNvPr id="3" name="Inhaltsplatzhalter 2">
             <a:extLst>
               <a:ext uri="{FF2B5EF4-FFF2-40B4-BE49-F238E27FC236}">
-                <a16:creationId xmlns:a16="http://schemas.microsoft.com/office/drawing/2014/main" id="{16AAA19B-56D1-2D69-2014-649E0003AD98}"/>
+                <a16:creationId xmlns:a16="http://schemas.microsoft.com/office/drawing/2014/main" id="{49C968DD-E16F-5781-2591-D0C44BE24CD2}"/>
               </a:ext>
             </a:extLst>
           </p:cNvPr>
@@ -12533,7 +12608,7 @@
           <p:cNvPr id="4" name="Textplatzhalter 3">
             <a:extLst>
               <a:ext uri="{FF2B5EF4-FFF2-40B4-BE49-F238E27FC236}">
-                <a16:creationId xmlns:a16="http://schemas.microsoft.com/office/drawing/2014/main" id="{D30C1151-24B8-07F9-9FD3-59F082FF2A1E}"/>
+                <a16:creationId xmlns:a16="http://schemas.microsoft.com/office/drawing/2014/main" id="{0B094689-8E08-F31B-1118-170B9C7F44C1}"/>
               </a:ext>
             </a:extLst>
           </p:cNvPr>
@@ -12604,7 +12679,7 @@
           <p:cNvPr id="5" name="Datumsplatzhalter 4">
             <a:extLst>
               <a:ext uri="{FF2B5EF4-FFF2-40B4-BE49-F238E27FC236}">
-                <a16:creationId xmlns:a16="http://schemas.microsoft.com/office/drawing/2014/main" id="{7CC44BF8-A68D-5802-FAE8-06DFD175E22C}"/>
+                <a16:creationId xmlns:a16="http://schemas.microsoft.com/office/drawing/2014/main" id="{7B0FD140-7B5F-380D-B51A-4DE60F181BD5}"/>
               </a:ext>
             </a:extLst>
           </p:cNvPr>
@@ -12620,7 +12695,7 @@
           <a:bodyPr/>
           <a:lstStyle/>
           <a:p>
-            <a:fld id="{B4E8FD0B-BEC3-452C-A2F9-2CBD7A952C52}" type="datetimeFigureOut">
+            <a:fld id="{C9962047-E2C8-4734-A689-668B36BC6A1D}" type="datetimeFigureOut">
               <a:rPr lang="de-DE" smtClean="0"/>
               <a:t>09.10.2026</a:t>
             </a:fld>
@@ -12633,7 +12708,7 @@
           <p:cNvPr id="6" name="Fußzeilenplatzhalter 5">
             <a:extLst>
               <a:ext uri="{FF2B5EF4-FFF2-40B4-BE49-F238E27FC236}">
-                <a16:creationId xmlns:a16="http://schemas.microsoft.com/office/drawing/2014/main" id="{1F5D536B-CE77-05B5-7BDC-F88CC722206A}"/>
+                <a16:creationId xmlns:a16="http://schemas.microsoft.com/office/drawing/2014/main" id="{6F92BBD0-2657-2EB2-0A74-4F49C69ECDAF}"/>
               </a:ext>
             </a:extLst>
           </p:cNvPr>
@@ -12658,7 +12733,7 @@
           <p:cNvPr id="7" name="Foliennummernplatzhalter 6">
             <a:extLst>
               <a:ext uri="{FF2B5EF4-FFF2-40B4-BE49-F238E27FC236}">
-                <a16:creationId xmlns:a16="http://schemas.microsoft.com/office/drawing/2014/main" id="{95E1724A-6DF0-EF2C-DF1D-40A1D7394A1C}"/>
+                <a16:creationId xmlns:a16="http://schemas.microsoft.com/office/drawing/2014/main" id="{63C5E45C-8966-BA9E-BE27-097E6D3BC534}"/>
               </a:ext>
             </a:extLst>
           </p:cNvPr>
@@ -12674,7 +12749,7 @@
           <a:bodyPr/>
           <a:lstStyle/>
           <a:p>
-            <a:fld id="{06CF1C40-8559-485A-BBC3-736EEB89885C}" type="slidenum">
+            <a:fld id="{377935EF-6752-464A-9B81-BA8CABB6107B}" type="slidenum">
               <a:rPr lang="de-DE" smtClean="0"/>
               <a:t>‹Nr.›</a:t>
             </a:fld>
@@ -12685,7 +12760,7 @@
     </p:spTree>
     <p:extLst>
       <p:ext uri="{BB962C8B-B14F-4D97-AF65-F5344CB8AC3E}">
-        <p14:creationId xmlns:p14="http://schemas.microsoft.com/office/powerpoint/2010/main" val="581704940"/>
+        <p14:creationId xmlns:p14="http://schemas.microsoft.com/office/powerpoint/2010/main" val="1848074316"/>
       </p:ext>
     </p:extLst>
   </p:cSld>
@@ -12717,7 +12792,7 @@
           <p:cNvPr id="2" name="Titel 1">
             <a:extLst>
               <a:ext uri="{FF2B5EF4-FFF2-40B4-BE49-F238E27FC236}">
-                <a16:creationId xmlns:a16="http://schemas.microsoft.com/office/drawing/2014/main" id="{BE4C10DA-F790-A759-0A99-02D1EAA9E951}"/>
+                <a16:creationId xmlns:a16="http://schemas.microsoft.com/office/drawing/2014/main" id="{14CD96D7-1832-F3B8-9842-C2AB2F369333}"/>
               </a:ext>
             </a:extLst>
           </p:cNvPr>
@@ -12754,7 +12829,7 @@
           <p:cNvPr id="3" name="Bildplatzhalter 2">
             <a:extLst>
               <a:ext uri="{FF2B5EF4-FFF2-40B4-BE49-F238E27FC236}">
-                <a16:creationId xmlns:a16="http://schemas.microsoft.com/office/drawing/2014/main" id="{296A7C43-D5E1-82AF-A1C7-9BE03F1C4ABB}"/>
+                <a16:creationId xmlns:a16="http://schemas.microsoft.com/office/drawing/2014/main" id="{065477DC-3A8F-4FA1-2657-57EBDE61CD42}"/>
               </a:ext>
             </a:extLst>
           </p:cNvPr>
@@ -12821,7 +12896,7 @@
           <p:cNvPr id="4" name="Textplatzhalter 3">
             <a:extLst>
               <a:ext uri="{FF2B5EF4-FFF2-40B4-BE49-F238E27FC236}">
-                <a16:creationId xmlns:a16="http://schemas.microsoft.com/office/drawing/2014/main" id="{813A8603-8A67-0D53-AA11-B381084C7400}"/>
+                <a16:creationId xmlns:a16="http://schemas.microsoft.com/office/drawing/2014/main" id="{64E94A0F-249A-4F8B-2A13-58551DA6368A}"/>
               </a:ext>
             </a:extLst>
           </p:cNvPr>
@@ -12892,7 +12967,7 @@
           <p:cNvPr id="5" name="Datumsplatzhalter 4">
             <a:extLst>
               <a:ext uri="{FF2B5EF4-FFF2-40B4-BE49-F238E27FC236}">
-                <a16:creationId xmlns:a16="http://schemas.microsoft.com/office/drawing/2014/main" id="{94CE3DA0-7594-CBDF-D8E0-1E3D70981215}"/>
+                <a16:creationId xmlns:a16="http://schemas.microsoft.com/office/drawing/2014/main" id="{5897B951-D8FE-0CC1-9BE2-5B2364167F77}"/>
               </a:ext>
             </a:extLst>
           </p:cNvPr>
@@ -12908,7 +12983,7 @@
           <a:bodyPr/>
           <a:lstStyle/>
           <a:p>
-            <a:fld id="{B4E8FD0B-BEC3-452C-A2F9-2CBD7A952C52}" type="datetimeFigureOut">
+            <a:fld id="{C9962047-E2C8-4734-A689-668B36BC6A1D}" type="datetimeFigureOut">
               <a:rPr lang="de-DE" smtClean="0"/>
               <a:t>09.10.2026</a:t>
             </a:fld>
@@ -12921,7 +12996,7 @@
           <p:cNvPr id="6" name="Fußzeilenplatzhalter 5">
             <a:extLst>
               <a:ext uri="{FF2B5EF4-FFF2-40B4-BE49-F238E27FC236}">
-                <a16:creationId xmlns:a16="http://schemas.microsoft.com/office/drawing/2014/main" id="{67B2F337-C84A-CCCE-1201-C7D53DD782DB}"/>
+                <a16:creationId xmlns:a16="http://schemas.microsoft.com/office/drawing/2014/main" id="{F598447C-5F4F-4037-8549-1DB1952A21E9}"/>
               </a:ext>
             </a:extLst>
           </p:cNvPr>
@@ -12946,7 +13021,7 @@
           <p:cNvPr id="7" name="Foliennummernplatzhalter 6">
             <a:extLst>
               <a:ext uri="{FF2B5EF4-FFF2-40B4-BE49-F238E27FC236}">
-                <a16:creationId xmlns:a16="http://schemas.microsoft.com/office/drawing/2014/main" id="{20210F27-57C3-AD57-91DF-C8809E890CB9}"/>
+                <a16:creationId xmlns:a16="http://schemas.microsoft.com/office/drawing/2014/main" id="{C6CAED72-85B7-E6AD-2B12-A1DFF0A3B352}"/>
               </a:ext>
             </a:extLst>
           </p:cNvPr>
@@ -12962,7 +13037,7 @@
           <a:bodyPr/>
           <a:lstStyle/>
           <a:p>
-            <a:fld id="{06CF1C40-8559-485A-BBC3-736EEB89885C}" type="slidenum">
+            <a:fld id="{377935EF-6752-464A-9B81-BA8CABB6107B}" type="slidenum">
               <a:rPr lang="de-DE" smtClean="0"/>
               <a:t>‹Nr.›</a:t>
             </a:fld>
@@ -12973,7 +13048,7 @@
     </p:spTree>
     <p:extLst>
       <p:ext uri="{BB962C8B-B14F-4D97-AF65-F5344CB8AC3E}">
-        <p14:creationId xmlns:p14="http://schemas.microsoft.com/office/powerpoint/2010/main" val="3197101087"/>
+        <p14:creationId xmlns:p14="http://schemas.microsoft.com/office/powerpoint/2010/main" val="3927644076"/>
       </p:ext>
     </p:extLst>
   </p:cSld>
@@ -13010,7 +13085,7 @@
           <p:cNvPr id="2" name="Titelplatzhalter 1">
             <a:extLst>
               <a:ext uri="{FF2B5EF4-FFF2-40B4-BE49-F238E27FC236}">
-                <a16:creationId xmlns:a16="http://schemas.microsoft.com/office/drawing/2014/main" id="{9A0AB17B-94E4-ED70-B6A5-C6A3BF7C3A67}"/>
+                <a16:creationId xmlns:a16="http://schemas.microsoft.com/office/drawing/2014/main" id="{48AF5C9E-86AA-08EC-FAA7-CC4932ED966B}"/>
               </a:ext>
             </a:extLst>
           </p:cNvPr>
@@ -13048,7 +13123,7 @@
           <p:cNvPr id="3" name="Textplatzhalter 2">
             <a:extLst>
               <a:ext uri="{FF2B5EF4-FFF2-40B4-BE49-F238E27FC236}">
-                <a16:creationId xmlns:a16="http://schemas.microsoft.com/office/drawing/2014/main" id="{D1F99CD3-D016-1D06-640D-BB80D86BAADD}"/>
+                <a16:creationId xmlns:a16="http://schemas.microsoft.com/office/drawing/2014/main" id="{F5EAB3AB-9B8B-780F-02EB-845E2095ACFC}"/>
               </a:ext>
             </a:extLst>
           </p:cNvPr>
@@ -13115,7 +13190,7 @@
           <p:cNvPr id="4" name="Datumsplatzhalter 3">
             <a:extLst>
               <a:ext uri="{FF2B5EF4-FFF2-40B4-BE49-F238E27FC236}">
-                <a16:creationId xmlns:a16="http://schemas.microsoft.com/office/drawing/2014/main" id="{FF9845B9-0B32-F8CE-2455-70422B8165D8}"/>
+                <a16:creationId xmlns:a16="http://schemas.microsoft.com/office/drawing/2014/main" id="{56F16CA4-79D3-C070-004C-B4263D2E5270}"/>
               </a:ext>
             </a:extLst>
           </p:cNvPr>
@@ -13149,7 +13224,7 @@
             </a:lvl1pPr>
           </a:lstStyle>
           <a:p>
-            <a:fld id="{B4E8FD0B-BEC3-452C-A2F9-2CBD7A952C52}" type="datetimeFigureOut">
+            <a:fld id="{C9962047-E2C8-4734-A689-668B36BC6A1D}" type="datetimeFigureOut">
               <a:rPr lang="de-DE" smtClean="0"/>
               <a:t>09.10.2026</a:t>
             </a:fld>
@@ -13162,7 +13237,7 @@
           <p:cNvPr id="5" name="Fußzeilenplatzhalter 4">
             <a:extLst>
               <a:ext uri="{FF2B5EF4-FFF2-40B4-BE49-F238E27FC236}">
-                <a16:creationId xmlns:a16="http://schemas.microsoft.com/office/drawing/2014/main" id="{6FFAD640-3F35-CC4D-B27E-DAE1C81F45D4}"/>
+                <a16:creationId xmlns:a16="http://schemas.microsoft.com/office/drawing/2014/main" id="{1E85DF77-F128-4654-BFE8-DEABCE832339}"/>
               </a:ext>
             </a:extLst>
           </p:cNvPr>
@@ -13205,7 +13280,7 @@
           <p:cNvPr id="6" name="Foliennummernplatzhalter 5">
             <a:extLst>
               <a:ext uri="{FF2B5EF4-FFF2-40B4-BE49-F238E27FC236}">
-                <a16:creationId xmlns:a16="http://schemas.microsoft.com/office/drawing/2014/main" id="{A1594835-471D-911B-25DC-F582C11F7D5B}"/>
+                <a16:creationId xmlns:a16="http://schemas.microsoft.com/office/drawing/2014/main" id="{0C936764-7B3D-A5D8-779A-73F3E7A778BF}"/>
               </a:ext>
             </a:extLst>
           </p:cNvPr>
@@ -13239,7 +13314,7 @@
             </a:lvl1pPr>
           </a:lstStyle>
           <a:p>
-            <a:fld id="{06CF1C40-8559-485A-BBC3-736EEB89885C}" type="slidenum">
+            <a:fld id="{377935EF-6752-464A-9B81-BA8CABB6107B}" type="slidenum">
               <a:rPr lang="de-DE" smtClean="0"/>
               <a:t>‹Nr.›</a:t>
             </a:fld>
@@ -13250,7 +13325,7 @@
     </p:spTree>
     <p:extLst>
       <p:ext uri="{BB962C8B-B14F-4D97-AF65-F5344CB8AC3E}">
-        <p14:creationId xmlns:p14="http://schemas.microsoft.com/office/powerpoint/2010/main" val="1827687098"/>
+        <p14:creationId xmlns:p14="http://schemas.microsoft.com/office/powerpoint/2010/main" val="2024606226"/>
       </p:ext>
     </p:extLst>
   </p:cSld>
@@ -13573,7 +13648,7 @@
           <p:cNvPr id="2" name="Titel 1">
             <a:extLst>
               <a:ext uri="{FF2B5EF4-FFF2-40B4-BE49-F238E27FC236}">
-                <a16:creationId xmlns:a16="http://schemas.microsoft.com/office/drawing/2014/main" id="{42DB15F6-6172-B248-8669-E0D65E5CE539}"/>
+                <a16:creationId xmlns:a16="http://schemas.microsoft.com/office/drawing/2014/main" id="{53EAACA3-EA18-3ACE-25AC-E907D276298B}"/>
               </a:ext>
             </a:extLst>
           </p:cNvPr>
@@ -13602,7 +13677,7 @@
           <p:cNvPr id="3" name="Diagramm 2">
             <a:extLst>
               <a:ext uri="{FF2B5EF4-FFF2-40B4-BE49-F238E27FC236}">
-                <a16:creationId xmlns:a16="http://schemas.microsoft.com/office/drawing/2014/main" id="{01C06C77-653D-0003-3134-6F1FFB4B33A8}"/>
+                <a16:creationId xmlns:a16="http://schemas.microsoft.com/office/drawing/2014/main" id="{3C01D9CD-217A-BF19-0576-56876BED3974}"/>
               </a:ext>
             </a:extLst>
           </p:cNvPr>
@@ -13610,7 +13685,7 @@
           <p:nvPr>
             <p:extLst>
               <p:ext uri="{D42A27DB-BD31-4B8C-83A1-F6EECF244321}">
-                <p14:modId xmlns:p14="http://schemas.microsoft.com/office/powerpoint/2010/main" val="3328303671"/>
+                <p14:modId xmlns:p14="http://schemas.microsoft.com/office/powerpoint/2010/main" val="1182428717"/>
               </p:ext>
             </p:extLst>
           </p:nvPr>
@@ -13630,7 +13705,7 @@
           <p:cNvPr id="4" name="Diagramm 3">
             <a:extLst>
               <a:ext uri="{FF2B5EF4-FFF2-40B4-BE49-F238E27FC236}">
-                <a16:creationId xmlns:a16="http://schemas.microsoft.com/office/drawing/2014/main" id="{5DE022C0-30D9-FFD0-FB62-169EC22067B0}"/>
+                <a16:creationId xmlns:a16="http://schemas.microsoft.com/office/drawing/2014/main" id="{004CD60A-EE22-DC67-2238-21BD621425C7}"/>
               </a:ext>
             </a:extLst>
           </p:cNvPr>
@@ -13638,7 +13713,7 @@
           <p:nvPr>
             <p:extLst>
               <p:ext uri="{D42A27DB-BD31-4B8C-83A1-F6EECF244321}">
-                <p14:modId xmlns:p14="http://schemas.microsoft.com/office/powerpoint/2010/main" val="3054068498"/>
+                <p14:modId xmlns:p14="http://schemas.microsoft.com/office/powerpoint/2010/main" val="213811935"/>
               </p:ext>
             </p:extLst>
           </p:nvPr>
@@ -13656,7 +13731,7 @@
     </p:spTree>
     <p:extLst>
       <p:ext uri="{BB962C8B-B14F-4D97-AF65-F5344CB8AC3E}">
-        <p14:creationId xmlns:p14="http://schemas.microsoft.com/office/powerpoint/2010/main" val="2219254677"/>
+        <p14:creationId xmlns:p14="http://schemas.microsoft.com/office/powerpoint/2010/main" val="574115935"/>
       </p:ext>
     </p:extLst>
   </p:cSld>
@@ -13688,7 +13763,7 @@
           <p:cNvPr id="2" name="Titel 1">
             <a:extLst>
               <a:ext uri="{FF2B5EF4-FFF2-40B4-BE49-F238E27FC236}">
-                <a16:creationId xmlns:a16="http://schemas.microsoft.com/office/drawing/2014/main" id="{4F6080D1-0C68-2979-5787-3D8562B2B76F}"/>
+                <a16:creationId xmlns:a16="http://schemas.microsoft.com/office/drawing/2014/main" id="{55B283F3-AAE8-6F9F-3294-65661F15FE66}"/>
               </a:ext>
             </a:extLst>
           </p:cNvPr>
@@ -13717,7 +13792,7 @@
           <p:cNvPr id="3" name="Diagramm 2">
             <a:extLst>
               <a:ext uri="{FF2B5EF4-FFF2-40B4-BE49-F238E27FC236}">
-                <a16:creationId xmlns:a16="http://schemas.microsoft.com/office/drawing/2014/main" id="{81D1604C-1B05-FC82-6A79-A27A88C8C45C}"/>
+                <a16:creationId xmlns:a16="http://schemas.microsoft.com/office/drawing/2014/main" id="{AA9C8BB1-BC88-4A6B-7042-5392F19B64BA}"/>
               </a:ext>
             </a:extLst>
           </p:cNvPr>
@@ -13725,7 +13800,7 @@
           <p:nvPr>
             <p:extLst>
               <p:ext uri="{D42A27DB-BD31-4B8C-83A1-F6EECF244321}">
-                <p14:modId xmlns:p14="http://schemas.microsoft.com/office/powerpoint/2010/main" val="2534443672"/>
+                <p14:modId xmlns:p14="http://schemas.microsoft.com/office/powerpoint/2010/main" val="140767115"/>
               </p:ext>
             </p:extLst>
           </p:nvPr>
@@ -13745,7 +13820,7 @@
           <p:cNvPr id="4" name="Diagramm 3">
             <a:extLst>
               <a:ext uri="{FF2B5EF4-FFF2-40B4-BE49-F238E27FC236}">
-                <a16:creationId xmlns:a16="http://schemas.microsoft.com/office/drawing/2014/main" id="{470B58BA-DDE8-C69E-3CB9-C1AD08BC611B}"/>
+                <a16:creationId xmlns:a16="http://schemas.microsoft.com/office/drawing/2014/main" id="{6DCDB0FD-B923-D61B-B587-5E08AECC82FD}"/>
               </a:ext>
             </a:extLst>
           </p:cNvPr>
@@ -13753,7 +13828,7 @@
           <p:nvPr>
             <p:extLst>
               <p:ext uri="{D42A27DB-BD31-4B8C-83A1-F6EECF244321}">
-                <p14:modId xmlns:p14="http://schemas.microsoft.com/office/powerpoint/2010/main" val="4103862961"/>
+                <p14:modId xmlns:p14="http://schemas.microsoft.com/office/powerpoint/2010/main" val="3640681988"/>
               </p:ext>
             </p:extLst>
           </p:nvPr>
@@ -13771,7 +13846,7 @@
     </p:spTree>
     <p:extLst>
       <p:ext uri="{BB962C8B-B14F-4D97-AF65-F5344CB8AC3E}">
-        <p14:creationId xmlns:p14="http://schemas.microsoft.com/office/powerpoint/2010/main" val="568557169"/>
+        <p14:creationId xmlns:p14="http://schemas.microsoft.com/office/powerpoint/2010/main" val="809531301"/>
       </p:ext>
     </p:extLst>
   </p:cSld>
@@ -13803,7 +13878,7 @@
           <p:cNvPr id="2" name="Titel 1">
             <a:extLst>
               <a:ext uri="{FF2B5EF4-FFF2-40B4-BE49-F238E27FC236}">
-                <a16:creationId xmlns:a16="http://schemas.microsoft.com/office/drawing/2014/main" id="{BA5D2A6B-B2AF-936F-209B-B5E4F0A86961}"/>
+                <a16:creationId xmlns:a16="http://schemas.microsoft.com/office/drawing/2014/main" id="{17EF85DC-365B-8C08-DF61-5F2A0C62A9DA}"/>
               </a:ext>
             </a:extLst>
           </p:cNvPr>
@@ -13832,7 +13907,7 @@
           <p:cNvPr id="3" name="Diagramm 2">
             <a:extLst>
               <a:ext uri="{FF2B5EF4-FFF2-40B4-BE49-F238E27FC236}">
-                <a16:creationId xmlns:a16="http://schemas.microsoft.com/office/drawing/2014/main" id="{71CC4C9B-DF55-6291-78BF-BBA729C076B6}"/>
+                <a16:creationId xmlns:a16="http://schemas.microsoft.com/office/drawing/2014/main" id="{EF7938AA-373C-4FDC-20F0-03B14C0E1B61}"/>
               </a:ext>
             </a:extLst>
           </p:cNvPr>
@@ -13840,7 +13915,7 @@
           <p:nvPr>
             <p:extLst>
               <p:ext uri="{D42A27DB-BD31-4B8C-83A1-F6EECF244321}">
-                <p14:modId xmlns:p14="http://schemas.microsoft.com/office/powerpoint/2010/main" val="4075858349"/>
+                <p14:modId xmlns:p14="http://schemas.microsoft.com/office/powerpoint/2010/main" val="305480100"/>
               </p:ext>
             </p:extLst>
           </p:nvPr>
@@ -13860,7 +13935,7 @@
           <p:cNvPr id="4" name="Diagramm 3">
             <a:extLst>
               <a:ext uri="{FF2B5EF4-FFF2-40B4-BE49-F238E27FC236}">
-                <a16:creationId xmlns:a16="http://schemas.microsoft.com/office/drawing/2014/main" id="{21704992-5ABE-E014-E79E-C5BC7EF93E1A}"/>
+                <a16:creationId xmlns:a16="http://schemas.microsoft.com/office/drawing/2014/main" id="{16BE79A1-D4CD-2A81-165B-E9C78AEF96FC}"/>
               </a:ext>
             </a:extLst>
           </p:cNvPr>
@@ -13868,7 +13943,7 @@
           <p:nvPr>
             <p:extLst>
               <p:ext uri="{D42A27DB-BD31-4B8C-83A1-F6EECF244321}">
-                <p14:modId xmlns:p14="http://schemas.microsoft.com/office/powerpoint/2010/main" val="1087504404"/>
+                <p14:modId xmlns:p14="http://schemas.microsoft.com/office/powerpoint/2010/main" val="3610986942"/>
               </p:ext>
             </p:extLst>
           </p:nvPr>
@@ -13886,7 +13961,7 @@
     </p:spTree>
     <p:extLst>
       <p:ext uri="{BB962C8B-B14F-4D97-AF65-F5344CB8AC3E}">
-        <p14:creationId xmlns:p14="http://schemas.microsoft.com/office/powerpoint/2010/main" val="3735687364"/>
+        <p14:creationId xmlns:p14="http://schemas.microsoft.com/office/powerpoint/2010/main" val="1911903433"/>
       </p:ext>
     </p:extLst>
   </p:cSld>
@@ -13918,7 +13993,7 @@
           <p:cNvPr id="2" name="Titel 1">
             <a:extLst>
               <a:ext uri="{FF2B5EF4-FFF2-40B4-BE49-F238E27FC236}">
-                <a16:creationId xmlns:a16="http://schemas.microsoft.com/office/drawing/2014/main" id="{22A8608E-CC26-9A27-A886-35BD20C72CE1}"/>
+                <a16:creationId xmlns:a16="http://schemas.microsoft.com/office/drawing/2014/main" id="{2B29FBC4-6C87-A850-5505-08939A71CAED}"/>
               </a:ext>
             </a:extLst>
           </p:cNvPr>
@@ -13947,7 +14022,7 @@
           <p:cNvPr id="3" name="Diagramm 2">
             <a:extLst>
               <a:ext uri="{FF2B5EF4-FFF2-40B4-BE49-F238E27FC236}">
-                <a16:creationId xmlns:a16="http://schemas.microsoft.com/office/drawing/2014/main" id="{9890EBE1-15E6-7622-0413-C7E204E28409}"/>
+                <a16:creationId xmlns:a16="http://schemas.microsoft.com/office/drawing/2014/main" id="{29DD8E1E-9EE9-47DA-54CA-EB348088445C}"/>
               </a:ext>
             </a:extLst>
           </p:cNvPr>
@@ -13955,7 +14030,7 @@
           <p:nvPr>
             <p:extLst>
               <p:ext uri="{D42A27DB-BD31-4B8C-83A1-F6EECF244321}">
-                <p14:modId xmlns:p14="http://schemas.microsoft.com/office/powerpoint/2010/main" val="1991838621"/>
+                <p14:modId xmlns:p14="http://schemas.microsoft.com/office/powerpoint/2010/main" val="1272251118"/>
               </p:ext>
             </p:extLst>
           </p:nvPr>
@@ -13975,7 +14050,7 @@
           <p:cNvPr id="4" name="Diagramm 3">
             <a:extLst>
               <a:ext uri="{FF2B5EF4-FFF2-40B4-BE49-F238E27FC236}">
-                <a16:creationId xmlns:a16="http://schemas.microsoft.com/office/drawing/2014/main" id="{A0BC1F1E-3F01-5522-5900-8F79D6A07348}"/>
+                <a16:creationId xmlns:a16="http://schemas.microsoft.com/office/drawing/2014/main" id="{8B5A2F1B-4046-67F1-4BD6-AEB895ACD733}"/>
               </a:ext>
             </a:extLst>
           </p:cNvPr>
@@ -13983,7 +14058,7 @@
           <p:nvPr>
             <p:extLst>
               <p:ext uri="{D42A27DB-BD31-4B8C-83A1-F6EECF244321}">
-                <p14:modId xmlns:p14="http://schemas.microsoft.com/office/powerpoint/2010/main" val="2313407440"/>
+                <p14:modId xmlns:p14="http://schemas.microsoft.com/office/powerpoint/2010/main" val="85409089"/>
               </p:ext>
             </p:extLst>
           </p:nvPr>
@@ -14001,7 +14076,7 @@
     </p:spTree>
     <p:extLst>
       <p:ext uri="{BB962C8B-B14F-4D97-AF65-F5344CB8AC3E}">
-        <p14:creationId xmlns:p14="http://schemas.microsoft.com/office/powerpoint/2010/main" val="2699520542"/>
+        <p14:creationId xmlns:p14="http://schemas.microsoft.com/office/powerpoint/2010/main" val="2256778902"/>
       </p:ext>
     </p:extLst>
   </p:cSld>
@@ -14033,7 +14108,7 @@
           <p:cNvPr id="2" name="Titel 1">
             <a:extLst>
               <a:ext uri="{FF2B5EF4-FFF2-40B4-BE49-F238E27FC236}">
-                <a16:creationId xmlns:a16="http://schemas.microsoft.com/office/drawing/2014/main" id="{F4D209FF-A863-BF2D-D47F-B9A682108F30}"/>
+                <a16:creationId xmlns:a16="http://schemas.microsoft.com/office/drawing/2014/main" id="{FB0BF6E0-8AD4-83B2-BFCE-B8A40613758A}"/>
               </a:ext>
             </a:extLst>
           </p:cNvPr>
@@ -14062,7 +14137,7 @@
           <p:cNvPr id="3" name="Diagramm 2">
             <a:extLst>
               <a:ext uri="{FF2B5EF4-FFF2-40B4-BE49-F238E27FC236}">
-                <a16:creationId xmlns:a16="http://schemas.microsoft.com/office/drawing/2014/main" id="{09B6C76D-0779-5634-CF0F-71E9CFAB3EE0}"/>
+                <a16:creationId xmlns:a16="http://schemas.microsoft.com/office/drawing/2014/main" id="{B515185C-EB13-37E4-6198-5B8551135277}"/>
               </a:ext>
             </a:extLst>
           </p:cNvPr>
@@ -14070,7 +14145,7 @@
           <p:nvPr>
             <p:extLst>
               <p:ext uri="{D42A27DB-BD31-4B8C-83A1-F6EECF244321}">
-                <p14:modId xmlns:p14="http://schemas.microsoft.com/office/powerpoint/2010/main" val="4200001305"/>
+                <p14:modId xmlns:p14="http://schemas.microsoft.com/office/powerpoint/2010/main" val="3249793868"/>
               </p:ext>
             </p:extLst>
           </p:nvPr>
@@ -14090,7 +14165,7 @@
           <p:cNvPr id="4" name="Diagramm 3">
             <a:extLst>
               <a:ext uri="{FF2B5EF4-FFF2-40B4-BE49-F238E27FC236}">
-                <a16:creationId xmlns:a16="http://schemas.microsoft.com/office/drawing/2014/main" id="{9C736988-7896-FE1F-3068-F6742A7FDAFC}"/>
+                <a16:creationId xmlns:a16="http://schemas.microsoft.com/office/drawing/2014/main" id="{E6B5FB2D-438F-541C-CB69-BC963D53560B}"/>
               </a:ext>
             </a:extLst>
           </p:cNvPr>
@@ -14098,7 +14173,7 @@
           <p:nvPr>
             <p:extLst>
               <p:ext uri="{D42A27DB-BD31-4B8C-83A1-F6EECF244321}">
-                <p14:modId xmlns:p14="http://schemas.microsoft.com/office/powerpoint/2010/main" val="8983842"/>
+                <p14:modId xmlns:p14="http://schemas.microsoft.com/office/powerpoint/2010/main" val="2509046853"/>
               </p:ext>
             </p:extLst>
           </p:nvPr>
@@ -14118,7 +14193,7 @@
           <p:cNvPr id="5" name="Diagramm 4">
             <a:extLst>
               <a:ext uri="{FF2B5EF4-FFF2-40B4-BE49-F238E27FC236}">
-                <a16:creationId xmlns:a16="http://schemas.microsoft.com/office/drawing/2014/main" id="{2B6A3B49-13DA-B2BE-7A4F-60F5808EE989}"/>
+                <a16:creationId xmlns:a16="http://schemas.microsoft.com/office/drawing/2014/main" id="{04CCB4E4-9096-93DE-2539-B80D7DE722AC}"/>
               </a:ext>
             </a:extLst>
           </p:cNvPr>
@@ -14126,7 +14201,7 @@
           <p:nvPr>
             <p:extLst>
               <p:ext uri="{D42A27DB-BD31-4B8C-83A1-F6EECF244321}">
-                <p14:modId xmlns:p14="http://schemas.microsoft.com/office/powerpoint/2010/main" val="1087530668"/>
+                <p14:modId xmlns:p14="http://schemas.microsoft.com/office/powerpoint/2010/main" val="3083615134"/>
               </p:ext>
             </p:extLst>
           </p:nvPr>
@@ -14144,7 +14219,7 @@
     </p:spTree>
     <p:extLst>
       <p:ext uri="{BB962C8B-B14F-4D97-AF65-F5344CB8AC3E}">
-        <p14:creationId xmlns:p14="http://schemas.microsoft.com/office/powerpoint/2010/main" val="2411272805"/>
+        <p14:creationId xmlns:p14="http://schemas.microsoft.com/office/powerpoint/2010/main" val="971056430"/>
       </p:ext>
     </p:extLst>
   </p:cSld>

--- a/tests/corpus/pptx/generated/charts-details.pptx
+++ b/tests/corpus/pptx/generated/charts-details.pptx
@@ -10,6 +10,7 @@
     <p:sldId id="258" r:id="rId4"/>
     <p:sldId id="259" r:id="rId5"/>
     <p:sldId id="260" r:id="rId6"/>
+    <p:sldId id="261" r:id="rId7"/>
   </p:sldIdLst>
   <p:sldSz cx="12192000" cy="6858000"/>
   <p:notesSz cx="6858000" cy="9144000"/>
@@ -218,7 +219,7 @@
               </c14:invertSolidFillFmt>
             </c:ext>
             <c:ext xmlns:c16="http://schemas.microsoft.com/office/drawing/2014/chart" uri="{C3380CC4-5D6E-409C-BE32-E72D297353CC}">
-              <c16:uniqueId val="{00000000-E5AC-453A-B7E2-2CB1464BBC10}"/>
+              <c16:uniqueId val="{00000000-BD11-45C6-8358-6F666B084A8E}"/>
             </c:ext>
           </c:extLst>
         </c:ser>
@@ -295,7 +296,7 @@
           </c:val>
           <c:extLst>
             <c:ext xmlns:c16="http://schemas.microsoft.com/office/drawing/2014/chart" uri="{C3380CC4-5D6E-409C-BE32-E72D297353CC}">
-              <c16:uniqueId val="{00000001-E5AC-453A-B7E2-2CB1464BBC10}"/>
+              <c16:uniqueId val="{00000001-BD11-45C6-8358-6F666B084A8E}"/>
             </c:ext>
           </c:extLst>
         </c:ser>
@@ -309,11 +310,11 @@
         </c:dLbls>
         <c:gapWidth val="219"/>
         <c:overlap val="-27"/>
-        <c:axId val="5541200"/>
-        <c:axId val="1193382576"/>
+        <c:axId val="1591169120"/>
+        <c:axId val="253415760"/>
       </c:barChart>
       <c:catAx>
-        <c:axId val="5541200"/>
+        <c:axId val="1591169120"/>
         <c:scaling>
           <c:orientation val="minMax"/>
         </c:scaling>
@@ -356,7 +357,7 @@
             <a:endParaRPr lang="de-DE"/>
           </a:p>
         </c:txPr>
-        <c:crossAx val="1193382576"/>
+        <c:crossAx val="253415760"/>
         <c:crosses val="autoZero"/>
         <c:auto val="1"/>
         <c:lblAlgn val="ctr"/>
@@ -364,7 +365,7 @@
         <c:noMultiLvlLbl val="0"/>
       </c:catAx>
       <c:valAx>
-        <c:axId val="1193382576"/>
+        <c:axId val="253415760"/>
         <c:scaling>
           <c:orientation val="minMax"/>
         </c:scaling>
@@ -415,7 +416,7 @@
             <a:endParaRPr lang="de-DE"/>
           </a:p>
         </c:txPr>
-        <c:crossAx val="5541200"/>
+        <c:crossAx val="1591169120"/>
         <c:crosses val="autoZero"/>
         <c:crossBetween val="between"/>
       </c:valAx>
@@ -590,7 +591,7 @@
           </c:val>
           <c:extLst>
             <c:ext xmlns:c16="http://schemas.microsoft.com/office/drawing/2014/chart" uri="{C3380CC4-5D6E-409C-BE32-E72D297353CC}">
-              <c16:uniqueId val="{00000000-FDF9-40CF-9FBA-1BFC5126B945}"/>
+              <c16:uniqueId val="{00000000-70A3-477C-9386-6AFC858F24B2}"/>
             </c:ext>
           </c:extLst>
         </c:ser>
@@ -661,7 +662,7 @@
           </c:val>
           <c:extLst>
             <c:ext xmlns:c16="http://schemas.microsoft.com/office/drawing/2014/chart" uri="{C3380CC4-5D6E-409C-BE32-E72D297353CC}">
-              <c16:uniqueId val="{00000001-FDF9-40CF-9FBA-1BFC5126B945}"/>
+              <c16:uniqueId val="{00000001-70A3-477C-9386-6AFC858F24B2}"/>
             </c:ext>
           </c:extLst>
         </c:ser>
@@ -732,7 +733,7 @@
           </c:val>
           <c:extLst>
             <c:ext xmlns:c16="http://schemas.microsoft.com/office/drawing/2014/chart" uri="{C3380CC4-5D6E-409C-BE32-E72D297353CC}">
-              <c16:uniqueId val="{00000002-FDF9-40CF-9FBA-1BFC5126B945}"/>
+              <c16:uniqueId val="{00000002-70A3-477C-9386-6AFC858F24B2}"/>
             </c:ext>
           </c:extLst>
         </c:ser>
@@ -746,11 +747,11 @@
         </c:dLbls>
         <c:gapWidth val="219"/>
         <c:overlap val="-27"/>
-        <c:axId val="9931744"/>
-        <c:axId val="1193318256"/>
+        <c:axId val="1680444480"/>
+        <c:axId val="253615440"/>
       </c:barChart>
       <c:catAx>
-        <c:axId val="9931744"/>
+        <c:axId val="1680444480"/>
         <c:scaling>
           <c:orientation val="minMax"/>
         </c:scaling>
@@ -793,7 +794,7 @@
             <a:endParaRPr lang="de-DE"/>
           </a:p>
         </c:txPr>
-        <c:crossAx val="1193318256"/>
+        <c:crossAx val="253615440"/>
         <c:crosses val="autoZero"/>
         <c:auto val="1"/>
         <c:lblAlgn val="ctr"/>
@@ -801,7 +802,7 @@
         <c:noMultiLvlLbl val="0"/>
       </c:catAx>
       <c:valAx>
-        <c:axId val="1193318256"/>
+        <c:axId val="253615440"/>
         <c:scaling>
           <c:orientation val="minMax"/>
         </c:scaling>
@@ -852,7 +853,7 @@
             <a:endParaRPr lang="de-DE"/>
           </a:p>
         </c:txPr>
-        <c:crossAx val="9931744"/>
+        <c:crossAx val="1680444480"/>
         <c:crosses val="autoZero"/>
         <c:crossBetween val="between"/>
       </c:valAx>
@@ -1074,7 +1075,7 @@
           <c:bubble3D val="0"/>
           <c:extLst>
             <c:ext xmlns:c16="http://schemas.microsoft.com/office/drawing/2014/chart" uri="{C3380CC4-5D6E-409C-BE32-E72D297353CC}">
-              <c16:uniqueId val="{00000000-FD6D-4A63-B7B5-FD4369761B74}"/>
+              <c16:uniqueId val="{00000000-0A42-4A81-8552-9EEF17DDD587}"/>
             </c:ext>
           </c:extLst>
         </c:ser>
@@ -1088,11 +1089,11 @@
         </c:dLbls>
         <c:bubbleScale val="100"/>
         <c:showNegBubbles val="0"/>
-        <c:axId val="7285984"/>
-        <c:axId val="1193317776"/>
+        <c:axId val="1595860896"/>
+        <c:axId val="253641360"/>
       </c:bubbleChart>
       <c:valAx>
-        <c:axId val="7285984"/>
+        <c:axId val="1595860896"/>
         <c:scaling>
           <c:orientation val="minMax"/>
         </c:scaling>
@@ -1149,12 +1150,12 @@
             <a:endParaRPr lang="de-DE"/>
           </a:p>
         </c:txPr>
-        <c:crossAx val="1193317776"/>
+        <c:crossAx val="253641360"/>
         <c:crosses val="autoZero"/>
         <c:crossBetween val="midCat"/>
       </c:valAx>
       <c:valAx>
-        <c:axId val="1193317776"/>
+        <c:axId val="253641360"/>
         <c:scaling>
           <c:orientation val="minMax"/>
         </c:scaling>
@@ -1211,9 +1212,1137 @@
             <a:endParaRPr lang="de-DE"/>
           </a:p>
         </c:txPr>
-        <c:crossAx val="7285984"/>
+        <c:crossAx val="1595860896"/>
         <c:crosses val="autoZero"/>
         <c:crossBetween val="midCat"/>
+      </c:valAx>
+      <c:spPr>
+        <a:noFill/>
+        <a:ln>
+          <a:noFill/>
+        </a:ln>
+        <a:effectLst/>
+      </c:spPr>
+    </c:plotArea>
+    <c:legend>
+      <c:legendPos val="b"/>
+      <c:overlay val="0"/>
+      <c:spPr>
+        <a:noFill/>
+        <a:ln>
+          <a:noFill/>
+        </a:ln>
+        <a:effectLst/>
+      </c:spPr>
+      <c:txPr>
+        <a:bodyPr rot="0" spcFirstLastPara="1" vertOverflow="ellipsis" vert="horz" wrap="square" anchor="ctr" anchorCtr="1"/>
+        <a:lstStyle/>
+        <a:p>
+          <a:pPr>
+            <a:defRPr sz="1197" b="0" i="0" u="none" strike="noStrike" kern="1200" baseline="0">
+              <a:solidFill>
+                <a:schemeClr val="tx1">
+                  <a:lumMod val="65000"/>
+                  <a:lumOff val="35000"/>
+                </a:schemeClr>
+              </a:solidFill>
+              <a:latin typeface="+mn-lt"/>
+              <a:ea typeface="+mn-ea"/>
+              <a:cs typeface="+mn-cs"/>
+            </a:defRPr>
+          </a:pPr>
+          <a:endParaRPr lang="de-DE"/>
+        </a:p>
+      </c:txPr>
+    </c:legend>
+    <c:plotVisOnly val="1"/>
+    <c:dispBlanksAs val="gap"/>
+    <c:showDLblsOverMax val="0"/>
+    <c:extLst>
+      <c:ext xmlns:c16r3="http://schemas.microsoft.com/office/drawing/2017/03/chart" uri="{56B9EC1D-385E-4148-901F-78D8002777C0}">
+        <c16r3:dataDisplayOptions16>
+          <c16r3:dispNaAsBlank val="1"/>
+        </c16r3:dataDisplayOptions16>
+      </c:ext>
+    </c:extLst>
+  </c:chart>
+  <c:spPr>
+    <a:noFill/>
+    <a:ln>
+      <a:noFill/>
+    </a:ln>
+    <a:effectLst/>
+  </c:spPr>
+  <c:txPr>
+    <a:bodyPr/>
+    <a:lstStyle/>
+    <a:p>
+      <a:pPr>
+        <a:defRPr/>
+      </a:pPr>
+      <a:endParaRPr lang="de-DE"/>
+    </a:p>
+  </c:txPr>
+  <c:externalData r:id="rId3">
+    <c:autoUpdate val="0"/>
+  </c:externalData>
+</c:chartSpace>
+</file>
+
+<file path=ppt/charts/chart12.xml><?xml version="1.0" encoding="utf-8"?>
+<c:chartSpace xmlns:c="http://schemas.openxmlformats.org/drawingml/2006/chart" xmlns:a="http://schemas.openxmlformats.org/drawingml/2006/main" xmlns:r="http://schemas.openxmlformats.org/officeDocument/2006/relationships" xmlns:c16r2="http://schemas.microsoft.com/office/drawing/2015/06/chart">
+  <c:date1904 val="0"/>
+  <c:lang val="de-DE"/>
+  <c:roundedCorners val="0"/>
+  <mc:AlternateContent xmlns:mc="http://schemas.openxmlformats.org/markup-compatibility/2006">
+    <mc:Choice xmlns:c14="http://schemas.microsoft.com/office/drawing/2007/8/2/chart" Requires="c14">
+      <c14:style val="102"/>
+    </mc:Choice>
+    <mc:Fallback>
+      <c:style val="2"/>
+    </mc:Fallback>
+  </mc:AlternateContent>
+  <c:chart>
+    <c:autoTitleDeleted val="0"/>
+    <c:plotArea>
+      <c:layout/>
+      <c:barChart>
+        <c:barDir val="col"/>
+        <c:grouping val="clustered"/>
+        <c:varyColors val="0"/>
+        <c:ser>
+          <c:idx val="0"/>
+          <c:order val="0"/>
+          <c:tx>
+            <c:strRef>
+              <c:f>Tabelle1!$B$1</c:f>
+              <c:strCache>
+                <c:ptCount val="1"/>
+                <c:pt idx="0">
+                  <c:v>Datenreihe 1</c:v>
+                </c:pt>
+              </c:strCache>
+            </c:strRef>
+          </c:tx>
+          <c:spPr>
+            <a:solidFill>
+              <a:schemeClr val="accent1"/>
+            </a:solidFill>
+            <a:ln>
+              <a:noFill/>
+            </a:ln>
+            <a:effectLst/>
+          </c:spPr>
+          <c:invertIfNegative val="0"/>
+          <c:dLbls>
+            <c:dLbl>
+              <c:idx val="1"/>
+              <c:tx>
+                <c:rich>
+                  <a:bodyPr rot="0" spcFirstLastPara="1" vertOverflow="ellipsis" vert="horz" wrap="square" lIns="38100" tIns="19050" rIns="38100" bIns="19050" anchor="ctr" anchorCtr="1">
+                    <a:spAutoFit/>
+                  </a:bodyPr>
+                  <a:lstStyle/>
+                  <a:p>
+                    <a:pPr>
+                      <a:defRPr sz="1197" b="0" i="1" u="none" strike="noStrike" kern="1200" baseline="0">
+                        <a:solidFill>
+                          <a:schemeClr val="tx1">
+                            <a:lumMod val="75000"/>
+                            <a:lumOff val="25000"/>
+                          </a:schemeClr>
+                        </a:solidFill>
+                        <a:latin typeface="+mn-lt"/>
+                        <a:ea typeface="+mn-ea"/>
+                        <a:cs typeface="+mn-cs"/>
+                      </a:defRPr>
+                    </a:pPr>
+                    <a:r>
+                      <a:rPr lang="de-DE" i="1"/>
+                      <a:t>low</a:t>
+                    </a:r>
+                  </a:p>
+                </c:rich>
+              </c:tx>
+              <c:spPr>
+                <a:noFill/>
+                <a:ln>
+                  <a:noFill/>
+                </a:ln>
+                <a:effectLst/>
+              </c:spPr>
+              <c:txPr>
+                <a:bodyPr rot="0" spcFirstLastPara="1" vertOverflow="ellipsis" vert="horz" wrap="square" lIns="38100" tIns="19050" rIns="38100" bIns="19050" anchor="ctr" anchorCtr="1">
+                  <a:spAutoFit/>
+                </a:bodyPr>
+                <a:lstStyle/>
+                <a:p>
+                  <a:pPr>
+                    <a:defRPr sz="1197" b="0" i="1" u="none" strike="noStrike" kern="1200" baseline="0">
+                      <a:solidFill>
+                        <a:schemeClr val="tx1">
+                          <a:lumMod val="75000"/>
+                          <a:lumOff val="25000"/>
+                        </a:schemeClr>
+                      </a:solidFill>
+                      <a:latin typeface="+mn-lt"/>
+                      <a:ea typeface="+mn-ea"/>
+                      <a:cs typeface="+mn-cs"/>
+                    </a:defRPr>
+                  </a:pPr>
+                  <a:endParaRPr lang="de-DE"/>
+                </a:p>
+              </c:txPr>
+              <c:showLegendKey val="0"/>
+              <c:showVal val="1"/>
+              <c:showCatName val="0"/>
+              <c:showSerName val="0"/>
+              <c:showPercent val="0"/>
+              <c:showBubbleSize val="0"/>
+              <c:extLst>
+                <c:ext xmlns:c15="http://schemas.microsoft.com/office/drawing/2012/chart" uri="{CE6537A1-D6FC-4f65-9D91-7224C49458BB}">
+                  <c15:showDataLabelsRange val="0"/>
+                </c:ext>
+                <c:ext xmlns:c16="http://schemas.microsoft.com/office/drawing/2014/chart" uri="{C3380CC4-5D6E-409C-BE32-E72D297353CC}">
+                  <c16:uniqueId val="{00000004-CAB9-46FE-9C46-4EB4BE152DB1}"/>
+                </c:ext>
+              </c:extLst>
+            </c:dLbl>
+            <c:dLbl>
+              <c:idx val="3"/>
+              <c:tx>
+                <c:rich>
+                  <a:bodyPr rot="0" spcFirstLastPara="1" vertOverflow="ellipsis" vert="horz" wrap="square" lIns="38100" tIns="19050" rIns="38100" bIns="19050" anchor="ctr" anchorCtr="1">
+                    <a:spAutoFit/>
+                  </a:bodyPr>
+                  <a:lstStyle/>
+                  <a:p>
+                    <a:pPr>
+                      <a:defRPr sz="1197" b="0" i="0" u="none" strike="noStrike" kern="1200" baseline="0">
+                        <a:solidFill>
+                          <a:srgbClr val="C00000"/>
+                        </a:solidFill>
+                        <a:latin typeface="+mn-lt"/>
+                        <a:ea typeface="+mn-ea"/>
+                        <a:cs typeface="+mn-cs"/>
+                      </a:defRPr>
+                    </a:pPr>
+                    <a:r>
+                      <a:rPr lang="de-DE" sz="1600" b="1">
+                        <a:solidFill>
+                          <a:srgbClr val="C00000"/>
+                        </a:solidFill>
+                      </a:rPr>
+                      <a:t>Peak</a:t>
+                    </a:r>
+                    <a:r>
+                      <a:rPr lang="de-DE">
+                        <a:solidFill>
+                          <a:srgbClr val="C00000"/>
+                        </a:solidFill>
+                      </a:rPr>
+                      <a:t> 4.5</a:t>
+                    </a:r>
+                  </a:p>
+                </c:rich>
+              </c:tx>
+              <c:spPr>
+                <a:noFill/>
+                <a:ln>
+                  <a:noFill/>
+                </a:ln>
+                <a:effectLst/>
+              </c:spPr>
+              <c:txPr>
+                <a:bodyPr rot="0" spcFirstLastPara="1" vertOverflow="ellipsis" vert="horz" wrap="square" lIns="38100" tIns="19050" rIns="38100" bIns="19050" anchor="ctr" anchorCtr="1">
+                  <a:spAutoFit/>
+                </a:bodyPr>
+                <a:lstStyle/>
+                <a:p>
+                  <a:pPr>
+                    <a:defRPr sz="1197" b="0" i="0" u="none" strike="noStrike" kern="1200" baseline="0">
+                      <a:solidFill>
+                        <a:srgbClr val="C00000"/>
+                      </a:solidFill>
+                      <a:latin typeface="+mn-lt"/>
+                      <a:ea typeface="+mn-ea"/>
+                      <a:cs typeface="+mn-cs"/>
+                    </a:defRPr>
+                  </a:pPr>
+                  <a:endParaRPr lang="de-DE"/>
+                </a:p>
+              </c:txPr>
+              <c:showLegendKey val="0"/>
+              <c:showVal val="1"/>
+              <c:showCatName val="0"/>
+              <c:showSerName val="0"/>
+              <c:showPercent val="0"/>
+              <c:showBubbleSize val="0"/>
+              <c:extLst>
+                <c:ext xmlns:c15="http://schemas.microsoft.com/office/drawing/2012/chart" uri="{CE6537A1-D6FC-4f65-9D91-7224C49458BB}">
+                  <c15:showDataLabelsRange val="0"/>
+                </c:ext>
+                <c:ext xmlns:c16="http://schemas.microsoft.com/office/drawing/2014/chart" uri="{C3380CC4-5D6E-409C-BE32-E72D297353CC}">
+                  <c16:uniqueId val="{00000003-CAB9-46FE-9C46-4EB4BE152DB1}"/>
+                </c:ext>
+              </c:extLst>
+            </c:dLbl>
+            <c:spPr>
+              <a:noFill/>
+              <a:ln>
+                <a:noFill/>
+              </a:ln>
+              <a:effectLst/>
+            </c:spPr>
+            <c:txPr>
+              <a:bodyPr rot="0" spcFirstLastPara="1" vertOverflow="ellipsis" vert="horz" wrap="square" lIns="38100" tIns="19050" rIns="38100" bIns="19050" anchor="ctr" anchorCtr="1">
+                <a:spAutoFit/>
+              </a:bodyPr>
+              <a:lstStyle/>
+              <a:p>
+                <a:pPr>
+                  <a:defRPr sz="1197" b="0" i="0" u="none" strike="noStrike" kern="1200" baseline="0">
+                    <a:solidFill>
+                      <a:schemeClr val="tx1">
+                        <a:lumMod val="75000"/>
+                        <a:lumOff val="25000"/>
+                      </a:schemeClr>
+                    </a:solidFill>
+                    <a:latin typeface="+mn-lt"/>
+                    <a:ea typeface="+mn-ea"/>
+                    <a:cs typeface="+mn-cs"/>
+                  </a:defRPr>
+                </a:pPr>
+                <a:endParaRPr lang="de-DE"/>
+              </a:p>
+            </c:txPr>
+            <c:showLegendKey val="0"/>
+            <c:showVal val="1"/>
+            <c:showCatName val="0"/>
+            <c:showSerName val="0"/>
+            <c:showPercent val="0"/>
+            <c:showBubbleSize val="0"/>
+            <c:showLeaderLines val="0"/>
+            <c:extLst>
+              <c:ext xmlns:c15="http://schemas.microsoft.com/office/drawing/2012/chart" uri="{CE6537A1-D6FC-4f65-9D91-7224C49458BB}">
+                <c15:showLeaderLines val="0"/>
+              </c:ext>
+            </c:extLst>
+          </c:dLbls>
+          <c:cat>
+            <c:strRef>
+              <c:f>Tabelle1!$A$2:$A$5</c:f>
+              <c:strCache>
+                <c:ptCount val="4"/>
+                <c:pt idx="0">
+                  <c:v>Kategorie 1</c:v>
+                </c:pt>
+                <c:pt idx="1">
+                  <c:v>Kategorie 2</c:v>
+                </c:pt>
+                <c:pt idx="2">
+                  <c:v>Kategorie 3</c:v>
+                </c:pt>
+                <c:pt idx="3">
+                  <c:v>Kategorie 4</c:v>
+                </c:pt>
+              </c:strCache>
+            </c:strRef>
+          </c:cat>
+          <c:val>
+            <c:numRef>
+              <c:f>Tabelle1!$B$2:$B$5</c:f>
+              <c:numCache>
+                <c:formatCode>General</c:formatCode>
+                <c:ptCount val="4"/>
+                <c:pt idx="0">
+                  <c:v>4.3</c:v>
+                </c:pt>
+                <c:pt idx="1">
+                  <c:v>2.5</c:v>
+                </c:pt>
+                <c:pt idx="2">
+                  <c:v>3.5</c:v>
+                </c:pt>
+                <c:pt idx="3">
+                  <c:v>4.5</c:v>
+                </c:pt>
+              </c:numCache>
+            </c:numRef>
+          </c:val>
+          <c:extLst>
+            <c:ext xmlns:c16="http://schemas.microsoft.com/office/drawing/2014/chart" uri="{C3380CC4-5D6E-409C-BE32-E72D297353CC}">
+              <c16:uniqueId val="{00000000-CAB9-46FE-9C46-4EB4BE152DB1}"/>
+            </c:ext>
+          </c:extLst>
+        </c:ser>
+        <c:ser>
+          <c:idx val="1"/>
+          <c:order val="1"/>
+          <c:tx>
+            <c:strRef>
+              <c:f>Tabelle1!$C$1</c:f>
+              <c:strCache>
+                <c:ptCount val="1"/>
+                <c:pt idx="0">
+                  <c:v>Datenreihe 2</c:v>
+                </c:pt>
+              </c:strCache>
+            </c:strRef>
+          </c:tx>
+          <c:spPr>
+            <a:solidFill>
+              <a:schemeClr val="accent2"/>
+            </a:solidFill>
+            <a:ln>
+              <a:noFill/>
+            </a:ln>
+            <a:effectLst/>
+          </c:spPr>
+          <c:invertIfNegative val="0"/>
+          <c:cat>
+            <c:strRef>
+              <c:f>Tabelle1!$A$2:$A$5</c:f>
+              <c:strCache>
+                <c:ptCount val="4"/>
+                <c:pt idx="0">
+                  <c:v>Kategorie 1</c:v>
+                </c:pt>
+                <c:pt idx="1">
+                  <c:v>Kategorie 2</c:v>
+                </c:pt>
+                <c:pt idx="2">
+                  <c:v>Kategorie 3</c:v>
+                </c:pt>
+                <c:pt idx="3">
+                  <c:v>Kategorie 4</c:v>
+                </c:pt>
+              </c:strCache>
+            </c:strRef>
+          </c:cat>
+          <c:val>
+            <c:numRef>
+              <c:f>Tabelle1!$C$2:$C$5</c:f>
+              <c:numCache>
+                <c:formatCode>General</c:formatCode>
+                <c:ptCount val="4"/>
+                <c:pt idx="0">
+                  <c:v>2.4</c:v>
+                </c:pt>
+                <c:pt idx="1">
+                  <c:v>4.4000000000000004</c:v>
+                </c:pt>
+                <c:pt idx="2">
+                  <c:v>1.8</c:v>
+                </c:pt>
+                <c:pt idx="3">
+                  <c:v>2.8</c:v>
+                </c:pt>
+              </c:numCache>
+            </c:numRef>
+          </c:val>
+          <c:extLst>
+            <c:ext xmlns:c16="http://schemas.microsoft.com/office/drawing/2014/chart" uri="{C3380CC4-5D6E-409C-BE32-E72D297353CC}">
+              <c16:uniqueId val="{00000001-CAB9-46FE-9C46-4EB4BE152DB1}"/>
+            </c:ext>
+          </c:extLst>
+        </c:ser>
+        <c:ser>
+          <c:idx val="2"/>
+          <c:order val="2"/>
+          <c:tx>
+            <c:strRef>
+              <c:f>Tabelle1!$D$1</c:f>
+              <c:strCache>
+                <c:ptCount val="1"/>
+                <c:pt idx="0">
+                  <c:v>Datenreihe 3</c:v>
+                </c:pt>
+              </c:strCache>
+            </c:strRef>
+          </c:tx>
+          <c:spPr>
+            <a:solidFill>
+              <a:schemeClr val="accent3"/>
+            </a:solidFill>
+            <a:ln>
+              <a:noFill/>
+            </a:ln>
+            <a:effectLst/>
+          </c:spPr>
+          <c:invertIfNegative val="0"/>
+          <c:cat>
+            <c:strRef>
+              <c:f>Tabelle1!$A$2:$A$5</c:f>
+              <c:strCache>
+                <c:ptCount val="4"/>
+                <c:pt idx="0">
+                  <c:v>Kategorie 1</c:v>
+                </c:pt>
+                <c:pt idx="1">
+                  <c:v>Kategorie 2</c:v>
+                </c:pt>
+                <c:pt idx="2">
+                  <c:v>Kategorie 3</c:v>
+                </c:pt>
+                <c:pt idx="3">
+                  <c:v>Kategorie 4</c:v>
+                </c:pt>
+              </c:strCache>
+            </c:strRef>
+          </c:cat>
+          <c:val>
+            <c:numRef>
+              <c:f>Tabelle1!$D$2:$D$5</c:f>
+              <c:numCache>
+                <c:formatCode>General</c:formatCode>
+                <c:ptCount val="4"/>
+                <c:pt idx="0">
+                  <c:v>2</c:v>
+                </c:pt>
+                <c:pt idx="1">
+                  <c:v>2</c:v>
+                </c:pt>
+                <c:pt idx="2">
+                  <c:v>3</c:v>
+                </c:pt>
+                <c:pt idx="3">
+                  <c:v>5</c:v>
+                </c:pt>
+              </c:numCache>
+            </c:numRef>
+          </c:val>
+          <c:extLst>
+            <c:ext xmlns:c16="http://schemas.microsoft.com/office/drawing/2014/chart" uri="{C3380CC4-5D6E-409C-BE32-E72D297353CC}">
+              <c16:uniqueId val="{00000002-CAB9-46FE-9C46-4EB4BE152DB1}"/>
+            </c:ext>
+          </c:extLst>
+        </c:ser>
+        <c:dLbls>
+          <c:showLegendKey val="0"/>
+          <c:showVal val="0"/>
+          <c:showCatName val="0"/>
+          <c:showSerName val="0"/>
+          <c:showPercent val="0"/>
+          <c:showBubbleSize val="0"/>
+        </c:dLbls>
+        <c:gapWidth val="219"/>
+        <c:overlap val="-27"/>
+        <c:axId val="1595915152"/>
+        <c:axId val="253673040"/>
+      </c:barChart>
+      <c:catAx>
+        <c:axId val="1595915152"/>
+        <c:scaling>
+          <c:orientation val="minMax"/>
+        </c:scaling>
+        <c:delete val="0"/>
+        <c:axPos val="b"/>
+        <c:numFmt formatCode="General" sourceLinked="1"/>
+        <c:majorTickMark val="none"/>
+        <c:minorTickMark val="none"/>
+        <c:tickLblPos val="nextTo"/>
+        <c:spPr>
+          <a:noFill/>
+          <a:ln w="9525" cap="flat" cmpd="sng" algn="ctr">
+            <a:solidFill>
+              <a:schemeClr val="tx1">
+                <a:lumMod val="15000"/>
+                <a:lumOff val="85000"/>
+              </a:schemeClr>
+            </a:solidFill>
+            <a:round/>
+          </a:ln>
+          <a:effectLst/>
+        </c:spPr>
+        <c:txPr>
+          <a:bodyPr rot="-60000000" spcFirstLastPara="1" vertOverflow="ellipsis" vert="horz" wrap="square" anchor="ctr" anchorCtr="1"/>
+          <a:lstStyle/>
+          <a:p>
+            <a:pPr>
+              <a:defRPr sz="1197" b="0" i="0" u="none" strike="noStrike" kern="1200" baseline="0">
+                <a:solidFill>
+                  <a:schemeClr val="tx1">
+                    <a:lumMod val="65000"/>
+                    <a:lumOff val="35000"/>
+                  </a:schemeClr>
+                </a:solidFill>
+                <a:latin typeface="+mn-lt"/>
+                <a:ea typeface="+mn-ea"/>
+                <a:cs typeface="+mn-cs"/>
+              </a:defRPr>
+            </a:pPr>
+            <a:endParaRPr lang="de-DE"/>
+          </a:p>
+        </c:txPr>
+        <c:crossAx val="253673040"/>
+        <c:crosses val="autoZero"/>
+        <c:auto val="1"/>
+        <c:lblAlgn val="ctr"/>
+        <c:lblOffset val="100"/>
+        <c:noMultiLvlLbl val="0"/>
+      </c:catAx>
+      <c:valAx>
+        <c:axId val="253673040"/>
+        <c:scaling>
+          <c:orientation val="minMax"/>
+        </c:scaling>
+        <c:delete val="0"/>
+        <c:axPos val="l"/>
+        <c:majorGridlines>
+          <c:spPr>
+            <a:ln w="9525" cap="flat" cmpd="sng" algn="ctr">
+              <a:solidFill>
+                <a:schemeClr val="tx1">
+                  <a:lumMod val="15000"/>
+                  <a:lumOff val="85000"/>
+                </a:schemeClr>
+              </a:solidFill>
+              <a:round/>
+            </a:ln>
+            <a:effectLst/>
+          </c:spPr>
+        </c:majorGridlines>
+        <c:numFmt formatCode="General" sourceLinked="1"/>
+        <c:majorTickMark val="none"/>
+        <c:minorTickMark val="none"/>
+        <c:tickLblPos val="nextTo"/>
+        <c:spPr>
+          <a:noFill/>
+          <a:ln>
+            <a:noFill/>
+          </a:ln>
+          <a:effectLst/>
+        </c:spPr>
+        <c:txPr>
+          <a:bodyPr rot="-60000000" spcFirstLastPara="1" vertOverflow="ellipsis" vert="horz" wrap="square" anchor="ctr" anchorCtr="1"/>
+          <a:lstStyle/>
+          <a:p>
+            <a:pPr>
+              <a:defRPr sz="1197" b="0" i="0" u="none" strike="noStrike" kern="1200" baseline="0">
+                <a:solidFill>
+                  <a:schemeClr val="tx1">
+                    <a:lumMod val="65000"/>
+                    <a:lumOff val="35000"/>
+                  </a:schemeClr>
+                </a:solidFill>
+                <a:latin typeface="+mn-lt"/>
+                <a:ea typeface="+mn-ea"/>
+                <a:cs typeface="+mn-cs"/>
+              </a:defRPr>
+            </a:pPr>
+            <a:endParaRPr lang="de-DE"/>
+          </a:p>
+        </c:txPr>
+        <c:crossAx val="1595915152"/>
+        <c:crosses val="autoZero"/>
+        <c:crossBetween val="between"/>
+      </c:valAx>
+      <c:spPr>
+        <a:noFill/>
+        <a:ln>
+          <a:noFill/>
+        </a:ln>
+        <a:effectLst/>
+      </c:spPr>
+    </c:plotArea>
+    <c:legend>
+      <c:legendPos val="b"/>
+      <c:overlay val="0"/>
+      <c:spPr>
+        <a:noFill/>
+        <a:ln>
+          <a:noFill/>
+        </a:ln>
+        <a:effectLst/>
+      </c:spPr>
+      <c:txPr>
+        <a:bodyPr rot="0" spcFirstLastPara="1" vertOverflow="ellipsis" vert="horz" wrap="square" anchor="ctr" anchorCtr="1"/>
+        <a:lstStyle/>
+        <a:p>
+          <a:pPr>
+            <a:defRPr sz="1197" b="0" i="0" u="none" strike="noStrike" kern="1200" baseline="0">
+              <a:solidFill>
+                <a:schemeClr val="tx1">
+                  <a:lumMod val="65000"/>
+                  <a:lumOff val="35000"/>
+                </a:schemeClr>
+              </a:solidFill>
+              <a:latin typeface="+mn-lt"/>
+              <a:ea typeface="+mn-ea"/>
+              <a:cs typeface="+mn-cs"/>
+            </a:defRPr>
+          </a:pPr>
+          <a:endParaRPr lang="de-DE"/>
+        </a:p>
+      </c:txPr>
+    </c:legend>
+    <c:plotVisOnly val="1"/>
+    <c:dispBlanksAs val="gap"/>
+    <c:showDLblsOverMax val="0"/>
+    <c:extLst>
+      <c:ext xmlns:c16r3="http://schemas.microsoft.com/office/drawing/2017/03/chart" uri="{56B9EC1D-385E-4148-901F-78D8002777C0}">
+        <c16r3:dataDisplayOptions16>
+          <c16r3:dispNaAsBlank val="1"/>
+        </c16r3:dataDisplayOptions16>
+      </c:ext>
+    </c:extLst>
+  </c:chart>
+  <c:spPr>
+    <a:noFill/>
+    <a:ln>
+      <a:noFill/>
+    </a:ln>
+    <a:effectLst/>
+  </c:spPr>
+  <c:txPr>
+    <a:bodyPr/>
+    <a:lstStyle/>
+    <a:p>
+      <a:pPr>
+        <a:defRPr/>
+      </a:pPr>
+      <a:endParaRPr lang="de-DE"/>
+    </a:p>
+  </c:txPr>
+  <c:externalData r:id="rId3">
+    <c:autoUpdate val="0"/>
+  </c:externalData>
+</c:chartSpace>
+</file>
+
+<file path=ppt/charts/chart13.xml><?xml version="1.0" encoding="utf-8"?>
+<c:chartSpace xmlns:c="http://schemas.openxmlformats.org/drawingml/2006/chart" xmlns:a="http://schemas.openxmlformats.org/drawingml/2006/main" xmlns:r="http://schemas.openxmlformats.org/officeDocument/2006/relationships" xmlns:c16r2="http://schemas.microsoft.com/office/drawing/2015/06/chart">
+  <c:date1904 val="0"/>
+  <c:lang val="de-DE"/>
+  <c:roundedCorners val="0"/>
+  <mc:AlternateContent xmlns:mc="http://schemas.openxmlformats.org/markup-compatibility/2006">
+    <mc:Choice xmlns:c14="http://schemas.microsoft.com/office/drawing/2007/8/2/chart" Requires="c14">
+      <c14:style val="102"/>
+    </mc:Choice>
+    <mc:Fallback>
+      <c:style val="2"/>
+    </mc:Fallback>
+  </mc:AlternateContent>
+  <c:chart>
+    <c:autoTitleDeleted val="0"/>
+    <c:plotArea>
+      <c:layout/>
+      <c:barChart>
+        <c:barDir val="bar"/>
+        <c:grouping val="clustered"/>
+        <c:varyColors val="0"/>
+        <c:ser>
+          <c:idx val="0"/>
+          <c:order val="0"/>
+          <c:tx>
+            <c:strRef>
+              <c:f>Tabelle1!$B$1</c:f>
+              <c:strCache>
+                <c:ptCount val="1"/>
+                <c:pt idx="0">
+                  <c:v>Datenreihe 1</c:v>
+                </c:pt>
+              </c:strCache>
+            </c:strRef>
+          </c:tx>
+          <c:spPr>
+            <a:solidFill>
+              <a:schemeClr val="accent1"/>
+            </a:solidFill>
+            <a:ln>
+              <a:noFill/>
+            </a:ln>
+            <a:effectLst/>
+          </c:spPr>
+          <c:invertIfNegative val="0"/>
+          <c:cat>
+            <c:strRef>
+              <c:f>Tabelle1!$A$2:$A$5</c:f>
+              <c:strCache>
+                <c:ptCount val="4"/>
+                <c:pt idx="0">
+                  <c:v>Kategorie 1</c:v>
+                </c:pt>
+                <c:pt idx="1">
+                  <c:v>Kategorie 2</c:v>
+                </c:pt>
+                <c:pt idx="2">
+                  <c:v>Kategorie 3</c:v>
+                </c:pt>
+                <c:pt idx="3">
+                  <c:v>Kategorie 4</c:v>
+                </c:pt>
+              </c:strCache>
+            </c:strRef>
+          </c:cat>
+          <c:val>
+            <c:numRef>
+              <c:f>Tabelle1!$B$2:$B$5</c:f>
+              <c:numCache>
+                <c:formatCode>General</c:formatCode>
+                <c:ptCount val="4"/>
+                <c:pt idx="0">
+                  <c:v>4.3</c:v>
+                </c:pt>
+                <c:pt idx="1">
+                  <c:v>2.5</c:v>
+                </c:pt>
+                <c:pt idx="2">
+                  <c:v>3.5</c:v>
+                </c:pt>
+                <c:pt idx="3">
+                  <c:v>4.5</c:v>
+                </c:pt>
+              </c:numCache>
+            </c:numRef>
+          </c:val>
+          <c:extLst>
+            <c:ext xmlns:c16="http://schemas.microsoft.com/office/drawing/2014/chart" uri="{C3380CC4-5D6E-409C-BE32-E72D297353CC}">
+              <c16:uniqueId val="{00000000-06B2-4A75-86B2-AE195452C7BE}"/>
+            </c:ext>
+          </c:extLst>
+        </c:ser>
+        <c:ser>
+          <c:idx val="1"/>
+          <c:order val="1"/>
+          <c:tx>
+            <c:strRef>
+              <c:f>Tabelle1!$C$1</c:f>
+              <c:strCache>
+                <c:ptCount val="1"/>
+                <c:pt idx="0">
+                  <c:v>Datenreihe 2</c:v>
+                </c:pt>
+              </c:strCache>
+            </c:strRef>
+          </c:tx>
+          <c:spPr>
+            <a:solidFill>
+              <a:schemeClr val="accent2"/>
+            </a:solidFill>
+            <a:ln>
+              <a:noFill/>
+            </a:ln>
+            <a:effectLst/>
+          </c:spPr>
+          <c:invertIfNegative val="0"/>
+          <c:dLbls>
+            <c:dLbl>
+              <c:idx val="0"/>
+              <c:tx>
+                <c:rich>
+                  <a:bodyPr/>
+                  <a:lstStyle/>
+                  <a:p>
+                    <a:r>
+                      <a:rPr lang="de-DE" sz="2000"/>
+                      <a:t>Big</a:t>
+                    </a:r>
+                    <a:r>
+                      <a:rPr lang="de-DE"/>
+                      <a:t> and </a:t>
+                    </a:r>
+                    <a:r>
+                      <a:rPr lang="de-DE" sz="800"/>
+                      <a:t>small</a:t>
+                    </a:r>
+                  </a:p>
+                </c:rich>
+              </c:tx>
+              <c:showLegendKey val="0"/>
+              <c:showVal val="1"/>
+              <c:showCatName val="0"/>
+              <c:showSerName val="0"/>
+              <c:showPercent val="0"/>
+              <c:showBubbleSize val="0"/>
+              <c:extLst>
+                <c:ext xmlns:c15="http://schemas.microsoft.com/office/drawing/2012/chart" uri="{CE6537A1-D6FC-4f65-9D91-7224C49458BB}">
+                  <c15:showDataLabelsRange val="0"/>
+                </c:ext>
+                <c:ext xmlns:c16="http://schemas.microsoft.com/office/drawing/2014/chart" uri="{C3380CC4-5D6E-409C-BE32-E72D297353CC}">
+                  <c16:uniqueId val="{00000003-06B2-4A75-86B2-AE195452C7BE}"/>
+                </c:ext>
+              </c:extLst>
+            </c:dLbl>
+            <c:spPr>
+              <a:noFill/>
+              <a:ln>
+                <a:noFill/>
+              </a:ln>
+              <a:effectLst/>
+            </c:spPr>
+            <c:txPr>
+              <a:bodyPr rot="0" spcFirstLastPara="1" vertOverflow="ellipsis" vert="horz" wrap="square" lIns="38100" tIns="19050" rIns="38100" bIns="19050" anchor="ctr" anchorCtr="1">
+                <a:spAutoFit/>
+              </a:bodyPr>
+              <a:lstStyle/>
+              <a:p>
+                <a:pPr>
+                  <a:defRPr sz="1197" b="0" i="0" u="none" strike="noStrike" kern="1200" baseline="0">
+                    <a:solidFill>
+                      <a:schemeClr val="tx1">
+                        <a:lumMod val="75000"/>
+                        <a:lumOff val="25000"/>
+                      </a:schemeClr>
+                    </a:solidFill>
+                    <a:latin typeface="+mn-lt"/>
+                    <a:ea typeface="+mn-ea"/>
+                    <a:cs typeface="+mn-cs"/>
+                  </a:defRPr>
+                </a:pPr>
+                <a:endParaRPr lang="de-DE"/>
+              </a:p>
+            </c:txPr>
+            <c:showLegendKey val="0"/>
+            <c:showVal val="1"/>
+            <c:showCatName val="0"/>
+            <c:showSerName val="0"/>
+            <c:showPercent val="0"/>
+            <c:showBubbleSize val="0"/>
+            <c:showLeaderLines val="0"/>
+            <c:extLst>
+              <c:ext xmlns:c15="http://schemas.microsoft.com/office/drawing/2012/chart" uri="{CE6537A1-D6FC-4f65-9D91-7224C49458BB}">
+                <c15:showLeaderLines val="0"/>
+              </c:ext>
+            </c:extLst>
+          </c:dLbls>
+          <c:cat>
+            <c:strRef>
+              <c:f>Tabelle1!$A$2:$A$5</c:f>
+              <c:strCache>
+                <c:ptCount val="4"/>
+                <c:pt idx="0">
+                  <c:v>Kategorie 1</c:v>
+                </c:pt>
+                <c:pt idx="1">
+                  <c:v>Kategorie 2</c:v>
+                </c:pt>
+                <c:pt idx="2">
+                  <c:v>Kategorie 3</c:v>
+                </c:pt>
+                <c:pt idx="3">
+                  <c:v>Kategorie 4</c:v>
+                </c:pt>
+              </c:strCache>
+            </c:strRef>
+          </c:cat>
+          <c:val>
+            <c:numRef>
+              <c:f>Tabelle1!$C$2:$C$5</c:f>
+              <c:numCache>
+                <c:formatCode>General</c:formatCode>
+                <c:ptCount val="4"/>
+                <c:pt idx="0">
+                  <c:v>2.4</c:v>
+                </c:pt>
+                <c:pt idx="1">
+                  <c:v>4.4000000000000004</c:v>
+                </c:pt>
+                <c:pt idx="2">
+                  <c:v>1.8</c:v>
+                </c:pt>
+                <c:pt idx="3">
+                  <c:v>2.8</c:v>
+                </c:pt>
+              </c:numCache>
+            </c:numRef>
+          </c:val>
+          <c:extLst>
+            <c:ext xmlns:c16="http://schemas.microsoft.com/office/drawing/2014/chart" uri="{C3380CC4-5D6E-409C-BE32-E72D297353CC}">
+              <c16:uniqueId val="{00000001-06B2-4A75-86B2-AE195452C7BE}"/>
+            </c:ext>
+          </c:extLst>
+        </c:ser>
+        <c:ser>
+          <c:idx val="2"/>
+          <c:order val="2"/>
+          <c:tx>
+            <c:strRef>
+              <c:f>Tabelle1!$D$1</c:f>
+              <c:strCache>
+                <c:ptCount val="1"/>
+                <c:pt idx="0">
+                  <c:v>Datenreihe 3</c:v>
+                </c:pt>
+              </c:strCache>
+            </c:strRef>
+          </c:tx>
+          <c:spPr>
+            <a:solidFill>
+              <a:schemeClr val="accent3"/>
+            </a:solidFill>
+            <a:ln>
+              <a:noFill/>
+            </a:ln>
+            <a:effectLst/>
+          </c:spPr>
+          <c:invertIfNegative val="0"/>
+          <c:cat>
+            <c:strRef>
+              <c:f>Tabelle1!$A$2:$A$5</c:f>
+              <c:strCache>
+                <c:ptCount val="4"/>
+                <c:pt idx="0">
+                  <c:v>Kategorie 1</c:v>
+                </c:pt>
+                <c:pt idx="1">
+                  <c:v>Kategorie 2</c:v>
+                </c:pt>
+                <c:pt idx="2">
+                  <c:v>Kategorie 3</c:v>
+                </c:pt>
+                <c:pt idx="3">
+                  <c:v>Kategorie 4</c:v>
+                </c:pt>
+              </c:strCache>
+            </c:strRef>
+          </c:cat>
+          <c:val>
+            <c:numRef>
+              <c:f>Tabelle1!$D$2:$D$5</c:f>
+              <c:numCache>
+                <c:formatCode>General</c:formatCode>
+                <c:ptCount val="4"/>
+                <c:pt idx="0">
+                  <c:v>2</c:v>
+                </c:pt>
+                <c:pt idx="1">
+                  <c:v>2</c:v>
+                </c:pt>
+                <c:pt idx="2">
+                  <c:v>3</c:v>
+                </c:pt>
+                <c:pt idx="3">
+                  <c:v>5</c:v>
+                </c:pt>
+              </c:numCache>
+            </c:numRef>
+          </c:val>
+          <c:extLst>
+            <c:ext xmlns:c16="http://schemas.microsoft.com/office/drawing/2014/chart" uri="{C3380CC4-5D6E-409C-BE32-E72D297353CC}">
+              <c16:uniqueId val="{00000002-06B2-4A75-86B2-AE195452C7BE}"/>
+            </c:ext>
+          </c:extLst>
+        </c:ser>
+        <c:dLbls>
+          <c:showLegendKey val="0"/>
+          <c:showVal val="0"/>
+          <c:showCatName val="0"/>
+          <c:showSerName val="0"/>
+          <c:showPercent val="0"/>
+          <c:showBubbleSize val="0"/>
+        </c:dLbls>
+        <c:gapWidth val="182"/>
+        <c:axId val="1595873888"/>
+        <c:axId val="253427280"/>
+      </c:barChart>
+      <c:catAx>
+        <c:axId val="1595873888"/>
+        <c:scaling>
+          <c:orientation val="minMax"/>
+        </c:scaling>
+        <c:delete val="0"/>
+        <c:axPos val="l"/>
+        <c:numFmt formatCode="General" sourceLinked="1"/>
+        <c:majorTickMark val="none"/>
+        <c:minorTickMark val="none"/>
+        <c:tickLblPos val="nextTo"/>
+        <c:spPr>
+          <a:noFill/>
+          <a:ln w="9525" cap="flat" cmpd="sng" algn="ctr">
+            <a:solidFill>
+              <a:schemeClr val="tx1">
+                <a:lumMod val="15000"/>
+                <a:lumOff val="85000"/>
+              </a:schemeClr>
+            </a:solidFill>
+            <a:round/>
+          </a:ln>
+          <a:effectLst/>
+        </c:spPr>
+        <c:txPr>
+          <a:bodyPr rot="-60000000" spcFirstLastPara="1" vertOverflow="ellipsis" vert="horz" wrap="square" anchor="ctr" anchorCtr="1"/>
+          <a:lstStyle/>
+          <a:p>
+            <a:pPr>
+              <a:defRPr sz="1197" b="0" i="0" u="none" strike="noStrike" kern="1200" baseline="0">
+                <a:solidFill>
+                  <a:schemeClr val="tx1">
+                    <a:lumMod val="65000"/>
+                    <a:lumOff val="35000"/>
+                  </a:schemeClr>
+                </a:solidFill>
+                <a:latin typeface="+mn-lt"/>
+                <a:ea typeface="+mn-ea"/>
+                <a:cs typeface="+mn-cs"/>
+              </a:defRPr>
+            </a:pPr>
+            <a:endParaRPr lang="de-DE"/>
+          </a:p>
+        </c:txPr>
+        <c:crossAx val="253427280"/>
+        <c:crosses val="autoZero"/>
+        <c:auto val="1"/>
+        <c:lblAlgn val="ctr"/>
+        <c:lblOffset val="100"/>
+        <c:noMultiLvlLbl val="0"/>
+      </c:catAx>
+      <c:valAx>
+        <c:axId val="253427280"/>
+        <c:scaling>
+          <c:orientation val="minMax"/>
+        </c:scaling>
+        <c:delete val="0"/>
+        <c:axPos val="b"/>
+        <c:majorGridlines>
+          <c:spPr>
+            <a:ln w="9525" cap="flat" cmpd="sng" algn="ctr">
+              <a:solidFill>
+                <a:schemeClr val="tx1">
+                  <a:lumMod val="15000"/>
+                  <a:lumOff val="85000"/>
+                </a:schemeClr>
+              </a:solidFill>
+              <a:round/>
+            </a:ln>
+            <a:effectLst/>
+          </c:spPr>
+        </c:majorGridlines>
+        <c:numFmt formatCode="General" sourceLinked="1"/>
+        <c:majorTickMark val="none"/>
+        <c:minorTickMark val="none"/>
+        <c:tickLblPos val="nextTo"/>
+        <c:spPr>
+          <a:noFill/>
+          <a:ln>
+            <a:noFill/>
+          </a:ln>
+          <a:effectLst/>
+        </c:spPr>
+        <c:txPr>
+          <a:bodyPr rot="-60000000" spcFirstLastPara="1" vertOverflow="ellipsis" vert="horz" wrap="square" anchor="ctr" anchorCtr="1"/>
+          <a:lstStyle/>
+          <a:p>
+            <a:pPr>
+              <a:defRPr sz="1197" b="0" i="0" u="none" strike="noStrike" kern="1200" baseline="0">
+                <a:solidFill>
+                  <a:schemeClr val="tx1">
+                    <a:lumMod val="65000"/>
+                    <a:lumOff val="35000"/>
+                  </a:schemeClr>
+                </a:solidFill>
+                <a:latin typeface="+mn-lt"/>
+                <a:ea typeface="+mn-ea"/>
+                <a:cs typeface="+mn-cs"/>
+              </a:defRPr>
+            </a:pPr>
+            <a:endParaRPr lang="de-DE"/>
+          </a:p>
+        </c:txPr>
+        <c:crossAx val="1595873888"/>
+        <c:crosses val="autoZero"/>
+        <c:crossBetween val="between"/>
       </c:valAx>
       <c:spPr>
         <a:noFill/>
@@ -1377,7 +2506,7 @@
           </c:val>
           <c:extLst>
             <c:ext xmlns:c16="http://schemas.microsoft.com/office/drawing/2014/chart" uri="{C3380CC4-5D6E-409C-BE32-E72D297353CC}">
-              <c16:uniqueId val="{00000000-F0EC-435C-BB41-A4B49D094CC9}"/>
+              <c16:uniqueId val="{00000000-DE06-49DC-BF5E-147DD96DA6F2}"/>
             </c:ext>
           </c:extLst>
         </c:ser>
@@ -1449,7 +2578,7 @@
           </c:val>
           <c:extLst>
             <c:ext xmlns:c16="http://schemas.microsoft.com/office/drawing/2014/chart" uri="{C3380CC4-5D6E-409C-BE32-E72D297353CC}">
-              <c16:uniqueId val="{00000001-F0EC-435C-BB41-A4B49D094CC9}"/>
+              <c16:uniqueId val="{00000001-DE06-49DC-BF5E-147DD96DA6F2}"/>
             </c:ext>
           </c:extLst>
         </c:ser>
@@ -1463,11 +2592,11 @@
         </c:dLbls>
         <c:gapWidth val="219"/>
         <c:overlap val="-27"/>
-        <c:axId val="1987030751"/>
-        <c:axId val="1193437296"/>
+        <c:axId val="1593218848"/>
+        <c:axId val="253437360"/>
       </c:barChart>
       <c:catAx>
-        <c:axId val="1987030751"/>
+        <c:axId val="1593218848"/>
         <c:scaling>
           <c:orientation val="minMax"/>
         </c:scaling>
@@ -1510,7 +2639,7 @@
             <a:endParaRPr lang="de-DE"/>
           </a:p>
         </c:txPr>
-        <c:crossAx val="1193437296"/>
+        <c:crossAx val="253437360"/>
         <c:crosses val="autoZero"/>
         <c:auto val="1"/>
         <c:lblAlgn val="ctr"/>
@@ -1518,7 +2647,7 @@
         <c:noMultiLvlLbl val="0"/>
       </c:catAx>
       <c:valAx>
-        <c:axId val="1193437296"/>
+        <c:axId val="253437360"/>
         <c:scaling>
           <c:orientation val="minMax"/>
         </c:scaling>
@@ -1569,7 +2698,7 @@
             <a:endParaRPr lang="de-DE"/>
           </a:p>
         </c:txPr>
-        <c:crossAx val="1987030751"/>
+        <c:crossAx val="1593218848"/>
         <c:crosses val="autoZero"/>
         <c:crossBetween val="between"/>
         <c:dispUnits>
@@ -1816,7 +2945,7 @@
           <c:smooth val="0"/>
           <c:extLst>
             <c:ext xmlns:c16="http://schemas.microsoft.com/office/drawing/2014/chart" uri="{C3380CC4-5D6E-409C-BE32-E72D297353CC}">
-              <c16:uniqueId val="{00000000-5BD0-4FF6-95FA-CDA1D93BCF44}"/>
+              <c16:uniqueId val="{00000000-0888-42E8-8384-B6C1933A1A0A}"/>
             </c:ext>
           </c:extLst>
         </c:ser>
@@ -1829,11 +2958,11 @@
           <c:showBubbleSize val="0"/>
         </c:dLbls>
         <c:smooth val="0"/>
-        <c:axId val="49323520"/>
-        <c:axId val="1193483856"/>
+        <c:axId val="1593226272"/>
+        <c:axId val="253452240"/>
       </c:lineChart>
       <c:catAx>
-        <c:axId val="49323520"/>
+        <c:axId val="1593226272"/>
         <c:scaling>
           <c:orientation val="minMax"/>
         </c:scaling>
@@ -1876,7 +3005,7 @@
             <a:endParaRPr lang="de-DE"/>
           </a:p>
         </c:txPr>
-        <c:crossAx val="1193483856"/>
+        <c:crossAx val="253452240"/>
         <c:crosses val="autoZero"/>
         <c:auto val="1"/>
         <c:lblAlgn val="ctr"/>
@@ -1886,7 +3015,7 @@
         <c:noMultiLvlLbl val="0"/>
       </c:catAx>
       <c:valAx>
-        <c:axId val="1193483856"/>
+        <c:axId val="253452240"/>
         <c:scaling>
           <c:orientation val="minMax"/>
         </c:scaling>
@@ -1937,7 +3066,7 @@
             <a:endParaRPr lang="de-DE"/>
           </a:p>
         </c:txPr>
-        <c:crossAx val="49323520"/>
+        <c:crossAx val="1593226272"/>
         <c:crosses val="autoZero"/>
         <c:crossBetween val="between"/>
         <c:dispUnits>
@@ -2147,7 +3276,7 @@
           </c:val>
           <c:extLst>
             <c:ext xmlns:c16="http://schemas.microsoft.com/office/drawing/2014/chart" uri="{C3380CC4-5D6E-409C-BE32-E72D297353CC}">
-              <c16:uniqueId val="{00000000-6EF6-4809-856B-8EA1D231904A}"/>
+              <c16:uniqueId val="{00000000-AF0C-4BEB-9B50-B91ED622C911}"/>
             </c:ext>
           </c:extLst>
         </c:ser>
@@ -2161,11 +3290,11 @@
         </c:dLbls>
         <c:gapWidth val="219"/>
         <c:overlap val="-27"/>
-        <c:axId val="49307744"/>
-        <c:axId val="1193478576"/>
+        <c:axId val="1593224416"/>
+        <c:axId val="253457040"/>
       </c:barChart>
       <c:dateAx>
-        <c:axId val="49307744"/>
+        <c:axId val="1593224416"/>
         <c:scaling>
           <c:orientation val="minMax"/>
         </c:scaling>
@@ -2208,14 +3337,14 @@
             <a:endParaRPr lang="de-DE"/>
           </a:p>
         </c:txPr>
-        <c:crossAx val="1193478576"/>
+        <c:crossAx val="253457040"/>
         <c:crosses val="autoZero"/>
         <c:auto val="0"/>
         <c:lblOffset val="100"/>
         <c:baseTimeUnit val="months"/>
       </c:dateAx>
       <c:valAx>
-        <c:axId val="1193478576"/>
+        <c:axId val="253457040"/>
         <c:scaling>
           <c:orientation val="minMax"/>
         </c:scaling>
@@ -2266,7 +3395,7 @@
             <a:endParaRPr lang="de-DE"/>
           </a:p>
         </c:txPr>
-        <c:crossAx val="49307744"/>
+        <c:crossAx val="1593224416"/>
         <c:crosses val="autoZero"/>
         <c:crossBetween val="between"/>
       </c:valAx>
@@ -2539,7 +3668,7 @@
           </c:val>
           <c:extLst>
             <c:ext xmlns:c16="http://schemas.microsoft.com/office/drawing/2014/chart" uri="{C3380CC4-5D6E-409C-BE32-E72D297353CC}">
-              <c16:uniqueId val="{00000000-A7F0-4FCA-A3FF-97B46DA82327}"/>
+              <c16:uniqueId val="{00000000-F5E0-4296-A13C-5C43C11D61D1}"/>
             </c:ext>
           </c:extLst>
         </c:ser>
@@ -2838,7 +3967,7 @@
           </c:val>
           <c:extLst>
             <c:ext xmlns:c16="http://schemas.microsoft.com/office/drawing/2014/chart" uri="{C3380CC4-5D6E-409C-BE32-E72D297353CC}">
-              <c16:uniqueId val="{00000000-4D23-4B0E-9467-BFB82660AAFA}"/>
+              <c16:uniqueId val="{00000000-84BD-4D03-A956-C7AC88266384}"/>
             </c:ext>
           </c:extLst>
         </c:ser>
@@ -3022,7 +4151,7 @@
             </c:spPr>
             <c:extLst>
               <c:ext xmlns:c16="http://schemas.microsoft.com/office/drawing/2014/chart" uri="{C3380CC4-5D6E-409C-BE32-E72D297353CC}">
-                <c16:uniqueId val="{00000001-6BAE-440B-B6E0-77F1BD464184}"/>
+                <c16:uniqueId val="{00000001-638B-4B80-AA7C-FE7844F8EC05}"/>
               </c:ext>
             </c:extLst>
           </c:dPt>
@@ -3042,7 +4171,7 @@
             </c:spPr>
             <c:extLst>
               <c:ext xmlns:c16="http://schemas.microsoft.com/office/drawing/2014/chart" uri="{C3380CC4-5D6E-409C-BE32-E72D297353CC}">
-                <c16:uniqueId val="{00000002-6BAE-440B-B6E0-77F1BD464184}"/>
+                <c16:uniqueId val="{00000002-638B-4B80-AA7C-FE7844F8EC05}"/>
               </c:ext>
             </c:extLst>
           </c:dPt>
@@ -3062,7 +4191,7 @@
             </c:spPr>
             <c:extLst>
               <c:ext xmlns:c16="http://schemas.microsoft.com/office/drawing/2014/chart" uri="{C3380CC4-5D6E-409C-BE32-E72D297353CC}">
-                <c16:uniqueId val="{00000003-6BAE-440B-B6E0-77F1BD464184}"/>
+                <c16:uniqueId val="{00000003-638B-4B80-AA7C-FE7844F8EC05}"/>
               </c:ext>
             </c:extLst>
           </c:dPt>
@@ -3130,7 +4259,7 @@
               <c:extLst>
                 <c:ext xmlns:c15="http://schemas.microsoft.com/office/drawing/2012/chart" uri="{CE6537A1-D6FC-4f65-9D91-7224C49458BB}"/>
                 <c:ext xmlns:c16="http://schemas.microsoft.com/office/drawing/2014/chart" uri="{C3380CC4-5D6E-409C-BE32-E72D297353CC}">
-                  <c16:uniqueId val="{00000001-6BAE-440B-B6E0-77F1BD464184}"/>
+                  <c16:uniqueId val="{00000001-638B-4B80-AA7C-FE7844F8EC05}"/>
                 </c:ext>
               </c:extLst>
             </c:dLbl>
@@ -3152,7 +4281,7 @@
               <c:extLst>
                 <c:ext xmlns:c15="http://schemas.microsoft.com/office/drawing/2012/chart" uri="{CE6537A1-D6FC-4f65-9D91-7224C49458BB}"/>
                 <c:ext xmlns:c16="http://schemas.microsoft.com/office/drawing/2014/chart" uri="{C3380CC4-5D6E-409C-BE32-E72D297353CC}">
-                  <c16:uniqueId val="{00000002-6BAE-440B-B6E0-77F1BD464184}"/>
+                  <c16:uniqueId val="{00000002-638B-4B80-AA7C-FE7844F8EC05}"/>
                 </c:ext>
               </c:extLst>
             </c:dLbl>
@@ -3174,7 +4303,7 @@
               <c:extLst>
                 <c:ext xmlns:c15="http://schemas.microsoft.com/office/drawing/2012/chart" uri="{CE6537A1-D6FC-4f65-9D91-7224C49458BB}"/>
                 <c:ext xmlns:c16="http://schemas.microsoft.com/office/drawing/2014/chart" uri="{C3380CC4-5D6E-409C-BE32-E72D297353CC}">
-                  <c16:uniqueId val="{00000003-6BAE-440B-B6E0-77F1BD464184}"/>
+                  <c16:uniqueId val="{00000003-638B-4B80-AA7C-FE7844F8EC05}"/>
                 </c:ext>
               </c:extLst>
             </c:dLbl>
@@ -3288,7 +4417,7 @@
           </c:val>
           <c:extLst>
             <c:ext xmlns:c16="http://schemas.microsoft.com/office/drawing/2014/chart" uri="{C3380CC4-5D6E-409C-BE32-E72D297353CC}">
-              <c16:uniqueId val="{00000000-6BAE-440B-B6E0-77F1BD464184}"/>
+              <c16:uniqueId val="{00000000-638B-4B80-AA7C-FE7844F8EC05}"/>
             </c:ext>
           </c:extLst>
         </c:ser>
@@ -3507,7 +4636,7 @@
           </c:val>
           <c:extLst>
             <c:ext xmlns:c16="http://schemas.microsoft.com/office/drawing/2014/chart" uri="{C3380CC4-5D6E-409C-BE32-E72D297353CC}">
-              <c16:uniqueId val="{00000000-21DE-4DEF-84CC-ABF7B6A94DDD}"/>
+              <c16:uniqueId val="{00000000-3009-4620-9441-502F2FA6EBF7}"/>
             </c:ext>
           </c:extLst>
         </c:ser>
@@ -3561,7 +4690,7 @@
                   <c15:showDataLabelsRange val="0"/>
                 </c:ext>
                 <c:ext xmlns:c16="http://schemas.microsoft.com/office/drawing/2014/chart" uri="{C3380CC4-5D6E-409C-BE32-E72D297353CC}">
-                  <c16:uniqueId val="{00000003-21DE-4DEF-84CC-ABF7B6A94DDD}"/>
+                  <c16:uniqueId val="{00000003-3009-4620-9441-502F2FA6EBF7}"/>
                 </c:ext>
               </c:extLst>
             </c:dLbl>
@@ -3650,7 +4779,7 @@
           </c:val>
           <c:extLst>
             <c:ext xmlns:c16="http://schemas.microsoft.com/office/drawing/2014/chart" uri="{C3380CC4-5D6E-409C-BE32-E72D297353CC}">
-              <c16:uniqueId val="{00000001-21DE-4DEF-84CC-ABF7B6A94DDD}"/>
+              <c16:uniqueId val="{00000001-3009-4620-9441-502F2FA6EBF7}"/>
             </c:ext>
           </c:extLst>
         </c:ser>
@@ -3721,7 +4850,7 @@
           </c:val>
           <c:extLst>
             <c:ext xmlns:c16="http://schemas.microsoft.com/office/drawing/2014/chart" uri="{C3380CC4-5D6E-409C-BE32-E72D297353CC}">
-              <c16:uniqueId val="{00000002-21DE-4DEF-84CC-ABF7B6A94DDD}"/>
+              <c16:uniqueId val="{00000002-3009-4620-9441-502F2FA6EBF7}"/>
             </c:ext>
           </c:extLst>
         </c:ser>
@@ -3734,11 +4863,11 @@
           <c:showBubbleSize val="0"/>
         </c:dLbls>
         <c:gapWidth val="182"/>
-        <c:axId val="7288768"/>
-        <c:axId val="1193316816"/>
+        <c:axId val="1680449584"/>
+        <c:axId val="253570800"/>
       </c:barChart>
       <c:catAx>
-        <c:axId val="7288768"/>
+        <c:axId val="1680449584"/>
         <c:scaling>
           <c:orientation val="minMax"/>
         </c:scaling>
@@ -3781,7 +4910,7 @@
             <a:endParaRPr lang="de-DE"/>
           </a:p>
         </c:txPr>
-        <c:crossAx val="1193316816"/>
+        <c:crossAx val="253570800"/>
         <c:crosses val="autoZero"/>
         <c:auto val="1"/>
         <c:lblAlgn val="ctr"/>
@@ -3789,7 +4918,7 @@
         <c:noMultiLvlLbl val="0"/>
       </c:catAx>
       <c:valAx>
-        <c:axId val="1193316816"/>
+        <c:axId val="253570800"/>
         <c:scaling>
           <c:orientation val="minMax"/>
         </c:scaling>
@@ -3840,7 +4969,7 @@
             <a:endParaRPr lang="de-DE"/>
           </a:p>
         </c:txPr>
-        <c:crossAx val="7288768"/>
+        <c:crossAx val="1680449584"/>
         <c:crosses val="autoZero"/>
         <c:crossBetween val="between"/>
       </c:valAx>
@@ -4005,7 +5134,7 @@
           </c:val>
           <c:extLst>
             <c:ext xmlns:c16="http://schemas.microsoft.com/office/drawing/2014/chart" uri="{C3380CC4-5D6E-409C-BE32-E72D297353CC}">
-              <c16:uniqueId val="{00000000-D815-4B43-AE13-B0677E3EDC61}"/>
+              <c16:uniqueId val="{00000000-ACA8-42AC-A775-EAEFEC50619B}"/>
             </c:ext>
           </c:extLst>
         </c:ser>
@@ -4076,7 +5205,7 @@
           </c:val>
           <c:extLst>
             <c:ext xmlns:c16="http://schemas.microsoft.com/office/drawing/2014/chart" uri="{C3380CC4-5D6E-409C-BE32-E72D297353CC}">
-              <c16:uniqueId val="{00000001-D815-4B43-AE13-B0677E3EDC61}"/>
+              <c16:uniqueId val="{00000001-ACA8-42AC-A775-EAEFEC50619B}"/>
             </c:ext>
           </c:extLst>
         </c:ser>
@@ -4147,7 +5276,7 @@
           </c:val>
           <c:extLst>
             <c:ext xmlns:c16="http://schemas.microsoft.com/office/drawing/2014/chart" uri="{C3380CC4-5D6E-409C-BE32-E72D297353CC}">
-              <c16:uniqueId val="{00000002-D815-4B43-AE13-B0677E3EDC61}"/>
+              <c16:uniqueId val="{00000002-ACA8-42AC-A775-EAEFEC50619B}"/>
             </c:ext>
           </c:extLst>
         </c:ser>
@@ -4161,11 +5290,11 @@
         </c:dLbls>
         <c:gapWidth val="219"/>
         <c:overlap val="-27"/>
-        <c:axId val="9922928"/>
-        <c:axId val="1193309616"/>
+        <c:axId val="1680437520"/>
+        <c:axId val="253616880"/>
       </c:barChart>
       <c:catAx>
-        <c:axId val="9922928"/>
+        <c:axId val="1680437520"/>
         <c:scaling>
           <c:orientation val="minMax"/>
         </c:scaling>
@@ -4208,7 +5337,7 @@
             <a:endParaRPr lang="de-DE"/>
           </a:p>
         </c:txPr>
-        <c:crossAx val="1193309616"/>
+        <c:crossAx val="253616880"/>
         <c:crosses val="autoZero"/>
         <c:auto val="1"/>
         <c:lblAlgn val="ctr"/>
@@ -4216,7 +5345,7 @@
         <c:noMultiLvlLbl val="0"/>
       </c:catAx>
       <c:valAx>
-        <c:axId val="1193309616"/>
+        <c:axId val="253616880"/>
         <c:scaling>
           <c:orientation val="minMax"/>
         </c:scaling>
@@ -4267,7 +5396,7 @@
             <a:endParaRPr lang="de-DE"/>
           </a:p>
         </c:txPr>
-        <c:crossAx val="9922928"/>
+        <c:crossAx val="1680437520"/>
         <c:crosses val="autoZero"/>
         <c:crossBetween val="between"/>
       </c:valAx>
@@ -4428,6 +5557,86 @@
 </file>
 
 <file path=ppt/charts/colors11.xml><?xml version="1.0" encoding="utf-8"?>
+<cs:colorStyle xmlns:cs="http://schemas.microsoft.com/office/drawing/2012/chartStyle" xmlns:a="http://schemas.openxmlformats.org/drawingml/2006/main" meth="cycle" id="10">
+  <a:schemeClr val="accent1"/>
+  <a:schemeClr val="accent2"/>
+  <a:schemeClr val="accent3"/>
+  <a:schemeClr val="accent4"/>
+  <a:schemeClr val="accent5"/>
+  <a:schemeClr val="accent6"/>
+  <cs:variation/>
+  <cs:variation>
+    <a:lumMod val="60000"/>
+  </cs:variation>
+  <cs:variation>
+    <a:lumMod val="80000"/>
+    <a:lumOff val="20000"/>
+  </cs:variation>
+  <cs:variation>
+    <a:lumMod val="80000"/>
+  </cs:variation>
+  <cs:variation>
+    <a:lumMod val="60000"/>
+    <a:lumOff val="40000"/>
+  </cs:variation>
+  <cs:variation>
+    <a:lumMod val="50000"/>
+  </cs:variation>
+  <cs:variation>
+    <a:lumMod val="70000"/>
+    <a:lumOff val="30000"/>
+  </cs:variation>
+  <cs:variation>
+    <a:lumMod val="70000"/>
+  </cs:variation>
+  <cs:variation>
+    <a:lumMod val="50000"/>
+    <a:lumOff val="50000"/>
+  </cs:variation>
+</cs:colorStyle>
+</file>
+
+<file path=ppt/charts/colors12.xml><?xml version="1.0" encoding="utf-8"?>
+<cs:colorStyle xmlns:cs="http://schemas.microsoft.com/office/drawing/2012/chartStyle" xmlns:a="http://schemas.openxmlformats.org/drawingml/2006/main" meth="cycle" id="10">
+  <a:schemeClr val="accent1"/>
+  <a:schemeClr val="accent2"/>
+  <a:schemeClr val="accent3"/>
+  <a:schemeClr val="accent4"/>
+  <a:schemeClr val="accent5"/>
+  <a:schemeClr val="accent6"/>
+  <cs:variation/>
+  <cs:variation>
+    <a:lumMod val="60000"/>
+  </cs:variation>
+  <cs:variation>
+    <a:lumMod val="80000"/>
+    <a:lumOff val="20000"/>
+  </cs:variation>
+  <cs:variation>
+    <a:lumMod val="80000"/>
+  </cs:variation>
+  <cs:variation>
+    <a:lumMod val="60000"/>
+    <a:lumOff val="40000"/>
+  </cs:variation>
+  <cs:variation>
+    <a:lumMod val="50000"/>
+  </cs:variation>
+  <cs:variation>
+    <a:lumMod val="70000"/>
+    <a:lumOff val="30000"/>
+  </cs:variation>
+  <cs:variation>
+    <a:lumMod val="70000"/>
+  </cs:variation>
+  <cs:variation>
+    <a:lumMod val="50000"/>
+    <a:lumOff val="50000"/>
+  </cs:variation>
+</cs:colorStyle>
+</file>
+
+<file path=ppt/charts/colors13.xml><?xml version="1.0" encoding="utf-8"?>
 <cs:colorStyle xmlns:cs="http://schemas.microsoft.com/office/drawing/2012/chartStyle" xmlns:a="http://schemas.openxmlformats.org/drawingml/2006/main" meth="cycle" id="10">
   <a:schemeClr val="accent1"/>
   <a:schemeClr val="accent2"/>
@@ -6328,6 +7537,1014 @@
 </cs:chartStyle>
 </file>
 
+<file path=ppt/charts/style12.xml><?xml version="1.0" encoding="utf-8"?>
+<cs:chartStyle xmlns:cs="http://schemas.microsoft.com/office/drawing/2012/chartStyle" xmlns:a="http://schemas.openxmlformats.org/drawingml/2006/main" id="201">
+  <cs:axisTitle>
+    <cs:lnRef idx="0"/>
+    <cs:fillRef idx="0"/>
+    <cs:effectRef idx="0"/>
+    <cs:fontRef idx="minor">
+      <a:schemeClr val="tx1">
+        <a:lumMod val="65000"/>
+        <a:lumOff val="35000"/>
+      </a:schemeClr>
+    </cs:fontRef>
+    <cs:defRPr sz="1330" kern="1200"/>
+  </cs:axisTitle>
+  <cs:categoryAxis>
+    <cs:lnRef idx="0"/>
+    <cs:fillRef idx="0"/>
+    <cs:effectRef idx="0"/>
+    <cs:fontRef idx="minor">
+      <a:schemeClr val="tx1">
+        <a:lumMod val="65000"/>
+        <a:lumOff val="35000"/>
+      </a:schemeClr>
+    </cs:fontRef>
+    <cs:spPr>
+      <a:ln w="9525" cap="flat" cmpd="sng" algn="ctr">
+        <a:solidFill>
+          <a:schemeClr val="tx1">
+            <a:lumMod val="15000"/>
+            <a:lumOff val="85000"/>
+          </a:schemeClr>
+        </a:solidFill>
+        <a:round/>
+      </a:ln>
+    </cs:spPr>
+    <cs:defRPr sz="1197" kern="1200"/>
+  </cs:categoryAxis>
+  <cs:chartArea mods="allowNoFillOverride allowNoLineOverride">
+    <cs:lnRef idx="0"/>
+    <cs:fillRef idx="0"/>
+    <cs:effectRef idx="0"/>
+    <cs:fontRef idx="minor">
+      <a:schemeClr val="tx1"/>
+    </cs:fontRef>
+    <cs:spPr>
+      <a:solidFill>
+        <a:schemeClr val="bg1"/>
+      </a:solidFill>
+      <a:ln w="9525" cap="flat" cmpd="sng" algn="ctr">
+        <a:solidFill>
+          <a:schemeClr val="tx1">
+            <a:lumMod val="15000"/>
+            <a:lumOff val="85000"/>
+          </a:schemeClr>
+        </a:solidFill>
+        <a:round/>
+      </a:ln>
+    </cs:spPr>
+    <cs:defRPr sz="1330" kern="1200"/>
+  </cs:chartArea>
+  <cs:dataLabel>
+    <cs:lnRef idx="0"/>
+    <cs:fillRef idx="0"/>
+    <cs:effectRef idx="0"/>
+    <cs:fontRef idx="minor">
+      <a:schemeClr val="tx1">
+        <a:lumMod val="75000"/>
+        <a:lumOff val="25000"/>
+      </a:schemeClr>
+    </cs:fontRef>
+    <cs:defRPr sz="1197" kern="1200"/>
+  </cs:dataLabel>
+  <cs:dataLabelCallout>
+    <cs:lnRef idx="0"/>
+    <cs:fillRef idx="0"/>
+    <cs:effectRef idx="0"/>
+    <cs:fontRef idx="minor">
+      <a:schemeClr val="dk1">
+        <a:lumMod val="65000"/>
+        <a:lumOff val="35000"/>
+      </a:schemeClr>
+    </cs:fontRef>
+    <cs:spPr>
+      <a:solidFill>
+        <a:schemeClr val="lt1"/>
+      </a:solidFill>
+      <a:ln>
+        <a:solidFill>
+          <a:schemeClr val="dk1">
+            <a:lumMod val="25000"/>
+            <a:lumOff val="75000"/>
+          </a:schemeClr>
+        </a:solidFill>
+      </a:ln>
+    </cs:spPr>
+    <cs:defRPr sz="1197" kern="1200"/>
+    <cs:bodyPr rot="0" spcFirstLastPara="1" vertOverflow="clip" horzOverflow="clip" vert="horz" wrap="square" lIns="36576" tIns="18288" rIns="36576" bIns="18288" anchor="ctr" anchorCtr="1">
+      <a:spAutoFit/>
+    </cs:bodyPr>
+  </cs:dataLabelCallout>
+  <cs:dataPoint>
+    <cs:lnRef idx="0"/>
+    <cs:fillRef idx="1">
+      <cs:styleClr val="auto"/>
+    </cs:fillRef>
+    <cs:effectRef idx="0"/>
+    <cs:fontRef idx="minor">
+      <a:schemeClr val="tx1"/>
+    </cs:fontRef>
+  </cs:dataPoint>
+  <cs:dataPoint3D>
+    <cs:lnRef idx="0"/>
+    <cs:fillRef idx="1">
+      <cs:styleClr val="auto"/>
+    </cs:fillRef>
+    <cs:effectRef idx="0"/>
+    <cs:fontRef idx="minor">
+      <a:schemeClr val="tx1"/>
+    </cs:fontRef>
+  </cs:dataPoint3D>
+  <cs:dataPointLine>
+    <cs:lnRef idx="0">
+      <cs:styleClr val="auto"/>
+    </cs:lnRef>
+    <cs:fillRef idx="1"/>
+    <cs:effectRef idx="0"/>
+    <cs:fontRef idx="minor">
+      <a:schemeClr val="tx1"/>
+    </cs:fontRef>
+    <cs:spPr>
+      <a:ln w="28575" cap="rnd">
+        <a:solidFill>
+          <a:schemeClr val="phClr"/>
+        </a:solidFill>
+        <a:round/>
+      </a:ln>
+    </cs:spPr>
+  </cs:dataPointLine>
+  <cs:dataPointMarker>
+    <cs:lnRef idx="0">
+      <cs:styleClr val="auto"/>
+    </cs:lnRef>
+    <cs:fillRef idx="1">
+      <cs:styleClr val="auto"/>
+    </cs:fillRef>
+    <cs:effectRef idx="0"/>
+    <cs:fontRef idx="minor">
+      <a:schemeClr val="tx1"/>
+    </cs:fontRef>
+    <cs:spPr>
+      <a:ln w="9525">
+        <a:solidFill>
+          <a:schemeClr val="phClr"/>
+        </a:solidFill>
+      </a:ln>
+    </cs:spPr>
+  </cs:dataPointMarker>
+  <cs:dataPointMarkerLayout symbol="circle" size="5"/>
+  <cs:dataPointWireframe>
+    <cs:lnRef idx="0">
+      <cs:styleClr val="auto"/>
+    </cs:lnRef>
+    <cs:fillRef idx="1"/>
+    <cs:effectRef idx="0"/>
+    <cs:fontRef idx="minor">
+      <a:schemeClr val="tx1"/>
+    </cs:fontRef>
+    <cs:spPr>
+      <a:ln w="9525" cap="rnd">
+        <a:solidFill>
+          <a:schemeClr val="phClr"/>
+        </a:solidFill>
+        <a:round/>
+      </a:ln>
+    </cs:spPr>
+  </cs:dataPointWireframe>
+  <cs:dataTable>
+    <cs:lnRef idx="0"/>
+    <cs:fillRef idx="0"/>
+    <cs:effectRef idx="0"/>
+    <cs:fontRef idx="minor">
+      <a:schemeClr val="tx1">
+        <a:lumMod val="65000"/>
+        <a:lumOff val="35000"/>
+      </a:schemeClr>
+    </cs:fontRef>
+    <cs:spPr>
+      <a:noFill/>
+      <a:ln w="9525" cap="flat" cmpd="sng" algn="ctr">
+        <a:solidFill>
+          <a:schemeClr val="tx1">
+            <a:lumMod val="15000"/>
+            <a:lumOff val="85000"/>
+          </a:schemeClr>
+        </a:solidFill>
+        <a:round/>
+      </a:ln>
+    </cs:spPr>
+    <cs:defRPr sz="1197" kern="1200"/>
+  </cs:dataTable>
+  <cs:downBar>
+    <cs:lnRef idx="0"/>
+    <cs:fillRef idx="0"/>
+    <cs:effectRef idx="0"/>
+    <cs:fontRef idx="minor">
+      <a:schemeClr val="dk1"/>
+    </cs:fontRef>
+    <cs:spPr>
+      <a:solidFill>
+        <a:schemeClr val="dk1">
+          <a:lumMod val="65000"/>
+          <a:lumOff val="35000"/>
+        </a:schemeClr>
+      </a:solidFill>
+      <a:ln w="9525">
+        <a:solidFill>
+          <a:schemeClr val="tx1">
+            <a:lumMod val="65000"/>
+            <a:lumOff val="35000"/>
+          </a:schemeClr>
+        </a:solidFill>
+      </a:ln>
+    </cs:spPr>
+  </cs:downBar>
+  <cs:dropLine>
+    <cs:lnRef idx="0"/>
+    <cs:fillRef idx="0"/>
+    <cs:effectRef idx="0"/>
+    <cs:fontRef idx="minor">
+      <a:schemeClr val="tx1"/>
+    </cs:fontRef>
+    <cs:spPr>
+      <a:ln w="9525" cap="flat" cmpd="sng" algn="ctr">
+        <a:solidFill>
+          <a:schemeClr val="tx1">
+            <a:lumMod val="35000"/>
+            <a:lumOff val="65000"/>
+          </a:schemeClr>
+        </a:solidFill>
+        <a:round/>
+      </a:ln>
+    </cs:spPr>
+  </cs:dropLine>
+  <cs:errorBar>
+    <cs:lnRef idx="0"/>
+    <cs:fillRef idx="0"/>
+    <cs:effectRef idx="0"/>
+    <cs:fontRef idx="minor">
+      <a:schemeClr val="tx1"/>
+    </cs:fontRef>
+    <cs:spPr>
+      <a:ln w="9525" cap="flat" cmpd="sng" algn="ctr">
+        <a:solidFill>
+          <a:schemeClr val="tx1">
+            <a:lumMod val="65000"/>
+            <a:lumOff val="35000"/>
+          </a:schemeClr>
+        </a:solidFill>
+        <a:round/>
+      </a:ln>
+    </cs:spPr>
+  </cs:errorBar>
+  <cs:floor>
+    <cs:lnRef idx="0"/>
+    <cs:fillRef idx="0"/>
+    <cs:effectRef idx="0"/>
+    <cs:fontRef idx="minor">
+      <a:schemeClr val="tx1"/>
+    </cs:fontRef>
+    <cs:spPr>
+      <a:noFill/>
+      <a:ln>
+        <a:noFill/>
+      </a:ln>
+    </cs:spPr>
+  </cs:floor>
+  <cs:gridlineMajor>
+    <cs:lnRef idx="0"/>
+    <cs:fillRef idx="0"/>
+    <cs:effectRef idx="0"/>
+    <cs:fontRef idx="minor">
+      <a:schemeClr val="tx1"/>
+    </cs:fontRef>
+    <cs:spPr>
+      <a:ln w="9525" cap="flat" cmpd="sng" algn="ctr">
+        <a:solidFill>
+          <a:schemeClr val="tx1">
+            <a:lumMod val="15000"/>
+            <a:lumOff val="85000"/>
+          </a:schemeClr>
+        </a:solidFill>
+        <a:round/>
+      </a:ln>
+    </cs:spPr>
+  </cs:gridlineMajor>
+  <cs:gridlineMinor>
+    <cs:lnRef idx="0"/>
+    <cs:fillRef idx="0"/>
+    <cs:effectRef idx="0"/>
+    <cs:fontRef idx="minor">
+      <a:schemeClr val="tx1"/>
+    </cs:fontRef>
+    <cs:spPr>
+      <a:ln w="9525" cap="flat" cmpd="sng" algn="ctr">
+        <a:solidFill>
+          <a:schemeClr val="tx1">
+            <a:lumMod val="5000"/>
+            <a:lumOff val="95000"/>
+          </a:schemeClr>
+        </a:solidFill>
+        <a:round/>
+      </a:ln>
+    </cs:spPr>
+  </cs:gridlineMinor>
+  <cs:hiLoLine>
+    <cs:lnRef idx="0"/>
+    <cs:fillRef idx="0"/>
+    <cs:effectRef idx="0"/>
+    <cs:fontRef idx="minor">
+      <a:schemeClr val="tx1"/>
+    </cs:fontRef>
+    <cs:spPr>
+      <a:ln w="9525" cap="flat" cmpd="sng" algn="ctr">
+        <a:solidFill>
+          <a:schemeClr val="tx1">
+            <a:lumMod val="75000"/>
+            <a:lumOff val="25000"/>
+          </a:schemeClr>
+        </a:solidFill>
+        <a:round/>
+      </a:ln>
+    </cs:spPr>
+  </cs:hiLoLine>
+  <cs:leaderLine>
+    <cs:lnRef idx="0"/>
+    <cs:fillRef idx="0"/>
+    <cs:effectRef idx="0"/>
+    <cs:fontRef idx="minor">
+      <a:schemeClr val="tx1"/>
+    </cs:fontRef>
+    <cs:spPr>
+      <a:ln w="9525" cap="flat" cmpd="sng" algn="ctr">
+        <a:solidFill>
+          <a:schemeClr val="tx1">
+            <a:lumMod val="35000"/>
+            <a:lumOff val="65000"/>
+          </a:schemeClr>
+        </a:solidFill>
+        <a:round/>
+      </a:ln>
+    </cs:spPr>
+  </cs:leaderLine>
+  <cs:legend>
+    <cs:lnRef idx="0"/>
+    <cs:fillRef idx="0"/>
+    <cs:effectRef idx="0"/>
+    <cs:fontRef idx="minor">
+      <a:schemeClr val="tx1">
+        <a:lumMod val="65000"/>
+        <a:lumOff val="35000"/>
+      </a:schemeClr>
+    </cs:fontRef>
+    <cs:defRPr sz="1197" kern="1200"/>
+  </cs:legend>
+  <cs:plotArea mods="allowNoFillOverride allowNoLineOverride">
+    <cs:lnRef idx="0"/>
+    <cs:fillRef idx="0"/>
+    <cs:effectRef idx="0"/>
+    <cs:fontRef idx="minor">
+      <a:schemeClr val="tx1"/>
+    </cs:fontRef>
+  </cs:plotArea>
+  <cs:plotArea3D mods="allowNoFillOverride allowNoLineOverride">
+    <cs:lnRef idx="0"/>
+    <cs:fillRef idx="0"/>
+    <cs:effectRef idx="0"/>
+    <cs:fontRef idx="minor">
+      <a:schemeClr val="tx1"/>
+    </cs:fontRef>
+  </cs:plotArea3D>
+  <cs:seriesAxis>
+    <cs:lnRef idx="0"/>
+    <cs:fillRef idx="0"/>
+    <cs:effectRef idx="0"/>
+    <cs:fontRef idx="minor">
+      <a:schemeClr val="tx1">
+        <a:lumMod val="65000"/>
+        <a:lumOff val="35000"/>
+      </a:schemeClr>
+    </cs:fontRef>
+    <cs:defRPr sz="1197" kern="1200"/>
+  </cs:seriesAxis>
+  <cs:seriesLine>
+    <cs:lnRef idx="0"/>
+    <cs:fillRef idx="0"/>
+    <cs:effectRef idx="0"/>
+    <cs:fontRef idx="minor">
+      <a:schemeClr val="tx1"/>
+    </cs:fontRef>
+    <cs:spPr>
+      <a:ln w="9525" cap="flat" cmpd="sng" algn="ctr">
+        <a:solidFill>
+          <a:schemeClr val="tx1">
+            <a:lumMod val="35000"/>
+            <a:lumOff val="65000"/>
+          </a:schemeClr>
+        </a:solidFill>
+        <a:round/>
+      </a:ln>
+    </cs:spPr>
+  </cs:seriesLine>
+  <cs:title>
+    <cs:lnRef idx="0"/>
+    <cs:fillRef idx="0"/>
+    <cs:effectRef idx="0"/>
+    <cs:fontRef idx="minor">
+      <a:schemeClr val="tx1">
+        <a:lumMod val="65000"/>
+        <a:lumOff val="35000"/>
+      </a:schemeClr>
+    </cs:fontRef>
+    <cs:defRPr sz="1862" b="0" kern="1200" spc="0" baseline="0"/>
+  </cs:title>
+  <cs:trendline>
+    <cs:lnRef idx="0">
+      <cs:styleClr val="auto"/>
+    </cs:lnRef>
+    <cs:fillRef idx="0"/>
+    <cs:effectRef idx="0"/>
+    <cs:fontRef idx="minor">
+      <a:schemeClr val="tx1"/>
+    </cs:fontRef>
+    <cs:spPr>
+      <a:ln w="19050" cap="rnd">
+        <a:solidFill>
+          <a:schemeClr val="phClr"/>
+        </a:solidFill>
+        <a:prstDash val="sysDot"/>
+      </a:ln>
+    </cs:spPr>
+  </cs:trendline>
+  <cs:trendlineLabel>
+    <cs:lnRef idx="0"/>
+    <cs:fillRef idx="0"/>
+    <cs:effectRef idx="0"/>
+    <cs:fontRef idx="minor">
+      <a:schemeClr val="tx1">
+        <a:lumMod val="65000"/>
+        <a:lumOff val="35000"/>
+      </a:schemeClr>
+    </cs:fontRef>
+    <cs:defRPr sz="1197" kern="1200"/>
+  </cs:trendlineLabel>
+  <cs:upBar>
+    <cs:lnRef idx="0"/>
+    <cs:fillRef idx="0"/>
+    <cs:effectRef idx="0"/>
+    <cs:fontRef idx="minor">
+      <a:schemeClr val="dk1"/>
+    </cs:fontRef>
+    <cs:spPr>
+      <a:solidFill>
+        <a:schemeClr val="lt1"/>
+      </a:solidFill>
+      <a:ln w="9525">
+        <a:solidFill>
+          <a:schemeClr val="tx1">
+            <a:lumMod val="15000"/>
+            <a:lumOff val="85000"/>
+          </a:schemeClr>
+        </a:solidFill>
+      </a:ln>
+    </cs:spPr>
+  </cs:upBar>
+  <cs:valueAxis>
+    <cs:lnRef idx="0"/>
+    <cs:fillRef idx="0"/>
+    <cs:effectRef idx="0"/>
+    <cs:fontRef idx="minor">
+      <a:schemeClr val="tx1">
+        <a:lumMod val="65000"/>
+        <a:lumOff val="35000"/>
+      </a:schemeClr>
+    </cs:fontRef>
+    <cs:defRPr sz="1197" kern="1200"/>
+  </cs:valueAxis>
+  <cs:wall>
+    <cs:lnRef idx="0"/>
+    <cs:fillRef idx="0"/>
+    <cs:effectRef idx="0"/>
+    <cs:fontRef idx="minor">
+      <a:schemeClr val="tx1"/>
+    </cs:fontRef>
+    <cs:spPr>
+      <a:noFill/>
+      <a:ln>
+        <a:noFill/>
+      </a:ln>
+    </cs:spPr>
+  </cs:wall>
+</cs:chartStyle>
+</file>
+
+<file path=ppt/charts/style13.xml><?xml version="1.0" encoding="utf-8"?>
+<cs:chartStyle xmlns:cs="http://schemas.microsoft.com/office/drawing/2012/chartStyle" xmlns:a="http://schemas.openxmlformats.org/drawingml/2006/main" id="216">
+  <cs:axisTitle>
+    <cs:lnRef idx="0"/>
+    <cs:fillRef idx="0"/>
+    <cs:effectRef idx="0"/>
+    <cs:fontRef idx="minor">
+      <a:schemeClr val="tx1">
+        <a:lumMod val="65000"/>
+        <a:lumOff val="35000"/>
+      </a:schemeClr>
+    </cs:fontRef>
+    <cs:defRPr sz="1330" kern="1200"/>
+  </cs:axisTitle>
+  <cs:categoryAxis>
+    <cs:lnRef idx="0"/>
+    <cs:fillRef idx="0"/>
+    <cs:effectRef idx="0"/>
+    <cs:fontRef idx="minor">
+      <a:schemeClr val="tx1">
+        <a:lumMod val="65000"/>
+        <a:lumOff val="35000"/>
+      </a:schemeClr>
+    </cs:fontRef>
+    <cs:spPr>
+      <a:ln w="9525" cap="flat" cmpd="sng" algn="ctr">
+        <a:solidFill>
+          <a:schemeClr val="tx1">
+            <a:lumMod val="15000"/>
+            <a:lumOff val="85000"/>
+          </a:schemeClr>
+        </a:solidFill>
+        <a:round/>
+      </a:ln>
+    </cs:spPr>
+    <cs:defRPr sz="1197" kern="1200"/>
+  </cs:categoryAxis>
+  <cs:chartArea mods="allowNoFillOverride allowNoLineOverride">
+    <cs:lnRef idx="0"/>
+    <cs:fillRef idx="0"/>
+    <cs:effectRef idx="0"/>
+    <cs:fontRef idx="minor">
+      <a:schemeClr val="tx1"/>
+    </cs:fontRef>
+    <cs:spPr>
+      <a:solidFill>
+        <a:schemeClr val="bg1"/>
+      </a:solidFill>
+      <a:ln w="9525" cap="flat" cmpd="sng" algn="ctr">
+        <a:solidFill>
+          <a:schemeClr val="tx1">
+            <a:lumMod val="15000"/>
+            <a:lumOff val="85000"/>
+          </a:schemeClr>
+        </a:solidFill>
+        <a:round/>
+      </a:ln>
+    </cs:spPr>
+    <cs:defRPr sz="1330" kern="1200"/>
+  </cs:chartArea>
+  <cs:dataLabel>
+    <cs:lnRef idx="0"/>
+    <cs:fillRef idx="0"/>
+    <cs:effectRef idx="0"/>
+    <cs:fontRef idx="minor">
+      <a:schemeClr val="tx1">
+        <a:lumMod val="75000"/>
+        <a:lumOff val="25000"/>
+      </a:schemeClr>
+    </cs:fontRef>
+    <cs:defRPr sz="1197" kern="1200"/>
+  </cs:dataLabel>
+  <cs:dataLabelCallout>
+    <cs:lnRef idx="0"/>
+    <cs:fillRef idx="0"/>
+    <cs:effectRef idx="0"/>
+    <cs:fontRef idx="minor">
+      <a:schemeClr val="dk1">
+        <a:lumMod val="65000"/>
+        <a:lumOff val="35000"/>
+      </a:schemeClr>
+    </cs:fontRef>
+    <cs:spPr>
+      <a:solidFill>
+        <a:schemeClr val="lt1"/>
+      </a:solidFill>
+      <a:ln>
+        <a:solidFill>
+          <a:schemeClr val="dk1">
+            <a:lumMod val="25000"/>
+            <a:lumOff val="75000"/>
+          </a:schemeClr>
+        </a:solidFill>
+      </a:ln>
+    </cs:spPr>
+    <cs:defRPr sz="1197" kern="1200"/>
+    <cs:bodyPr rot="0" spcFirstLastPara="1" vertOverflow="clip" horzOverflow="clip" vert="horz" wrap="square" lIns="36576" tIns="18288" rIns="36576" bIns="18288" anchor="ctr" anchorCtr="1">
+      <a:spAutoFit/>
+    </cs:bodyPr>
+  </cs:dataLabelCallout>
+  <cs:dataPoint>
+    <cs:lnRef idx="0"/>
+    <cs:fillRef idx="1">
+      <cs:styleClr val="auto"/>
+    </cs:fillRef>
+    <cs:effectRef idx="0"/>
+    <cs:fontRef idx="minor">
+      <a:schemeClr val="tx1"/>
+    </cs:fontRef>
+  </cs:dataPoint>
+  <cs:dataPoint3D>
+    <cs:lnRef idx="0"/>
+    <cs:fillRef idx="1">
+      <cs:styleClr val="auto"/>
+    </cs:fillRef>
+    <cs:effectRef idx="0"/>
+    <cs:fontRef idx="minor">
+      <a:schemeClr val="tx1"/>
+    </cs:fontRef>
+  </cs:dataPoint3D>
+  <cs:dataPointLine>
+    <cs:lnRef idx="0">
+      <cs:styleClr val="auto"/>
+    </cs:lnRef>
+    <cs:fillRef idx="1"/>
+    <cs:effectRef idx="0"/>
+    <cs:fontRef idx="minor">
+      <a:schemeClr val="tx1"/>
+    </cs:fontRef>
+    <cs:spPr>
+      <a:ln w="28575" cap="rnd">
+        <a:solidFill>
+          <a:schemeClr val="phClr"/>
+        </a:solidFill>
+        <a:round/>
+      </a:ln>
+    </cs:spPr>
+  </cs:dataPointLine>
+  <cs:dataPointMarker>
+    <cs:lnRef idx="0">
+      <cs:styleClr val="auto"/>
+    </cs:lnRef>
+    <cs:fillRef idx="1">
+      <cs:styleClr val="auto"/>
+    </cs:fillRef>
+    <cs:effectRef idx="0"/>
+    <cs:fontRef idx="minor">
+      <a:schemeClr val="tx1"/>
+    </cs:fontRef>
+    <cs:spPr>
+      <a:ln w="9525">
+        <a:solidFill>
+          <a:schemeClr val="phClr"/>
+        </a:solidFill>
+      </a:ln>
+    </cs:spPr>
+  </cs:dataPointMarker>
+  <cs:dataPointMarkerLayout symbol="circle" size="5"/>
+  <cs:dataPointWireframe>
+    <cs:lnRef idx="0">
+      <cs:styleClr val="auto"/>
+    </cs:lnRef>
+    <cs:fillRef idx="1"/>
+    <cs:effectRef idx="0"/>
+    <cs:fontRef idx="minor">
+      <a:schemeClr val="tx1"/>
+    </cs:fontRef>
+    <cs:spPr>
+      <a:ln w="9525" cap="rnd">
+        <a:solidFill>
+          <a:schemeClr val="phClr"/>
+        </a:solidFill>
+        <a:round/>
+      </a:ln>
+    </cs:spPr>
+  </cs:dataPointWireframe>
+  <cs:dataTable>
+    <cs:lnRef idx="0"/>
+    <cs:fillRef idx="0"/>
+    <cs:effectRef idx="0"/>
+    <cs:fontRef idx="minor">
+      <a:schemeClr val="tx1">
+        <a:lumMod val="65000"/>
+        <a:lumOff val="35000"/>
+      </a:schemeClr>
+    </cs:fontRef>
+    <cs:spPr>
+      <a:noFill/>
+      <a:ln w="9525" cap="flat" cmpd="sng" algn="ctr">
+        <a:solidFill>
+          <a:schemeClr val="tx1">
+            <a:lumMod val="15000"/>
+            <a:lumOff val="85000"/>
+          </a:schemeClr>
+        </a:solidFill>
+        <a:round/>
+      </a:ln>
+    </cs:spPr>
+    <cs:defRPr sz="1197" kern="1200"/>
+  </cs:dataTable>
+  <cs:downBar>
+    <cs:lnRef idx="0"/>
+    <cs:fillRef idx="0"/>
+    <cs:effectRef idx="0"/>
+    <cs:fontRef idx="minor">
+      <a:schemeClr val="tx1"/>
+    </cs:fontRef>
+    <cs:spPr>
+      <a:solidFill>
+        <a:schemeClr val="dk1">
+          <a:lumMod val="75000"/>
+          <a:lumOff val="25000"/>
+        </a:schemeClr>
+      </a:solidFill>
+      <a:ln w="9525" cap="flat" cmpd="sng" algn="ctr">
+        <a:solidFill>
+          <a:schemeClr val="tx1">
+            <a:lumMod val="65000"/>
+            <a:lumOff val="35000"/>
+          </a:schemeClr>
+        </a:solidFill>
+        <a:round/>
+      </a:ln>
+    </cs:spPr>
+  </cs:downBar>
+  <cs:dropLine>
+    <cs:lnRef idx="0"/>
+    <cs:fillRef idx="0"/>
+    <cs:effectRef idx="0"/>
+    <cs:fontRef idx="minor">
+      <a:schemeClr val="tx1"/>
+    </cs:fontRef>
+    <cs:spPr>
+      <a:ln w="9525" cap="flat" cmpd="sng" algn="ctr">
+        <a:solidFill>
+          <a:schemeClr val="tx1">
+            <a:lumMod val="35000"/>
+            <a:lumOff val="65000"/>
+          </a:schemeClr>
+        </a:solidFill>
+        <a:round/>
+      </a:ln>
+    </cs:spPr>
+  </cs:dropLine>
+  <cs:errorBar>
+    <cs:lnRef idx="0"/>
+    <cs:fillRef idx="0"/>
+    <cs:effectRef idx="0"/>
+    <cs:fontRef idx="minor">
+      <a:schemeClr val="tx1"/>
+    </cs:fontRef>
+    <cs:spPr>
+      <a:ln w="9525" cap="flat" cmpd="sng" algn="ctr">
+        <a:solidFill>
+          <a:schemeClr val="tx1">
+            <a:lumMod val="65000"/>
+            <a:lumOff val="35000"/>
+          </a:schemeClr>
+        </a:solidFill>
+        <a:round/>
+      </a:ln>
+    </cs:spPr>
+  </cs:errorBar>
+  <cs:floor>
+    <cs:lnRef idx="0"/>
+    <cs:fillRef idx="0"/>
+    <cs:effectRef idx="0"/>
+    <cs:fontRef idx="minor">
+      <a:schemeClr val="tx1"/>
+    </cs:fontRef>
+    <cs:spPr>
+      <a:noFill/>
+      <a:ln>
+        <a:noFill/>
+      </a:ln>
+    </cs:spPr>
+  </cs:floor>
+  <cs:gridlineMajor>
+    <cs:lnRef idx="0"/>
+    <cs:fillRef idx="0"/>
+    <cs:effectRef idx="0"/>
+    <cs:fontRef idx="minor">
+      <a:schemeClr val="tx1"/>
+    </cs:fontRef>
+    <cs:spPr>
+      <a:ln w="9525" cap="flat" cmpd="sng" algn="ctr">
+        <a:solidFill>
+          <a:schemeClr val="tx1">
+            <a:lumMod val="15000"/>
+            <a:lumOff val="85000"/>
+          </a:schemeClr>
+        </a:solidFill>
+        <a:round/>
+      </a:ln>
+    </cs:spPr>
+  </cs:gridlineMajor>
+  <cs:gridlineMinor>
+    <cs:lnRef idx="0"/>
+    <cs:fillRef idx="0"/>
+    <cs:effectRef idx="0"/>
+    <cs:fontRef idx="minor">
+      <a:schemeClr val="tx1"/>
+    </cs:fontRef>
+    <cs:spPr>
+      <a:ln w="9525" cap="flat" cmpd="sng" algn="ctr">
+        <a:solidFill>
+          <a:schemeClr val="tx1">
+            <a:lumMod val="5000"/>
+            <a:lumOff val="95000"/>
+          </a:schemeClr>
+        </a:solidFill>
+        <a:round/>
+      </a:ln>
+    </cs:spPr>
+  </cs:gridlineMinor>
+  <cs:hiLoLine>
+    <cs:lnRef idx="0"/>
+    <cs:fillRef idx="0"/>
+    <cs:effectRef idx="0"/>
+    <cs:fontRef idx="minor">
+      <a:schemeClr val="tx1"/>
+    </cs:fontRef>
+    <cs:spPr>
+      <a:ln w="9525" cap="flat" cmpd="sng" algn="ctr">
+        <a:solidFill>
+          <a:schemeClr val="tx1">
+            <a:lumMod val="50000"/>
+            <a:lumOff val="50000"/>
+          </a:schemeClr>
+        </a:solidFill>
+        <a:round/>
+      </a:ln>
+    </cs:spPr>
+  </cs:hiLoLine>
+  <cs:leaderLine>
+    <cs:lnRef idx="0"/>
+    <cs:fillRef idx="0"/>
+    <cs:effectRef idx="0"/>
+    <cs:fontRef idx="minor">
+      <a:schemeClr val="tx1"/>
+    </cs:fontRef>
+    <cs:spPr>
+      <a:ln w="9525" cap="flat" cmpd="sng" algn="ctr">
+        <a:solidFill>
+          <a:schemeClr val="tx1">
+            <a:lumMod val="35000"/>
+            <a:lumOff val="65000"/>
+          </a:schemeClr>
+        </a:solidFill>
+        <a:round/>
+      </a:ln>
+    </cs:spPr>
+  </cs:leaderLine>
+  <cs:legend>
+    <cs:lnRef idx="0"/>
+    <cs:fillRef idx="0"/>
+    <cs:effectRef idx="0"/>
+    <cs:fontRef idx="minor">
+      <a:schemeClr val="tx1">
+        <a:lumMod val="65000"/>
+        <a:lumOff val="35000"/>
+      </a:schemeClr>
+    </cs:fontRef>
+    <cs:defRPr sz="1197" kern="1200"/>
+  </cs:legend>
+  <cs:plotArea mods="allowNoFillOverride allowNoLineOverride">
+    <cs:lnRef idx="0"/>
+    <cs:fillRef idx="0"/>
+    <cs:effectRef idx="0"/>
+    <cs:fontRef idx="minor">
+      <a:schemeClr val="tx1"/>
+    </cs:fontRef>
+  </cs:plotArea>
+  <cs:plotArea3D mods="allowNoFillOverride allowNoLineOverride">
+    <cs:lnRef idx="0"/>
+    <cs:fillRef idx="0"/>
+    <cs:effectRef idx="0"/>
+    <cs:fontRef idx="minor">
+      <a:schemeClr val="tx1"/>
+    </cs:fontRef>
+  </cs:plotArea3D>
+  <cs:seriesAxis>
+    <cs:lnRef idx="0"/>
+    <cs:fillRef idx="0"/>
+    <cs:effectRef idx="0"/>
+    <cs:fontRef idx="minor">
+      <a:schemeClr val="tx1">
+        <a:lumMod val="65000"/>
+        <a:lumOff val="35000"/>
+      </a:schemeClr>
+    </cs:fontRef>
+    <cs:defRPr sz="1197" kern="1200"/>
+  </cs:seriesAxis>
+  <cs:seriesLine>
+    <cs:lnRef idx="0"/>
+    <cs:fillRef idx="0"/>
+    <cs:effectRef idx="0"/>
+    <cs:fontRef idx="minor">
+      <a:schemeClr val="tx1"/>
+    </cs:fontRef>
+    <cs:spPr>
+      <a:ln w="9525" cap="flat" cmpd="sng" algn="ctr">
+        <a:solidFill>
+          <a:schemeClr val="tx1">
+            <a:lumMod val="35000"/>
+            <a:lumOff val="65000"/>
+          </a:schemeClr>
+        </a:solidFill>
+        <a:round/>
+      </a:ln>
+    </cs:spPr>
+  </cs:seriesLine>
+  <cs:title>
+    <cs:lnRef idx="0"/>
+    <cs:fillRef idx="0"/>
+    <cs:effectRef idx="0"/>
+    <cs:fontRef idx="minor">
+      <a:schemeClr val="tx1">
+        <a:lumMod val="65000"/>
+        <a:lumOff val="35000"/>
+      </a:schemeClr>
+    </cs:fontRef>
+    <cs:defRPr sz="1862" b="0" kern="1200" spc="0" baseline="0"/>
+  </cs:title>
+  <cs:trendline>
+    <cs:lnRef idx="0">
+      <cs:styleClr val="auto"/>
+    </cs:lnRef>
+    <cs:fillRef idx="0"/>
+    <cs:effectRef idx="0"/>
+    <cs:fontRef idx="minor">
+      <a:schemeClr val="tx1"/>
+    </cs:fontRef>
+    <cs:spPr>
+      <a:ln w="19050" cap="rnd">
+        <a:solidFill>
+          <a:schemeClr val="phClr"/>
+        </a:solidFill>
+        <a:prstDash val="sysDot"/>
+      </a:ln>
+    </cs:spPr>
+  </cs:trendline>
+  <cs:trendlineLabel>
+    <cs:lnRef idx="0"/>
+    <cs:fillRef idx="0"/>
+    <cs:effectRef idx="0"/>
+    <cs:fontRef idx="minor">
+      <a:schemeClr val="tx1">
+        <a:lumMod val="65000"/>
+        <a:lumOff val="35000"/>
+      </a:schemeClr>
+    </cs:fontRef>
+    <cs:defRPr sz="1197" kern="1200"/>
+  </cs:trendlineLabel>
+  <cs:upBar>
+    <cs:lnRef idx="0"/>
+    <cs:fillRef idx="0"/>
+    <cs:effectRef idx="0"/>
+    <cs:fontRef idx="minor">
+      <a:schemeClr val="tx1"/>
+    </cs:fontRef>
+    <cs:spPr>
+      <a:solidFill>
+        <a:schemeClr val="lt1"/>
+      </a:solidFill>
+      <a:ln w="9525" cap="flat" cmpd="sng" algn="ctr">
+        <a:solidFill>
+          <a:schemeClr val="tx1">
+            <a:lumMod val="65000"/>
+            <a:lumOff val="35000"/>
+          </a:schemeClr>
+        </a:solidFill>
+        <a:round/>
+      </a:ln>
+    </cs:spPr>
+  </cs:upBar>
+  <cs:valueAxis>
+    <cs:lnRef idx="0"/>
+    <cs:fillRef idx="0"/>
+    <cs:effectRef idx="0"/>
+    <cs:fontRef idx="minor">
+      <a:schemeClr val="tx1">
+        <a:lumMod val="65000"/>
+        <a:lumOff val="35000"/>
+      </a:schemeClr>
+    </cs:fontRef>
+    <cs:defRPr sz="1197" kern="1200"/>
+  </cs:valueAxis>
+  <cs:wall>
+    <cs:lnRef idx="0"/>
+    <cs:fillRef idx="0"/>
+    <cs:effectRef idx="0"/>
+    <cs:fontRef idx="minor">
+      <a:schemeClr val="tx1"/>
+    </cs:fontRef>
+    <cs:spPr>
+      <a:noFill/>
+      <a:ln>
+        <a:noFill/>
+      </a:ln>
+    </cs:spPr>
+  </cs:wall>
+</cs:chartStyle>
+</file>
+
 <file path=ppt/charts/style2.xml><?xml version="1.0" encoding="utf-8"?>
 <cs:chartStyle xmlns:cs="http://schemas.microsoft.com/office/drawing/2012/chartStyle" xmlns:a="http://schemas.openxmlformats.org/drawingml/2006/main" id="201">
   <cs:axisTitle>
@@ -10451,7 +12668,7 @@
           <p:cNvPr id="2" name="Titel 1">
             <a:extLst>
               <a:ext uri="{FF2B5EF4-FFF2-40B4-BE49-F238E27FC236}">
-                <a16:creationId xmlns:a16="http://schemas.microsoft.com/office/drawing/2014/main" id="{0E19AFC3-E2A8-0DB5-FA14-964B6BD91643}"/>
+                <a16:creationId xmlns:a16="http://schemas.microsoft.com/office/drawing/2014/main" id="{E3147FF4-306E-FC75-92AC-02BC0484065F}"/>
               </a:ext>
             </a:extLst>
           </p:cNvPr>
@@ -10488,7 +12705,7 @@
           <p:cNvPr id="3" name="Untertitel 2">
             <a:extLst>
               <a:ext uri="{FF2B5EF4-FFF2-40B4-BE49-F238E27FC236}">
-                <a16:creationId xmlns:a16="http://schemas.microsoft.com/office/drawing/2014/main" id="{C1846205-EA0C-5F50-859D-C74B12E690C4}"/>
+                <a16:creationId xmlns:a16="http://schemas.microsoft.com/office/drawing/2014/main" id="{B68C2A38-E704-84AC-A1AE-12491007E395}"/>
               </a:ext>
             </a:extLst>
           </p:cNvPr>
@@ -10558,7 +12775,7 @@
           <p:cNvPr id="4" name="Datumsplatzhalter 3">
             <a:extLst>
               <a:ext uri="{FF2B5EF4-FFF2-40B4-BE49-F238E27FC236}">
-                <a16:creationId xmlns:a16="http://schemas.microsoft.com/office/drawing/2014/main" id="{EDA5AE3A-74CE-22FD-E5BA-EAAF42A3D420}"/>
+                <a16:creationId xmlns:a16="http://schemas.microsoft.com/office/drawing/2014/main" id="{8187CE13-761A-62A4-DF5F-FD360A00A7E0}"/>
               </a:ext>
             </a:extLst>
           </p:cNvPr>
@@ -10574,7 +12791,7 @@
           <a:bodyPr/>
           <a:lstStyle/>
           <a:p>
-            <a:fld id="{C9962047-E2C8-4734-A689-668B36BC6A1D}" type="datetimeFigureOut">
+            <a:fld id="{921E86A6-473C-463A-A28B-F44BBA9E8087}" type="datetimeFigureOut">
               <a:rPr lang="de-DE" smtClean="0"/>
               <a:t>09.10.2026</a:t>
             </a:fld>
@@ -10587,7 +12804,7 @@
           <p:cNvPr id="5" name="Fußzeilenplatzhalter 4">
             <a:extLst>
               <a:ext uri="{FF2B5EF4-FFF2-40B4-BE49-F238E27FC236}">
-                <a16:creationId xmlns:a16="http://schemas.microsoft.com/office/drawing/2014/main" id="{738389DF-8F8B-F67A-4E2E-0FBA7C6C2FAA}"/>
+                <a16:creationId xmlns:a16="http://schemas.microsoft.com/office/drawing/2014/main" id="{55C1B696-0622-4ED8-D1CC-6909CECA6A00}"/>
               </a:ext>
             </a:extLst>
           </p:cNvPr>
@@ -10612,7 +12829,7 @@
           <p:cNvPr id="6" name="Foliennummernplatzhalter 5">
             <a:extLst>
               <a:ext uri="{FF2B5EF4-FFF2-40B4-BE49-F238E27FC236}">
-                <a16:creationId xmlns:a16="http://schemas.microsoft.com/office/drawing/2014/main" id="{E0B13E69-EB74-15BE-C901-50856BA54F44}"/>
+                <a16:creationId xmlns:a16="http://schemas.microsoft.com/office/drawing/2014/main" id="{EAAB78EC-50AA-7596-C07A-A9B20509C602}"/>
               </a:ext>
             </a:extLst>
           </p:cNvPr>
@@ -10628,7 +12845,7 @@
           <a:bodyPr/>
           <a:lstStyle/>
           <a:p>
-            <a:fld id="{377935EF-6752-464A-9B81-BA8CABB6107B}" type="slidenum">
+            <a:fld id="{5E48D93C-8800-4654-AF56-A23C3A94C9C2}" type="slidenum">
               <a:rPr lang="de-DE" smtClean="0"/>
               <a:t>‹Nr.›</a:t>
             </a:fld>
@@ -10639,7 +12856,7 @@
     </p:spTree>
     <p:extLst>
       <p:ext uri="{BB962C8B-B14F-4D97-AF65-F5344CB8AC3E}">
-        <p14:creationId xmlns:p14="http://schemas.microsoft.com/office/powerpoint/2010/main" val="2394947834"/>
+        <p14:creationId xmlns:p14="http://schemas.microsoft.com/office/powerpoint/2010/main" val="424325992"/>
       </p:ext>
     </p:extLst>
   </p:cSld>
@@ -10671,7 +12888,7 @@
           <p:cNvPr id="2" name="Titel 1">
             <a:extLst>
               <a:ext uri="{FF2B5EF4-FFF2-40B4-BE49-F238E27FC236}">
-                <a16:creationId xmlns:a16="http://schemas.microsoft.com/office/drawing/2014/main" id="{C4849DA7-7AED-0292-B6D9-40887B4DD5A8}"/>
+                <a16:creationId xmlns:a16="http://schemas.microsoft.com/office/drawing/2014/main" id="{55DDD53F-AC46-4225-7BDD-C3AC26BC16DD}"/>
               </a:ext>
             </a:extLst>
           </p:cNvPr>
@@ -10699,7 +12916,7 @@
           <p:cNvPr id="3" name="Vertikaler Textplatzhalter 2">
             <a:extLst>
               <a:ext uri="{FF2B5EF4-FFF2-40B4-BE49-F238E27FC236}">
-                <a16:creationId xmlns:a16="http://schemas.microsoft.com/office/drawing/2014/main" id="{19AFBBA2-E78A-ACF3-95CF-DD21CD9A5BDE}"/>
+                <a16:creationId xmlns:a16="http://schemas.microsoft.com/office/drawing/2014/main" id="{2AA512B2-8140-1578-7340-2F7A9744AD79}"/>
               </a:ext>
             </a:extLst>
           </p:cNvPr>
@@ -10756,7 +12973,7 @@
           <p:cNvPr id="4" name="Datumsplatzhalter 3">
             <a:extLst>
               <a:ext uri="{FF2B5EF4-FFF2-40B4-BE49-F238E27FC236}">
-                <a16:creationId xmlns:a16="http://schemas.microsoft.com/office/drawing/2014/main" id="{D03AA1D4-2CCE-57D2-34F6-D5FC6F1499A8}"/>
+                <a16:creationId xmlns:a16="http://schemas.microsoft.com/office/drawing/2014/main" id="{6A18E898-D77A-6534-C90D-883875DE2401}"/>
               </a:ext>
             </a:extLst>
           </p:cNvPr>
@@ -10772,7 +12989,7 @@
           <a:bodyPr/>
           <a:lstStyle/>
           <a:p>
-            <a:fld id="{C9962047-E2C8-4734-A689-668B36BC6A1D}" type="datetimeFigureOut">
+            <a:fld id="{921E86A6-473C-463A-A28B-F44BBA9E8087}" type="datetimeFigureOut">
               <a:rPr lang="de-DE" smtClean="0"/>
               <a:t>09.10.2026</a:t>
             </a:fld>
@@ -10785,7 +13002,7 @@
           <p:cNvPr id="5" name="Fußzeilenplatzhalter 4">
             <a:extLst>
               <a:ext uri="{FF2B5EF4-FFF2-40B4-BE49-F238E27FC236}">
-                <a16:creationId xmlns:a16="http://schemas.microsoft.com/office/drawing/2014/main" id="{C3CA4FBF-7890-AEBE-8904-11F0CDF1D7FF}"/>
+                <a16:creationId xmlns:a16="http://schemas.microsoft.com/office/drawing/2014/main" id="{BE3BCEBA-F780-4414-A2EF-B4FCAC6C185A}"/>
               </a:ext>
             </a:extLst>
           </p:cNvPr>
@@ -10810,7 +13027,7 @@
           <p:cNvPr id="6" name="Foliennummernplatzhalter 5">
             <a:extLst>
               <a:ext uri="{FF2B5EF4-FFF2-40B4-BE49-F238E27FC236}">
-                <a16:creationId xmlns:a16="http://schemas.microsoft.com/office/drawing/2014/main" id="{376AB75F-77AB-FAB0-6AB7-06FA29349283}"/>
+                <a16:creationId xmlns:a16="http://schemas.microsoft.com/office/drawing/2014/main" id="{BFE1C2ED-3F8F-D717-4D8D-3531AF286F29}"/>
               </a:ext>
             </a:extLst>
           </p:cNvPr>
@@ -10826,7 +13043,7 @@
           <a:bodyPr/>
           <a:lstStyle/>
           <a:p>
-            <a:fld id="{377935EF-6752-464A-9B81-BA8CABB6107B}" type="slidenum">
+            <a:fld id="{5E48D93C-8800-4654-AF56-A23C3A94C9C2}" type="slidenum">
               <a:rPr lang="de-DE" smtClean="0"/>
               <a:t>‹Nr.›</a:t>
             </a:fld>
@@ -10837,7 +13054,7 @@
     </p:spTree>
     <p:extLst>
       <p:ext uri="{BB962C8B-B14F-4D97-AF65-F5344CB8AC3E}">
-        <p14:creationId xmlns:p14="http://schemas.microsoft.com/office/powerpoint/2010/main" val="3674571750"/>
+        <p14:creationId xmlns:p14="http://schemas.microsoft.com/office/powerpoint/2010/main" val="3467409189"/>
       </p:ext>
     </p:extLst>
   </p:cSld>
@@ -10869,7 +13086,7 @@
           <p:cNvPr id="2" name="Vertikaler Titel 1">
             <a:extLst>
               <a:ext uri="{FF2B5EF4-FFF2-40B4-BE49-F238E27FC236}">
-                <a16:creationId xmlns:a16="http://schemas.microsoft.com/office/drawing/2014/main" id="{61B5C6B4-CEB1-973A-B66F-DDF332725F9D}"/>
+                <a16:creationId xmlns:a16="http://schemas.microsoft.com/office/drawing/2014/main" id="{DFFC901B-203E-B964-DD1D-85C1ED71E992}"/>
               </a:ext>
             </a:extLst>
           </p:cNvPr>
@@ -10902,7 +13119,7 @@
           <p:cNvPr id="3" name="Vertikaler Textplatzhalter 2">
             <a:extLst>
               <a:ext uri="{FF2B5EF4-FFF2-40B4-BE49-F238E27FC236}">
-                <a16:creationId xmlns:a16="http://schemas.microsoft.com/office/drawing/2014/main" id="{13A9F277-C525-C6A8-1F77-74D63B364017}"/>
+                <a16:creationId xmlns:a16="http://schemas.microsoft.com/office/drawing/2014/main" id="{F9AF76A9-D6C1-D0CA-C612-E1026E406D03}"/>
               </a:ext>
             </a:extLst>
           </p:cNvPr>
@@ -10964,7 +13181,7 @@
           <p:cNvPr id="4" name="Datumsplatzhalter 3">
             <a:extLst>
               <a:ext uri="{FF2B5EF4-FFF2-40B4-BE49-F238E27FC236}">
-                <a16:creationId xmlns:a16="http://schemas.microsoft.com/office/drawing/2014/main" id="{7408698F-AA60-FF9D-F9CA-419A9A43638C}"/>
+                <a16:creationId xmlns:a16="http://schemas.microsoft.com/office/drawing/2014/main" id="{88CA3E31-C049-0612-9E79-613CBE0451AF}"/>
               </a:ext>
             </a:extLst>
           </p:cNvPr>
@@ -10980,7 +13197,7 @@
           <a:bodyPr/>
           <a:lstStyle/>
           <a:p>
-            <a:fld id="{C9962047-E2C8-4734-A689-668B36BC6A1D}" type="datetimeFigureOut">
+            <a:fld id="{921E86A6-473C-463A-A28B-F44BBA9E8087}" type="datetimeFigureOut">
               <a:rPr lang="de-DE" smtClean="0"/>
               <a:t>09.10.2026</a:t>
             </a:fld>
@@ -10993,7 +13210,7 @@
           <p:cNvPr id="5" name="Fußzeilenplatzhalter 4">
             <a:extLst>
               <a:ext uri="{FF2B5EF4-FFF2-40B4-BE49-F238E27FC236}">
-                <a16:creationId xmlns:a16="http://schemas.microsoft.com/office/drawing/2014/main" id="{8FBD0E1D-B72E-A129-CA21-69F1DBD6293F}"/>
+                <a16:creationId xmlns:a16="http://schemas.microsoft.com/office/drawing/2014/main" id="{6FF15190-92B0-768F-170D-5AF93AA8182D}"/>
               </a:ext>
             </a:extLst>
           </p:cNvPr>
@@ -11018,7 +13235,7 @@
           <p:cNvPr id="6" name="Foliennummernplatzhalter 5">
             <a:extLst>
               <a:ext uri="{FF2B5EF4-FFF2-40B4-BE49-F238E27FC236}">
-                <a16:creationId xmlns:a16="http://schemas.microsoft.com/office/drawing/2014/main" id="{688DD645-A71D-6926-E961-E7C2D7D31B18}"/>
+                <a16:creationId xmlns:a16="http://schemas.microsoft.com/office/drawing/2014/main" id="{A4F6A59F-EA15-1008-A32C-59141ED0A536}"/>
               </a:ext>
             </a:extLst>
           </p:cNvPr>
@@ -11034,7 +13251,7 @@
           <a:bodyPr/>
           <a:lstStyle/>
           <a:p>
-            <a:fld id="{377935EF-6752-464A-9B81-BA8CABB6107B}" type="slidenum">
+            <a:fld id="{5E48D93C-8800-4654-AF56-A23C3A94C9C2}" type="slidenum">
               <a:rPr lang="de-DE" smtClean="0"/>
               <a:t>‹Nr.›</a:t>
             </a:fld>
@@ -11045,7 +13262,7 @@
     </p:spTree>
     <p:extLst>
       <p:ext uri="{BB962C8B-B14F-4D97-AF65-F5344CB8AC3E}">
-        <p14:creationId xmlns:p14="http://schemas.microsoft.com/office/powerpoint/2010/main" val="2929395954"/>
+        <p14:creationId xmlns:p14="http://schemas.microsoft.com/office/powerpoint/2010/main" val="2715296692"/>
       </p:ext>
     </p:extLst>
   </p:cSld>
@@ -11077,7 +13294,7 @@
           <p:cNvPr id="2" name="Titel 1">
             <a:extLst>
               <a:ext uri="{FF2B5EF4-FFF2-40B4-BE49-F238E27FC236}">
-                <a16:creationId xmlns:a16="http://schemas.microsoft.com/office/drawing/2014/main" id="{61FB3DD5-27B6-8F7E-68A9-637A294793F8}"/>
+                <a16:creationId xmlns:a16="http://schemas.microsoft.com/office/drawing/2014/main" id="{07879934-CFB5-66BB-59BB-BABD3CA176AF}"/>
               </a:ext>
             </a:extLst>
           </p:cNvPr>
@@ -11105,7 +13322,7 @@
           <p:cNvPr id="3" name="Inhaltsplatzhalter 2">
             <a:extLst>
               <a:ext uri="{FF2B5EF4-FFF2-40B4-BE49-F238E27FC236}">
-                <a16:creationId xmlns:a16="http://schemas.microsoft.com/office/drawing/2014/main" id="{6D158EB9-F8FF-D110-14AB-3C052A020577}"/>
+                <a16:creationId xmlns:a16="http://schemas.microsoft.com/office/drawing/2014/main" id="{EFC01319-F2C3-6015-A1E2-E3AC9A14B3A7}"/>
               </a:ext>
             </a:extLst>
           </p:cNvPr>
@@ -11162,7 +13379,7 @@
           <p:cNvPr id="4" name="Datumsplatzhalter 3">
             <a:extLst>
               <a:ext uri="{FF2B5EF4-FFF2-40B4-BE49-F238E27FC236}">
-                <a16:creationId xmlns:a16="http://schemas.microsoft.com/office/drawing/2014/main" id="{2140605A-56DD-BFF6-4334-653E0EDA353E}"/>
+                <a16:creationId xmlns:a16="http://schemas.microsoft.com/office/drawing/2014/main" id="{573F0D88-7264-998D-FD99-734251402639}"/>
               </a:ext>
             </a:extLst>
           </p:cNvPr>
@@ -11178,7 +13395,7 @@
           <a:bodyPr/>
           <a:lstStyle/>
           <a:p>
-            <a:fld id="{C9962047-E2C8-4734-A689-668B36BC6A1D}" type="datetimeFigureOut">
+            <a:fld id="{921E86A6-473C-463A-A28B-F44BBA9E8087}" type="datetimeFigureOut">
               <a:rPr lang="de-DE" smtClean="0"/>
               <a:t>09.10.2026</a:t>
             </a:fld>
@@ -11191,7 +13408,7 @@
           <p:cNvPr id="5" name="Fußzeilenplatzhalter 4">
             <a:extLst>
               <a:ext uri="{FF2B5EF4-FFF2-40B4-BE49-F238E27FC236}">
-                <a16:creationId xmlns:a16="http://schemas.microsoft.com/office/drawing/2014/main" id="{6FC32648-F6AA-F1C2-99A2-218274DDF7A5}"/>
+                <a16:creationId xmlns:a16="http://schemas.microsoft.com/office/drawing/2014/main" id="{FC89D8AF-8206-3C5C-38EA-021D35A63FA3}"/>
               </a:ext>
             </a:extLst>
           </p:cNvPr>
@@ -11216,7 +13433,7 @@
           <p:cNvPr id="6" name="Foliennummernplatzhalter 5">
             <a:extLst>
               <a:ext uri="{FF2B5EF4-FFF2-40B4-BE49-F238E27FC236}">
-                <a16:creationId xmlns:a16="http://schemas.microsoft.com/office/drawing/2014/main" id="{00EFE42B-2473-9A30-2702-4DF340EE2D08}"/>
+                <a16:creationId xmlns:a16="http://schemas.microsoft.com/office/drawing/2014/main" id="{D6A4579C-0E87-7E94-54B4-D62979384B2C}"/>
               </a:ext>
             </a:extLst>
           </p:cNvPr>
@@ -11232,7 +13449,7 @@
           <a:bodyPr/>
           <a:lstStyle/>
           <a:p>
-            <a:fld id="{377935EF-6752-464A-9B81-BA8CABB6107B}" type="slidenum">
+            <a:fld id="{5E48D93C-8800-4654-AF56-A23C3A94C9C2}" type="slidenum">
               <a:rPr lang="de-DE" smtClean="0"/>
               <a:t>‹Nr.›</a:t>
             </a:fld>
@@ -11243,7 +13460,7 @@
     </p:spTree>
     <p:extLst>
       <p:ext uri="{BB962C8B-B14F-4D97-AF65-F5344CB8AC3E}">
-        <p14:creationId xmlns:p14="http://schemas.microsoft.com/office/powerpoint/2010/main" val="426050687"/>
+        <p14:creationId xmlns:p14="http://schemas.microsoft.com/office/powerpoint/2010/main" val="1825662627"/>
       </p:ext>
     </p:extLst>
   </p:cSld>
@@ -11275,7 +13492,7 @@
           <p:cNvPr id="2" name="Titel 1">
             <a:extLst>
               <a:ext uri="{FF2B5EF4-FFF2-40B4-BE49-F238E27FC236}">
-                <a16:creationId xmlns:a16="http://schemas.microsoft.com/office/drawing/2014/main" id="{8348A74A-664C-4C2C-D379-5C858A3B255D}"/>
+                <a16:creationId xmlns:a16="http://schemas.microsoft.com/office/drawing/2014/main" id="{DBE1AD21-6370-FBA1-34BC-6FB02BA784CA}"/>
               </a:ext>
             </a:extLst>
           </p:cNvPr>
@@ -11312,7 +13529,7 @@
           <p:cNvPr id="3" name="Textplatzhalter 2">
             <a:extLst>
               <a:ext uri="{FF2B5EF4-FFF2-40B4-BE49-F238E27FC236}">
-                <a16:creationId xmlns:a16="http://schemas.microsoft.com/office/drawing/2014/main" id="{F7C2EF23-F764-395D-3CFD-067C5959ED84}"/>
+                <a16:creationId xmlns:a16="http://schemas.microsoft.com/office/drawing/2014/main" id="{287CD4BD-BF1D-4C48-6D93-C50487AE6BFE}"/>
               </a:ext>
             </a:extLst>
           </p:cNvPr>
@@ -11437,7 +13654,7 @@
           <p:cNvPr id="4" name="Datumsplatzhalter 3">
             <a:extLst>
               <a:ext uri="{FF2B5EF4-FFF2-40B4-BE49-F238E27FC236}">
-                <a16:creationId xmlns:a16="http://schemas.microsoft.com/office/drawing/2014/main" id="{388DA0E3-530D-1FE4-0EDF-C98C6AA3E857}"/>
+                <a16:creationId xmlns:a16="http://schemas.microsoft.com/office/drawing/2014/main" id="{A7B2D9CD-DE7D-7766-0189-1F7E44CFE23E}"/>
               </a:ext>
             </a:extLst>
           </p:cNvPr>
@@ -11453,7 +13670,7 @@
           <a:bodyPr/>
           <a:lstStyle/>
           <a:p>
-            <a:fld id="{C9962047-E2C8-4734-A689-668B36BC6A1D}" type="datetimeFigureOut">
+            <a:fld id="{921E86A6-473C-463A-A28B-F44BBA9E8087}" type="datetimeFigureOut">
               <a:rPr lang="de-DE" smtClean="0"/>
               <a:t>09.10.2026</a:t>
             </a:fld>
@@ -11466,7 +13683,7 @@
           <p:cNvPr id="5" name="Fußzeilenplatzhalter 4">
             <a:extLst>
               <a:ext uri="{FF2B5EF4-FFF2-40B4-BE49-F238E27FC236}">
-                <a16:creationId xmlns:a16="http://schemas.microsoft.com/office/drawing/2014/main" id="{634E895F-102F-88CC-0D58-64E8AB55B896}"/>
+                <a16:creationId xmlns:a16="http://schemas.microsoft.com/office/drawing/2014/main" id="{10BFC801-C06D-9B85-AD8E-C43AE8DA61EA}"/>
               </a:ext>
             </a:extLst>
           </p:cNvPr>
@@ -11491,7 +13708,7 @@
           <p:cNvPr id="6" name="Foliennummernplatzhalter 5">
             <a:extLst>
               <a:ext uri="{FF2B5EF4-FFF2-40B4-BE49-F238E27FC236}">
-                <a16:creationId xmlns:a16="http://schemas.microsoft.com/office/drawing/2014/main" id="{E31EB99E-A574-C128-D371-7EE6CE5E724E}"/>
+                <a16:creationId xmlns:a16="http://schemas.microsoft.com/office/drawing/2014/main" id="{25FECEE1-9083-D968-C152-1B5530EE45AD}"/>
               </a:ext>
             </a:extLst>
           </p:cNvPr>
@@ -11507,7 +13724,7 @@
           <a:bodyPr/>
           <a:lstStyle/>
           <a:p>
-            <a:fld id="{377935EF-6752-464A-9B81-BA8CABB6107B}" type="slidenum">
+            <a:fld id="{5E48D93C-8800-4654-AF56-A23C3A94C9C2}" type="slidenum">
               <a:rPr lang="de-DE" smtClean="0"/>
               <a:t>‹Nr.›</a:t>
             </a:fld>
@@ -11518,7 +13735,7 @@
     </p:spTree>
     <p:extLst>
       <p:ext uri="{BB962C8B-B14F-4D97-AF65-F5344CB8AC3E}">
-        <p14:creationId xmlns:p14="http://schemas.microsoft.com/office/powerpoint/2010/main" val="1768514542"/>
+        <p14:creationId xmlns:p14="http://schemas.microsoft.com/office/powerpoint/2010/main" val="1408313681"/>
       </p:ext>
     </p:extLst>
   </p:cSld>
@@ -11550,7 +13767,7 @@
           <p:cNvPr id="2" name="Titel 1">
             <a:extLst>
               <a:ext uri="{FF2B5EF4-FFF2-40B4-BE49-F238E27FC236}">
-                <a16:creationId xmlns:a16="http://schemas.microsoft.com/office/drawing/2014/main" id="{CC1E92D4-B7F2-72BC-B05B-F6BAFA631085}"/>
+                <a16:creationId xmlns:a16="http://schemas.microsoft.com/office/drawing/2014/main" id="{78C61F20-A2A9-968E-FDE0-6993500F47A0}"/>
               </a:ext>
             </a:extLst>
           </p:cNvPr>
@@ -11578,7 +13795,7 @@
           <p:cNvPr id="3" name="Inhaltsplatzhalter 2">
             <a:extLst>
               <a:ext uri="{FF2B5EF4-FFF2-40B4-BE49-F238E27FC236}">
-                <a16:creationId xmlns:a16="http://schemas.microsoft.com/office/drawing/2014/main" id="{8FBE7488-6420-F35D-0C79-FA4A43351BD5}"/>
+                <a16:creationId xmlns:a16="http://schemas.microsoft.com/office/drawing/2014/main" id="{58857116-2322-B36A-1AFD-C3773E331C8B}"/>
               </a:ext>
             </a:extLst>
           </p:cNvPr>
@@ -11640,7 +13857,7 @@
           <p:cNvPr id="4" name="Inhaltsplatzhalter 3">
             <a:extLst>
               <a:ext uri="{FF2B5EF4-FFF2-40B4-BE49-F238E27FC236}">
-                <a16:creationId xmlns:a16="http://schemas.microsoft.com/office/drawing/2014/main" id="{208D87BB-9096-D5C7-3D69-61A7FAE26020}"/>
+                <a16:creationId xmlns:a16="http://schemas.microsoft.com/office/drawing/2014/main" id="{ECEBD752-B8E4-DA70-4BA5-E82DC2A1B3DE}"/>
               </a:ext>
             </a:extLst>
           </p:cNvPr>
@@ -11702,7 +13919,7 @@
           <p:cNvPr id="5" name="Datumsplatzhalter 4">
             <a:extLst>
               <a:ext uri="{FF2B5EF4-FFF2-40B4-BE49-F238E27FC236}">
-                <a16:creationId xmlns:a16="http://schemas.microsoft.com/office/drawing/2014/main" id="{9D92772D-6ABC-0E35-9415-D8C972A349B2}"/>
+                <a16:creationId xmlns:a16="http://schemas.microsoft.com/office/drawing/2014/main" id="{C5179EF8-D762-8866-40A7-1F789C6D680B}"/>
               </a:ext>
             </a:extLst>
           </p:cNvPr>
@@ -11718,7 +13935,7 @@
           <a:bodyPr/>
           <a:lstStyle/>
           <a:p>
-            <a:fld id="{C9962047-E2C8-4734-A689-668B36BC6A1D}" type="datetimeFigureOut">
+            <a:fld id="{921E86A6-473C-463A-A28B-F44BBA9E8087}" type="datetimeFigureOut">
               <a:rPr lang="de-DE" smtClean="0"/>
               <a:t>09.10.2026</a:t>
             </a:fld>
@@ -11731,7 +13948,7 @@
           <p:cNvPr id="6" name="Fußzeilenplatzhalter 5">
             <a:extLst>
               <a:ext uri="{FF2B5EF4-FFF2-40B4-BE49-F238E27FC236}">
-                <a16:creationId xmlns:a16="http://schemas.microsoft.com/office/drawing/2014/main" id="{6679E43D-3355-3D46-A3D4-099A5DF83AB0}"/>
+                <a16:creationId xmlns:a16="http://schemas.microsoft.com/office/drawing/2014/main" id="{FD1ECB8E-7C99-B9B4-1F5D-457974CC3F69}"/>
               </a:ext>
             </a:extLst>
           </p:cNvPr>
@@ -11756,7 +13973,7 @@
           <p:cNvPr id="7" name="Foliennummernplatzhalter 6">
             <a:extLst>
               <a:ext uri="{FF2B5EF4-FFF2-40B4-BE49-F238E27FC236}">
-                <a16:creationId xmlns:a16="http://schemas.microsoft.com/office/drawing/2014/main" id="{25CD6765-E1CA-00F0-65D7-4567100FFB1A}"/>
+                <a16:creationId xmlns:a16="http://schemas.microsoft.com/office/drawing/2014/main" id="{D2C8EB91-BCDA-ABB3-9FA0-3BF2A7143D15}"/>
               </a:ext>
             </a:extLst>
           </p:cNvPr>
@@ -11772,7 +13989,7 @@
           <a:bodyPr/>
           <a:lstStyle/>
           <a:p>
-            <a:fld id="{377935EF-6752-464A-9B81-BA8CABB6107B}" type="slidenum">
+            <a:fld id="{5E48D93C-8800-4654-AF56-A23C3A94C9C2}" type="slidenum">
               <a:rPr lang="de-DE" smtClean="0"/>
               <a:t>‹Nr.›</a:t>
             </a:fld>
@@ -11783,7 +14000,7 @@
     </p:spTree>
     <p:extLst>
       <p:ext uri="{BB962C8B-B14F-4D97-AF65-F5344CB8AC3E}">
-        <p14:creationId xmlns:p14="http://schemas.microsoft.com/office/powerpoint/2010/main" val="1895703322"/>
+        <p14:creationId xmlns:p14="http://schemas.microsoft.com/office/powerpoint/2010/main" val="472940700"/>
       </p:ext>
     </p:extLst>
   </p:cSld>
@@ -11815,7 +14032,7 @@
           <p:cNvPr id="2" name="Titel 1">
             <a:extLst>
               <a:ext uri="{FF2B5EF4-FFF2-40B4-BE49-F238E27FC236}">
-                <a16:creationId xmlns:a16="http://schemas.microsoft.com/office/drawing/2014/main" id="{35AEEBCF-22B6-3F98-49F5-B9F2DDB8EFC6}"/>
+                <a16:creationId xmlns:a16="http://schemas.microsoft.com/office/drawing/2014/main" id="{12C7C165-CD1E-A9D8-D432-A21F1692492A}"/>
               </a:ext>
             </a:extLst>
           </p:cNvPr>
@@ -11848,7 +14065,7 @@
           <p:cNvPr id="3" name="Textplatzhalter 2">
             <a:extLst>
               <a:ext uri="{FF2B5EF4-FFF2-40B4-BE49-F238E27FC236}">
-                <a16:creationId xmlns:a16="http://schemas.microsoft.com/office/drawing/2014/main" id="{A5F20308-E00A-7CAD-AC4D-CE341DABCCFE}"/>
+                <a16:creationId xmlns:a16="http://schemas.microsoft.com/office/drawing/2014/main" id="{A6B42C27-3D6D-3FE1-EE24-595E191CBDEA}"/>
               </a:ext>
             </a:extLst>
           </p:cNvPr>
@@ -11919,7 +14136,7 @@
           <p:cNvPr id="4" name="Inhaltsplatzhalter 3">
             <a:extLst>
               <a:ext uri="{FF2B5EF4-FFF2-40B4-BE49-F238E27FC236}">
-                <a16:creationId xmlns:a16="http://schemas.microsoft.com/office/drawing/2014/main" id="{0091D037-9438-722B-9293-9ADE566ACF3D}"/>
+                <a16:creationId xmlns:a16="http://schemas.microsoft.com/office/drawing/2014/main" id="{2F24BE9E-7EDB-4CED-BDAE-1AC579F3A81F}"/>
               </a:ext>
             </a:extLst>
           </p:cNvPr>
@@ -11981,7 +14198,7 @@
           <p:cNvPr id="5" name="Textplatzhalter 4">
             <a:extLst>
               <a:ext uri="{FF2B5EF4-FFF2-40B4-BE49-F238E27FC236}">
-                <a16:creationId xmlns:a16="http://schemas.microsoft.com/office/drawing/2014/main" id="{FA259019-FB91-8673-0A6B-8F7EAA389946}"/>
+                <a16:creationId xmlns:a16="http://schemas.microsoft.com/office/drawing/2014/main" id="{9B341587-E96F-3DA9-2B36-4FFB2D93BA5A}"/>
               </a:ext>
             </a:extLst>
           </p:cNvPr>
@@ -12052,7 +14269,7 @@
           <p:cNvPr id="6" name="Inhaltsplatzhalter 5">
             <a:extLst>
               <a:ext uri="{FF2B5EF4-FFF2-40B4-BE49-F238E27FC236}">
-                <a16:creationId xmlns:a16="http://schemas.microsoft.com/office/drawing/2014/main" id="{A7535323-9854-90E8-BFF9-0AC471B1A13D}"/>
+                <a16:creationId xmlns:a16="http://schemas.microsoft.com/office/drawing/2014/main" id="{896F7553-94FB-08C6-3D90-4594B3486EA6}"/>
               </a:ext>
             </a:extLst>
           </p:cNvPr>
@@ -12114,7 +14331,7 @@
           <p:cNvPr id="7" name="Datumsplatzhalter 6">
             <a:extLst>
               <a:ext uri="{FF2B5EF4-FFF2-40B4-BE49-F238E27FC236}">
-                <a16:creationId xmlns:a16="http://schemas.microsoft.com/office/drawing/2014/main" id="{5E3BF176-98A9-141F-6BAB-A109C3C63F64}"/>
+                <a16:creationId xmlns:a16="http://schemas.microsoft.com/office/drawing/2014/main" id="{0E6867E0-354B-A45D-494A-D10C5B02C539}"/>
               </a:ext>
             </a:extLst>
           </p:cNvPr>
@@ -12130,7 +14347,7 @@
           <a:bodyPr/>
           <a:lstStyle/>
           <a:p>
-            <a:fld id="{C9962047-E2C8-4734-A689-668B36BC6A1D}" type="datetimeFigureOut">
+            <a:fld id="{921E86A6-473C-463A-A28B-F44BBA9E8087}" type="datetimeFigureOut">
               <a:rPr lang="de-DE" smtClean="0"/>
               <a:t>09.10.2026</a:t>
             </a:fld>
@@ -12143,7 +14360,7 @@
           <p:cNvPr id="8" name="Fußzeilenplatzhalter 7">
             <a:extLst>
               <a:ext uri="{FF2B5EF4-FFF2-40B4-BE49-F238E27FC236}">
-                <a16:creationId xmlns:a16="http://schemas.microsoft.com/office/drawing/2014/main" id="{E45AE3F5-3FEB-498F-2F35-BF711F86D22B}"/>
+                <a16:creationId xmlns:a16="http://schemas.microsoft.com/office/drawing/2014/main" id="{AEA2A456-A0F9-306A-C179-5CB15838C762}"/>
               </a:ext>
             </a:extLst>
           </p:cNvPr>
@@ -12168,7 +14385,7 @@
           <p:cNvPr id="9" name="Foliennummernplatzhalter 8">
             <a:extLst>
               <a:ext uri="{FF2B5EF4-FFF2-40B4-BE49-F238E27FC236}">
-                <a16:creationId xmlns:a16="http://schemas.microsoft.com/office/drawing/2014/main" id="{2D456F18-35F1-5141-B2C7-101CE2210F35}"/>
+                <a16:creationId xmlns:a16="http://schemas.microsoft.com/office/drawing/2014/main" id="{0B9CDCCB-E321-AE57-9071-75D94BF36DB2}"/>
               </a:ext>
             </a:extLst>
           </p:cNvPr>
@@ -12184,7 +14401,7 @@
           <a:bodyPr/>
           <a:lstStyle/>
           <a:p>
-            <a:fld id="{377935EF-6752-464A-9B81-BA8CABB6107B}" type="slidenum">
+            <a:fld id="{5E48D93C-8800-4654-AF56-A23C3A94C9C2}" type="slidenum">
               <a:rPr lang="de-DE" smtClean="0"/>
               <a:t>‹Nr.›</a:t>
             </a:fld>
@@ -12195,7 +14412,7 @@
     </p:spTree>
     <p:extLst>
       <p:ext uri="{BB962C8B-B14F-4D97-AF65-F5344CB8AC3E}">
-        <p14:creationId xmlns:p14="http://schemas.microsoft.com/office/powerpoint/2010/main" val="3958652924"/>
+        <p14:creationId xmlns:p14="http://schemas.microsoft.com/office/powerpoint/2010/main" val="1989437893"/>
       </p:ext>
     </p:extLst>
   </p:cSld>
@@ -12227,7 +14444,7 @@
           <p:cNvPr id="2" name="Titel 1">
             <a:extLst>
               <a:ext uri="{FF2B5EF4-FFF2-40B4-BE49-F238E27FC236}">
-                <a16:creationId xmlns:a16="http://schemas.microsoft.com/office/drawing/2014/main" id="{0CD36973-E164-7F2F-ADE1-74B16AAC3BA9}"/>
+                <a16:creationId xmlns:a16="http://schemas.microsoft.com/office/drawing/2014/main" id="{371F4290-2D21-5FE2-7CA1-4A0122991B4E}"/>
               </a:ext>
             </a:extLst>
           </p:cNvPr>
@@ -12255,7 +14472,7 @@
           <p:cNvPr id="3" name="Datumsplatzhalter 2">
             <a:extLst>
               <a:ext uri="{FF2B5EF4-FFF2-40B4-BE49-F238E27FC236}">
-                <a16:creationId xmlns:a16="http://schemas.microsoft.com/office/drawing/2014/main" id="{8749C6C8-1B0E-7363-2D9E-AC01F791350A}"/>
+                <a16:creationId xmlns:a16="http://schemas.microsoft.com/office/drawing/2014/main" id="{A92BCC88-DF38-DB9D-864E-200B5735FEF1}"/>
               </a:ext>
             </a:extLst>
           </p:cNvPr>
@@ -12271,7 +14488,7 @@
           <a:bodyPr/>
           <a:lstStyle/>
           <a:p>
-            <a:fld id="{C9962047-E2C8-4734-A689-668B36BC6A1D}" type="datetimeFigureOut">
+            <a:fld id="{921E86A6-473C-463A-A28B-F44BBA9E8087}" type="datetimeFigureOut">
               <a:rPr lang="de-DE" smtClean="0"/>
               <a:t>09.10.2026</a:t>
             </a:fld>
@@ -12284,7 +14501,7 @@
           <p:cNvPr id="4" name="Fußzeilenplatzhalter 3">
             <a:extLst>
               <a:ext uri="{FF2B5EF4-FFF2-40B4-BE49-F238E27FC236}">
-                <a16:creationId xmlns:a16="http://schemas.microsoft.com/office/drawing/2014/main" id="{96B94F9A-7AC6-02E3-C999-C2446E8F6EEE}"/>
+                <a16:creationId xmlns:a16="http://schemas.microsoft.com/office/drawing/2014/main" id="{279E114A-7760-971F-C480-B8A8EBE41F0B}"/>
               </a:ext>
             </a:extLst>
           </p:cNvPr>
@@ -12309,7 +14526,7 @@
           <p:cNvPr id="5" name="Foliennummernplatzhalter 4">
             <a:extLst>
               <a:ext uri="{FF2B5EF4-FFF2-40B4-BE49-F238E27FC236}">
-                <a16:creationId xmlns:a16="http://schemas.microsoft.com/office/drawing/2014/main" id="{07B18CDE-6776-F703-01D8-B5CE5256F1EB}"/>
+                <a16:creationId xmlns:a16="http://schemas.microsoft.com/office/drawing/2014/main" id="{49A86963-DCCE-B9F5-BE7E-A5410B5E81B3}"/>
               </a:ext>
             </a:extLst>
           </p:cNvPr>
@@ -12325,7 +14542,7 @@
           <a:bodyPr/>
           <a:lstStyle/>
           <a:p>
-            <a:fld id="{377935EF-6752-464A-9B81-BA8CABB6107B}" type="slidenum">
+            <a:fld id="{5E48D93C-8800-4654-AF56-A23C3A94C9C2}" type="slidenum">
               <a:rPr lang="de-DE" smtClean="0"/>
               <a:t>‹Nr.›</a:t>
             </a:fld>
@@ -12336,7 +14553,7 @@
     </p:spTree>
     <p:extLst>
       <p:ext uri="{BB962C8B-B14F-4D97-AF65-F5344CB8AC3E}">
-        <p14:creationId xmlns:p14="http://schemas.microsoft.com/office/powerpoint/2010/main" val="169783146"/>
+        <p14:creationId xmlns:p14="http://schemas.microsoft.com/office/powerpoint/2010/main" val="4044733402"/>
       </p:ext>
     </p:extLst>
   </p:cSld>
@@ -12368,7 +14585,7 @@
           <p:cNvPr id="2" name="Datumsplatzhalter 1">
             <a:extLst>
               <a:ext uri="{FF2B5EF4-FFF2-40B4-BE49-F238E27FC236}">
-                <a16:creationId xmlns:a16="http://schemas.microsoft.com/office/drawing/2014/main" id="{158E9554-FA0B-F30E-7A88-E7B924E35B11}"/>
+                <a16:creationId xmlns:a16="http://schemas.microsoft.com/office/drawing/2014/main" id="{07E38C7D-A881-0B32-F6BF-CA6C81336DA9}"/>
               </a:ext>
             </a:extLst>
           </p:cNvPr>
@@ -12384,7 +14601,7 @@
           <a:bodyPr/>
           <a:lstStyle/>
           <a:p>
-            <a:fld id="{C9962047-E2C8-4734-A689-668B36BC6A1D}" type="datetimeFigureOut">
+            <a:fld id="{921E86A6-473C-463A-A28B-F44BBA9E8087}" type="datetimeFigureOut">
               <a:rPr lang="de-DE" smtClean="0"/>
               <a:t>09.10.2026</a:t>
             </a:fld>
@@ -12397,7 +14614,7 @@
           <p:cNvPr id="3" name="Fußzeilenplatzhalter 2">
             <a:extLst>
               <a:ext uri="{FF2B5EF4-FFF2-40B4-BE49-F238E27FC236}">
-                <a16:creationId xmlns:a16="http://schemas.microsoft.com/office/drawing/2014/main" id="{3F52906A-5827-DA11-1C5B-D48FAF9FFE0E}"/>
+                <a16:creationId xmlns:a16="http://schemas.microsoft.com/office/drawing/2014/main" id="{3932C6E7-ABC7-B5A4-FDA8-823190778266}"/>
               </a:ext>
             </a:extLst>
           </p:cNvPr>
@@ -12422,7 +14639,7 @@
           <p:cNvPr id="4" name="Foliennummernplatzhalter 3">
             <a:extLst>
               <a:ext uri="{FF2B5EF4-FFF2-40B4-BE49-F238E27FC236}">
-                <a16:creationId xmlns:a16="http://schemas.microsoft.com/office/drawing/2014/main" id="{8F9DC859-2261-56C1-6BC7-8A8A748F9A52}"/>
+                <a16:creationId xmlns:a16="http://schemas.microsoft.com/office/drawing/2014/main" id="{05E04788-84AE-D25B-F338-BDC0576275AF}"/>
               </a:ext>
             </a:extLst>
           </p:cNvPr>
@@ -12438,7 +14655,7 @@
           <a:bodyPr/>
           <a:lstStyle/>
           <a:p>
-            <a:fld id="{377935EF-6752-464A-9B81-BA8CABB6107B}" type="slidenum">
+            <a:fld id="{5E48D93C-8800-4654-AF56-A23C3A94C9C2}" type="slidenum">
               <a:rPr lang="de-DE" smtClean="0"/>
               <a:t>‹Nr.›</a:t>
             </a:fld>
@@ -12449,7 +14666,7 @@
     </p:spTree>
     <p:extLst>
       <p:ext uri="{BB962C8B-B14F-4D97-AF65-F5344CB8AC3E}">
-        <p14:creationId xmlns:p14="http://schemas.microsoft.com/office/powerpoint/2010/main" val="1177588628"/>
+        <p14:creationId xmlns:p14="http://schemas.microsoft.com/office/powerpoint/2010/main" val="3939967630"/>
       </p:ext>
     </p:extLst>
   </p:cSld>
@@ -12481,7 +14698,7 @@
           <p:cNvPr id="2" name="Titel 1">
             <a:extLst>
               <a:ext uri="{FF2B5EF4-FFF2-40B4-BE49-F238E27FC236}">
-                <a16:creationId xmlns:a16="http://schemas.microsoft.com/office/drawing/2014/main" id="{C308A7BC-173E-1950-4483-C7EB83B61D49}"/>
+                <a16:creationId xmlns:a16="http://schemas.microsoft.com/office/drawing/2014/main" id="{684345CF-EA38-674A-CF5E-4825E912106C}"/>
               </a:ext>
             </a:extLst>
           </p:cNvPr>
@@ -12518,7 +14735,7 @@
           <p:cNvPr id="3" name="Inhaltsplatzhalter 2">
             <a:extLst>
               <a:ext uri="{FF2B5EF4-FFF2-40B4-BE49-F238E27FC236}">
-                <a16:creationId xmlns:a16="http://schemas.microsoft.com/office/drawing/2014/main" id="{49C968DD-E16F-5781-2591-D0C44BE24CD2}"/>
+                <a16:creationId xmlns:a16="http://schemas.microsoft.com/office/drawing/2014/main" id="{CBA0DB2F-1125-ED5D-0B96-9C8B9DF5F317}"/>
               </a:ext>
             </a:extLst>
           </p:cNvPr>
@@ -12608,7 +14825,7 @@
           <p:cNvPr id="4" name="Textplatzhalter 3">
             <a:extLst>
               <a:ext uri="{FF2B5EF4-FFF2-40B4-BE49-F238E27FC236}">
-                <a16:creationId xmlns:a16="http://schemas.microsoft.com/office/drawing/2014/main" id="{0B094689-8E08-F31B-1118-170B9C7F44C1}"/>
+                <a16:creationId xmlns:a16="http://schemas.microsoft.com/office/drawing/2014/main" id="{6FA63ACE-9D94-FB60-9A4E-4D27C8B3DA74}"/>
               </a:ext>
             </a:extLst>
           </p:cNvPr>
@@ -12679,7 +14896,7 @@
           <p:cNvPr id="5" name="Datumsplatzhalter 4">
             <a:extLst>
               <a:ext uri="{FF2B5EF4-FFF2-40B4-BE49-F238E27FC236}">
-                <a16:creationId xmlns:a16="http://schemas.microsoft.com/office/drawing/2014/main" id="{7B0FD140-7B5F-380D-B51A-4DE60F181BD5}"/>
+                <a16:creationId xmlns:a16="http://schemas.microsoft.com/office/drawing/2014/main" id="{7D38DBBE-CA0C-2897-5E12-0841C3397A1E}"/>
               </a:ext>
             </a:extLst>
           </p:cNvPr>
@@ -12695,7 +14912,7 @@
           <a:bodyPr/>
           <a:lstStyle/>
           <a:p>
-            <a:fld id="{C9962047-E2C8-4734-A689-668B36BC6A1D}" type="datetimeFigureOut">
+            <a:fld id="{921E86A6-473C-463A-A28B-F44BBA9E8087}" type="datetimeFigureOut">
               <a:rPr lang="de-DE" smtClean="0"/>
               <a:t>09.10.2026</a:t>
             </a:fld>
@@ -12708,7 +14925,7 @@
           <p:cNvPr id="6" name="Fußzeilenplatzhalter 5">
             <a:extLst>
               <a:ext uri="{FF2B5EF4-FFF2-40B4-BE49-F238E27FC236}">
-                <a16:creationId xmlns:a16="http://schemas.microsoft.com/office/drawing/2014/main" id="{6F92BBD0-2657-2EB2-0A74-4F49C69ECDAF}"/>
+                <a16:creationId xmlns:a16="http://schemas.microsoft.com/office/drawing/2014/main" id="{F2BF01A0-86F9-9BAF-ED6A-2951A2C8C40D}"/>
               </a:ext>
             </a:extLst>
           </p:cNvPr>
@@ -12733,7 +14950,7 @@
           <p:cNvPr id="7" name="Foliennummernplatzhalter 6">
             <a:extLst>
               <a:ext uri="{FF2B5EF4-FFF2-40B4-BE49-F238E27FC236}">
-                <a16:creationId xmlns:a16="http://schemas.microsoft.com/office/drawing/2014/main" id="{63C5E45C-8966-BA9E-BE27-097E6D3BC534}"/>
+                <a16:creationId xmlns:a16="http://schemas.microsoft.com/office/drawing/2014/main" id="{78B739D2-B2D5-BE06-960C-ED868F5203AC}"/>
               </a:ext>
             </a:extLst>
           </p:cNvPr>
@@ -12749,7 +14966,7 @@
           <a:bodyPr/>
           <a:lstStyle/>
           <a:p>
-            <a:fld id="{377935EF-6752-464A-9B81-BA8CABB6107B}" type="slidenum">
+            <a:fld id="{5E48D93C-8800-4654-AF56-A23C3A94C9C2}" type="slidenum">
               <a:rPr lang="de-DE" smtClean="0"/>
               <a:t>‹Nr.›</a:t>
             </a:fld>
@@ -12760,7 +14977,7 @@
     </p:spTree>
     <p:extLst>
       <p:ext uri="{BB962C8B-B14F-4D97-AF65-F5344CB8AC3E}">
-        <p14:creationId xmlns:p14="http://schemas.microsoft.com/office/powerpoint/2010/main" val="1848074316"/>
+        <p14:creationId xmlns:p14="http://schemas.microsoft.com/office/powerpoint/2010/main" val="1772657182"/>
       </p:ext>
     </p:extLst>
   </p:cSld>
@@ -12792,7 +15009,7 @@
           <p:cNvPr id="2" name="Titel 1">
             <a:extLst>
               <a:ext uri="{FF2B5EF4-FFF2-40B4-BE49-F238E27FC236}">
-                <a16:creationId xmlns:a16="http://schemas.microsoft.com/office/drawing/2014/main" id="{14CD96D7-1832-F3B8-9842-C2AB2F369333}"/>
+                <a16:creationId xmlns:a16="http://schemas.microsoft.com/office/drawing/2014/main" id="{3727F41C-52A7-6356-E208-DE4C876EDB77}"/>
               </a:ext>
             </a:extLst>
           </p:cNvPr>
@@ -12829,7 +15046,7 @@
           <p:cNvPr id="3" name="Bildplatzhalter 2">
             <a:extLst>
               <a:ext uri="{FF2B5EF4-FFF2-40B4-BE49-F238E27FC236}">
-                <a16:creationId xmlns:a16="http://schemas.microsoft.com/office/drawing/2014/main" id="{065477DC-3A8F-4FA1-2657-57EBDE61CD42}"/>
+                <a16:creationId xmlns:a16="http://schemas.microsoft.com/office/drawing/2014/main" id="{E0669E1C-46A8-A76B-4672-6B0ACDC4A1C9}"/>
               </a:ext>
             </a:extLst>
           </p:cNvPr>
@@ -12896,7 +15113,7 @@
           <p:cNvPr id="4" name="Textplatzhalter 3">
             <a:extLst>
               <a:ext uri="{FF2B5EF4-FFF2-40B4-BE49-F238E27FC236}">
-                <a16:creationId xmlns:a16="http://schemas.microsoft.com/office/drawing/2014/main" id="{64E94A0F-249A-4F8B-2A13-58551DA6368A}"/>
+                <a16:creationId xmlns:a16="http://schemas.microsoft.com/office/drawing/2014/main" id="{04CB05D8-123D-7105-EC86-EA45A61815E1}"/>
               </a:ext>
             </a:extLst>
           </p:cNvPr>
@@ -12967,7 +15184,7 @@
           <p:cNvPr id="5" name="Datumsplatzhalter 4">
             <a:extLst>
               <a:ext uri="{FF2B5EF4-FFF2-40B4-BE49-F238E27FC236}">
-                <a16:creationId xmlns:a16="http://schemas.microsoft.com/office/drawing/2014/main" id="{5897B951-D8FE-0CC1-9BE2-5B2364167F77}"/>
+                <a16:creationId xmlns:a16="http://schemas.microsoft.com/office/drawing/2014/main" id="{0FCCE7DA-CB60-5FBC-51ED-0CFEF146ADB1}"/>
               </a:ext>
             </a:extLst>
           </p:cNvPr>
@@ -12983,7 +15200,7 @@
           <a:bodyPr/>
           <a:lstStyle/>
           <a:p>
-            <a:fld id="{C9962047-E2C8-4734-A689-668B36BC6A1D}" type="datetimeFigureOut">
+            <a:fld id="{921E86A6-473C-463A-A28B-F44BBA9E8087}" type="datetimeFigureOut">
               <a:rPr lang="de-DE" smtClean="0"/>
               <a:t>09.10.2026</a:t>
             </a:fld>
@@ -12996,7 +15213,7 @@
           <p:cNvPr id="6" name="Fußzeilenplatzhalter 5">
             <a:extLst>
               <a:ext uri="{FF2B5EF4-FFF2-40B4-BE49-F238E27FC236}">
-                <a16:creationId xmlns:a16="http://schemas.microsoft.com/office/drawing/2014/main" id="{F598447C-5F4F-4037-8549-1DB1952A21E9}"/>
+                <a16:creationId xmlns:a16="http://schemas.microsoft.com/office/drawing/2014/main" id="{773E541D-72F7-7B31-011C-DE8CD93835B1}"/>
               </a:ext>
             </a:extLst>
           </p:cNvPr>
@@ -13021,7 +15238,7 @@
           <p:cNvPr id="7" name="Foliennummernplatzhalter 6">
             <a:extLst>
               <a:ext uri="{FF2B5EF4-FFF2-40B4-BE49-F238E27FC236}">
-                <a16:creationId xmlns:a16="http://schemas.microsoft.com/office/drawing/2014/main" id="{C6CAED72-85B7-E6AD-2B12-A1DFF0A3B352}"/>
+                <a16:creationId xmlns:a16="http://schemas.microsoft.com/office/drawing/2014/main" id="{2647F94C-3D93-7D08-107C-811B852274AF}"/>
               </a:ext>
             </a:extLst>
           </p:cNvPr>
@@ -13037,7 +15254,7 @@
           <a:bodyPr/>
           <a:lstStyle/>
           <a:p>
-            <a:fld id="{377935EF-6752-464A-9B81-BA8CABB6107B}" type="slidenum">
+            <a:fld id="{5E48D93C-8800-4654-AF56-A23C3A94C9C2}" type="slidenum">
               <a:rPr lang="de-DE" smtClean="0"/>
               <a:t>‹Nr.›</a:t>
             </a:fld>
@@ -13048,7 +15265,7 @@
     </p:spTree>
     <p:extLst>
       <p:ext uri="{BB962C8B-B14F-4D97-AF65-F5344CB8AC3E}">
-        <p14:creationId xmlns:p14="http://schemas.microsoft.com/office/powerpoint/2010/main" val="3927644076"/>
+        <p14:creationId xmlns:p14="http://schemas.microsoft.com/office/powerpoint/2010/main" val="731581815"/>
       </p:ext>
     </p:extLst>
   </p:cSld>
@@ -13085,7 +15302,7 @@
           <p:cNvPr id="2" name="Titelplatzhalter 1">
             <a:extLst>
               <a:ext uri="{FF2B5EF4-FFF2-40B4-BE49-F238E27FC236}">
-                <a16:creationId xmlns:a16="http://schemas.microsoft.com/office/drawing/2014/main" id="{48AF5C9E-86AA-08EC-FAA7-CC4932ED966B}"/>
+                <a16:creationId xmlns:a16="http://schemas.microsoft.com/office/drawing/2014/main" id="{FC9A2F4E-B953-ECC1-C92A-364C8D3BDCDF}"/>
               </a:ext>
             </a:extLst>
           </p:cNvPr>
@@ -13123,7 +15340,7 @@
           <p:cNvPr id="3" name="Textplatzhalter 2">
             <a:extLst>
               <a:ext uri="{FF2B5EF4-FFF2-40B4-BE49-F238E27FC236}">
-                <a16:creationId xmlns:a16="http://schemas.microsoft.com/office/drawing/2014/main" id="{F5EAB3AB-9B8B-780F-02EB-845E2095ACFC}"/>
+                <a16:creationId xmlns:a16="http://schemas.microsoft.com/office/drawing/2014/main" id="{DC51D95F-F74C-3673-D317-2299CE1C5460}"/>
               </a:ext>
             </a:extLst>
           </p:cNvPr>
@@ -13190,7 +15407,7 @@
           <p:cNvPr id="4" name="Datumsplatzhalter 3">
             <a:extLst>
               <a:ext uri="{FF2B5EF4-FFF2-40B4-BE49-F238E27FC236}">
-                <a16:creationId xmlns:a16="http://schemas.microsoft.com/office/drawing/2014/main" id="{56F16CA4-79D3-C070-004C-B4263D2E5270}"/>
+                <a16:creationId xmlns:a16="http://schemas.microsoft.com/office/drawing/2014/main" id="{C64BA83F-FD7A-EEA0-CCD2-591CB3F051FB}"/>
               </a:ext>
             </a:extLst>
           </p:cNvPr>
@@ -13224,7 +15441,7 @@
             </a:lvl1pPr>
           </a:lstStyle>
           <a:p>
-            <a:fld id="{C9962047-E2C8-4734-A689-668B36BC6A1D}" type="datetimeFigureOut">
+            <a:fld id="{921E86A6-473C-463A-A28B-F44BBA9E8087}" type="datetimeFigureOut">
               <a:rPr lang="de-DE" smtClean="0"/>
               <a:t>09.10.2026</a:t>
             </a:fld>
@@ -13237,7 +15454,7 @@
           <p:cNvPr id="5" name="Fußzeilenplatzhalter 4">
             <a:extLst>
               <a:ext uri="{FF2B5EF4-FFF2-40B4-BE49-F238E27FC236}">
-                <a16:creationId xmlns:a16="http://schemas.microsoft.com/office/drawing/2014/main" id="{1E85DF77-F128-4654-BFE8-DEABCE832339}"/>
+                <a16:creationId xmlns:a16="http://schemas.microsoft.com/office/drawing/2014/main" id="{8B7E7DF5-8A11-16F5-4CD6-EC489E60F2DC}"/>
               </a:ext>
             </a:extLst>
           </p:cNvPr>
@@ -13280,7 +15497,7 @@
           <p:cNvPr id="6" name="Foliennummernplatzhalter 5">
             <a:extLst>
               <a:ext uri="{FF2B5EF4-FFF2-40B4-BE49-F238E27FC236}">
-                <a16:creationId xmlns:a16="http://schemas.microsoft.com/office/drawing/2014/main" id="{0C936764-7B3D-A5D8-779A-73F3E7A778BF}"/>
+                <a16:creationId xmlns:a16="http://schemas.microsoft.com/office/drawing/2014/main" id="{D9E7FD84-D4F4-34B9-8FDF-888B80A15104}"/>
               </a:ext>
             </a:extLst>
           </p:cNvPr>
@@ -13314,7 +15531,7 @@
             </a:lvl1pPr>
           </a:lstStyle>
           <a:p>
-            <a:fld id="{377935EF-6752-464A-9B81-BA8CABB6107B}" type="slidenum">
+            <a:fld id="{5E48D93C-8800-4654-AF56-A23C3A94C9C2}" type="slidenum">
               <a:rPr lang="de-DE" smtClean="0"/>
               <a:t>‹Nr.›</a:t>
             </a:fld>
@@ -13325,7 +15542,7 @@
     </p:spTree>
     <p:extLst>
       <p:ext uri="{BB962C8B-B14F-4D97-AF65-F5344CB8AC3E}">
-        <p14:creationId xmlns:p14="http://schemas.microsoft.com/office/powerpoint/2010/main" val="2024606226"/>
+        <p14:creationId xmlns:p14="http://schemas.microsoft.com/office/powerpoint/2010/main" val="869361240"/>
       </p:ext>
     </p:extLst>
   </p:cSld>
@@ -13648,7 +15865,7 @@
           <p:cNvPr id="2" name="Titel 1">
             <a:extLst>
               <a:ext uri="{FF2B5EF4-FFF2-40B4-BE49-F238E27FC236}">
-                <a16:creationId xmlns:a16="http://schemas.microsoft.com/office/drawing/2014/main" id="{53EAACA3-EA18-3ACE-25AC-E907D276298B}"/>
+                <a16:creationId xmlns:a16="http://schemas.microsoft.com/office/drawing/2014/main" id="{E86C38D0-3BD5-D732-9179-6F1B68E12057}"/>
               </a:ext>
             </a:extLst>
           </p:cNvPr>
@@ -13677,7 +15894,7 @@
           <p:cNvPr id="3" name="Diagramm 2">
             <a:extLst>
               <a:ext uri="{FF2B5EF4-FFF2-40B4-BE49-F238E27FC236}">
-                <a16:creationId xmlns:a16="http://schemas.microsoft.com/office/drawing/2014/main" id="{3C01D9CD-217A-BF19-0576-56876BED3974}"/>
+                <a16:creationId xmlns:a16="http://schemas.microsoft.com/office/drawing/2014/main" id="{74F0637A-D22A-AE2B-77CD-7F9298D91FC7}"/>
               </a:ext>
             </a:extLst>
           </p:cNvPr>
@@ -13685,7 +15902,7 @@
           <p:nvPr>
             <p:extLst>
               <p:ext uri="{D42A27DB-BD31-4B8C-83A1-F6EECF244321}">
-                <p14:modId xmlns:p14="http://schemas.microsoft.com/office/powerpoint/2010/main" val="1182428717"/>
+                <p14:modId xmlns:p14="http://schemas.microsoft.com/office/powerpoint/2010/main" val="1650794000"/>
               </p:ext>
             </p:extLst>
           </p:nvPr>
@@ -13705,7 +15922,7 @@
           <p:cNvPr id="4" name="Diagramm 3">
             <a:extLst>
               <a:ext uri="{FF2B5EF4-FFF2-40B4-BE49-F238E27FC236}">
-                <a16:creationId xmlns:a16="http://schemas.microsoft.com/office/drawing/2014/main" id="{004CD60A-EE22-DC67-2238-21BD621425C7}"/>
+                <a16:creationId xmlns:a16="http://schemas.microsoft.com/office/drawing/2014/main" id="{AA9C547F-CE3B-4D19-7719-76B6AE024F21}"/>
               </a:ext>
             </a:extLst>
           </p:cNvPr>
@@ -13713,7 +15930,7 @@
           <p:nvPr>
             <p:extLst>
               <p:ext uri="{D42A27DB-BD31-4B8C-83A1-F6EECF244321}">
-                <p14:modId xmlns:p14="http://schemas.microsoft.com/office/powerpoint/2010/main" val="213811935"/>
+                <p14:modId xmlns:p14="http://schemas.microsoft.com/office/powerpoint/2010/main" val="407059004"/>
               </p:ext>
             </p:extLst>
           </p:nvPr>
@@ -13731,7 +15948,7 @@
     </p:spTree>
     <p:extLst>
       <p:ext uri="{BB962C8B-B14F-4D97-AF65-F5344CB8AC3E}">
-        <p14:creationId xmlns:p14="http://schemas.microsoft.com/office/powerpoint/2010/main" val="574115935"/>
+        <p14:creationId xmlns:p14="http://schemas.microsoft.com/office/powerpoint/2010/main" val="1392365029"/>
       </p:ext>
     </p:extLst>
   </p:cSld>
@@ -13763,7 +15980,7 @@
           <p:cNvPr id="2" name="Titel 1">
             <a:extLst>
               <a:ext uri="{FF2B5EF4-FFF2-40B4-BE49-F238E27FC236}">
-                <a16:creationId xmlns:a16="http://schemas.microsoft.com/office/drawing/2014/main" id="{55B283F3-AAE8-6F9F-3294-65661F15FE66}"/>
+                <a16:creationId xmlns:a16="http://schemas.microsoft.com/office/drawing/2014/main" id="{CA2EC12C-06C7-95B5-8A71-75084928A8F1}"/>
               </a:ext>
             </a:extLst>
           </p:cNvPr>
@@ -13792,7 +16009,7 @@
           <p:cNvPr id="3" name="Diagramm 2">
             <a:extLst>
               <a:ext uri="{FF2B5EF4-FFF2-40B4-BE49-F238E27FC236}">
-                <a16:creationId xmlns:a16="http://schemas.microsoft.com/office/drawing/2014/main" id="{AA9C8BB1-BC88-4A6B-7042-5392F19B64BA}"/>
+                <a16:creationId xmlns:a16="http://schemas.microsoft.com/office/drawing/2014/main" id="{66F8AB44-4E8C-D050-94B5-E9ED43D70CD2}"/>
               </a:ext>
             </a:extLst>
           </p:cNvPr>
@@ -13800,7 +16017,7 @@
           <p:nvPr>
             <p:extLst>
               <p:ext uri="{D42A27DB-BD31-4B8C-83A1-F6EECF244321}">
-                <p14:modId xmlns:p14="http://schemas.microsoft.com/office/powerpoint/2010/main" val="140767115"/>
+                <p14:modId xmlns:p14="http://schemas.microsoft.com/office/powerpoint/2010/main" val="2595484943"/>
               </p:ext>
             </p:extLst>
           </p:nvPr>
@@ -13820,7 +16037,7 @@
           <p:cNvPr id="4" name="Diagramm 3">
             <a:extLst>
               <a:ext uri="{FF2B5EF4-FFF2-40B4-BE49-F238E27FC236}">
-                <a16:creationId xmlns:a16="http://schemas.microsoft.com/office/drawing/2014/main" id="{6DCDB0FD-B923-D61B-B587-5E08AECC82FD}"/>
+                <a16:creationId xmlns:a16="http://schemas.microsoft.com/office/drawing/2014/main" id="{595F26E6-DD22-160B-F61F-C9D213869AEA}"/>
               </a:ext>
             </a:extLst>
           </p:cNvPr>
@@ -13828,7 +16045,7 @@
           <p:nvPr>
             <p:extLst>
               <p:ext uri="{D42A27DB-BD31-4B8C-83A1-F6EECF244321}">
-                <p14:modId xmlns:p14="http://schemas.microsoft.com/office/powerpoint/2010/main" val="3640681988"/>
+                <p14:modId xmlns:p14="http://schemas.microsoft.com/office/powerpoint/2010/main" val="3325323902"/>
               </p:ext>
             </p:extLst>
           </p:nvPr>
@@ -13846,7 +16063,7 @@
     </p:spTree>
     <p:extLst>
       <p:ext uri="{BB962C8B-B14F-4D97-AF65-F5344CB8AC3E}">
-        <p14:creationId xmlns:p14="http://schemas.microsoft.com/office/powerpoint/2010/main" val="809531301"/>
+        <p14:creationId xmlns:p14="http://schemas.microsoft.com/office/powerpoint/2010/main" val="2183542493"/>
       </p:ext>
     </p:extLst>
   </p:cSld>
@@ -13878,7 +16095,7 @@
           <p:cNvPr id="2" name="Titel 1">
             <a:extLst>
               <a:ext uri="{FF2B5EF4-FFF2-40B4-BE49-F238E27FC236}">
-                <a16:creationId xmlns:a16="http://schemas.microsoft.com/office/drawing/2014/main" id="{17EF85DC-365B-8C08-DF61-5F2A0C62A9DA}"/>
+                <a16:creationId xmlns:a16="http://schemas.microsoft.com/office/drawing/2014/main" id="{A0CA00E8-72EC-9903-5F63-0D2C4353A0A3}"/>
               </a:ext>
             </a:extLst>
           </p:cNvPr>
@@ -13907,7 +16124,7 @@
           <p:cNvPr id="3" name="Diagramm 2">
             <a:extLst>
               <a:ext uri="{FF2B5EF4-FFF2-40B4-BE49-F238E27FC236}">
-                <a16:creationId xmlns:a16="http://schemas.microsoft.com/office/drawing/2014/main" id="{EF7938AA-373C-4FDC-20F0-03B14C0E1B61}"/>
+                <a16:creationId xmlns:a16="http://schemas.microsoft.com/office/drawing/2014/main" id="{8DEE6D7A-9A77-92DD-8156-85CDFCE4E400}"/>
               </a:ext>
             </a:extLst>
           </p:cNvPr>
@@ -13915,7 +16132,7 @@
           <p:nvPr>
             <p:extLst>
               <p:ext uri="{D42A27DB-BD31-4B8C-83A1-F6EECF244321}">
-                <p14:modId xmlns:p14="http://schemas.microsoft.com/office/powerpoint/2010/main" val="305480100"/>
+                <p14:modId xmlns:p14="http://schemas.microsoft.com/office/powerpoint/2010/main" val="2238319985"/>
               </p:ext>
             </p:extLst>
           </p:nvPr>
@@ -13935,7 +16152,7 @@
           <p:cNvPr id="4" name="Diagramm 3">
             <a:extLst>
               <a:ext uri="{FF2B5EF4-FFF2-40B4-BE49-F238E27FC236}">
-                <a16:creationId xmlns:a16="http://schemas.microsoft.com/office/drawing/2014/main" id="{16BE79A1-D4CD-2A81-165B-E9C78AEF96FC}"/>
+                <a16:creationId xmlns:a16="http://schemas.microsoft.com/office/drawing/2014/main" id="{09279FD6-5391-9AD4-C805-A36D210466FD}"/>
               </a:ext>
             </a:extLst>
           </p:cNvPr>
@@ -13943,7 +16160,7 @@
           <p:nvPr>
             <p:extLst>
               <p:ext uri="{D42A27DB-BD31-4B8C-83A1-F6EECF244321}">
-                <p14:modId xmlns:p14="http://schemas.microsoft.com/office/powerpoint/2010/main" val="3610986942"/>
+                <p14:modId xmlns:p14="http://schemas.microsoft.com/office/powerpoint/2010/main" val="2645602623"/>
               </p:ext>
             </p:extLst>
           </p:nvPr>
@@ -13961,7 +16178,7 @@
     </p:spTree>
     <p:extLst>
       <p:ext uri="{BB962C8B-B14F-4D97-AF65-F5344CB8AC3E}">
-        <p14:creationId xmlns:p14="http://schemas.microsoft.com/office/powerpoint/2010/main" val="1911903433"/>
+        <p14:creationId xmlns:p14="http://schemas.microsoft.com/office/powerpoint/2010/main" val="799714202"/>
       </p:ext>
     </p:extLst>
   </p:cSld>
@@ -13993,7 +16210,7 @@
           <p:cNvPr id="2" name="Titel 1">
             <a:extLst>
               <a:ext uri="{FF2B5EF4-FFF2-40B4-BE49-F238E27FC236}">
-                <a16:creationId xmlns:a16="http://schemas.microsoft.com/office/drawing/2014/main" id="{2B29FBC4-6C87-A850-5505-08939A71CAED}"/>
+                <a16:creationId xmlns:a16="http://schemas.microsoft.com/office/drawing/2014/main" id="{26DA9E73-6E7B-2965-119A-C236E9ED6E71}"/>
               </a:ext>
             </a:extLst>
           </p:cNvPr>
@@ -14022,7 +16239,7 @@
           <p:cNvPr id="3" name="Diagramm 2">
             <a:extLst>
               <a:ext uri="{FF2B5EF4-FFF2-40B4-BE49-F238E27FC236}">
-                <a16:creationId xmlns:a16="http://schemas.microsoft.com/office/drawing/2014/main" id="{29DD8E1E-9EE9-47DA-54CA-EB348088445C}"/>
+                <a16:creationId xmlns:a16="http://schemas.microsoft.com/office/drawing/2014/main" id="{8112CE60-1DC3-A8EA-949D-EEF8E2C77C1D}"/>
               </a:ext>
             </a:extLst>
           </p:cNvPr>
@@ -14030,7 +16247,7 @@
           <p:nvPr>
             <p:extLst>
               <p:ext uri="{D42A27DB-BD31-4B8C-83A1-F6EECF244321}">
-                <p14:modId xmlns:p14="http://schemas.microsoft.com/office/powerpoint/2010/main" val="1272251118"/>
+                <p14:modId xmlns:p14="http://schemas.microsoft.com/office/powerpoint/2010/main" val="4009695993"/>
               </p:ext>
             </p:extLst>
           </p:nvPr>
@@ -14050,7 +16267,7 @@
           <p:cNvPr id="4" name="Diagramm 3">
             <a:extLst>
               <a:ext uri="{FF2B5EF4-FFF2-40B4-BE49-F238E27FC236}">
-                <a16:creationId xmlns:a16="http://schemas.microsoft.com/office/drawing/2014/main" id="{8B5A2F1B-4046-67F1-4BD6-AEB895ACD733}"/>
+                <a16:creationId xmlns:a16="http://schemas.microsoft.com/office/drawing/2014/main" id="{D2CEAE46-B2BD-E240-A838-027728F25FD8}"/>
               </a:ext>
             </a:extLst>
           </p:cNvPr>
@@ -14058,7 +16275,7 @@
           <p:nvPr>
             <p:extLst>
               <p:ext uri="{D42A27DB-BD31-4B8C-83A1-F6EECF244321}">
-                <p14:modId xmlns:p14="http://schemas.microsoft.com/office/powerpoint/2010/main" val="85409089"/>
+                <p14:modId xmlns:p14="http://schemas.microsoft.com/office/powerpoint/2010/main" val="3274393509"/>
               </p:ext>
             </p:extLst>
           </p:nvPr>
@@ -14076,7 +16293,7 @@
     </p:spTree>
     <p:extLst>
       <p:ext uri="{BB962C8B-B14F-4D97-AF65-F5344CB8AC3E}">
-        <p14:creationId xmlns:p14="http://schemas.microsoft.com/office/powerpoint/2010/main" val="2256778902"/>
+        <p14:creationId xmlns:p14="http://schemas.microsoft.com/office/powerpoint/2010/main" val="3326830483"/>
       </p:ext>
     </p:extLst>
   </p:cSld>
@@ -14108,7 +16325,7 @@
           <p:cNvPr id="2" name="Titel 1">
             <a:extLst>
               <a:ext uri="{FF2B5EF4-FFF2-40B4-BE49-F238E27FC236}">
-                <a16:creationId xmlns:a16="http://schemas.microsoft.com/office/drawing/2014/main" id="{FB0BF6E0-8AD4-83B2-BFCE-B8A40613758A}"/>
+                <a16:creationId xmlns:a16="http://schemas.microsoft.com/office/drawing/2014/main" id="{BB4667A8-D134-A0E2-807E-555BE926BAB2}"/>
               </a:ext>
             </a:extLst>
           </p:cNvPr>
@@ -14137,7 +16354,7 @@
           <p:cNvPr id="3" name="Diagramm 2">
             <a:extLst>
               <a:ext uri="{FF2B5EF4-FFF2-40B4-BE49-F238E27FC236}">
-                <a16:creationId xmlns:a16="http://schemas.microsoft.com/office/drawing/2014/main" id="{B515185C-EB13-37E4-6198-5B8551135277}"/>
+                <a16:creationId xmlns:a16="http://schemas.microsoft.com/office/drawing/2014/main" id="{326C0992-C59B-0D25-398C-4EA39B2186F0}"/>
               </a:ext>
             </a:extLst>
           </p:cNvPr>
@@ -14145,7 +16362,7 @@
           <p:nvPr>
             <p:extLst>
               <p:ext uri="{D42A27DB-BD31-4B8C-83A1-F6EECF244321}">
-                <p14:modId xmlns:p14="http://schemas.microsoft.com/office/powerpoint/2010/main" val="3249793868"/>
+                <p14:modId xmlns:p14="http://schemas.microsoft.com/office/powerpoint/2010/main" val="1974353754"/>
               </p:ext>
             </p:extLst>
           </p:nvPr>
@@ -14165,7 +16382,7 @@
           <p:cNvPr id="4" name="Diagramm 3">
             <a:extLst>
               <a:ext uri="{FF2B5EF4-FFF2-40B4-BE49-F238E27FC236}">
-                <a16:creationId xmlns:a16="http://schemas.microsoft.com/office/drawing/2014/main" id="{E6B5FB2D-438F-541C-CB69-BC963D53560B}"/>
+                <a16:creationId xmlns:a16="http://schemas.microsoft.com/office/drawing/2014/main" id="{81EE61EA-825E-6DAD-0DCC-099F9A72B27F}"/>
               </a:ext>
             </a:extLst>
           </p:cNvPr>
@@ -14173,7 +16390,7 @@
           <p:nvPr>
             <p:extLst>
               <p:ext uri="{D42A27DB-BD31-4B8C-83A1-F6EECF244321}">
-                <p14:modId xmlns:p14="http://schemas.microsoft.com/office/powerpoint/2010/main" val="2509046853"/>
+                <p14:modId xmlns:p14="http://schemas.microsoft.com/office/powerpoint/2010/main" val="1002662291"/>
               </p:ext>
             </p:extLst>
           </p:nvPr>
@@ -14193,7 +16410,7 @@
           <p:cNvPr id="5" name="Diagramm 4">
             <a:extLst>
               <a:ext uri="{FF2B5EF4-FFF2-40B4-BE49-F238E27FC236}">
-                <a16:creationId xmlns:a16="http://schemas.microsoft.com/office/drawing/2014/main" id="{04CCB4E4-9096-93DE-2539-B80D7DE722AC}"/>
+                <a16:creationId xmlns:a16="http://schemas.microsoft.com/office/drawing/2014/main" id="{1798C69D-D17C-60E0-2ABE-AD151DECFE97}"/>
               </a:ext>
             </a:extLst>
           </p:cNvPr>
@@ -14201,7 +16418,7 @@
           <p:nvPr>
             <p:extLst>
               <p:ext uri="{D42A27DB-BD31-4B8C-83A1-F6EECF244321}">
-                <p14:modId xmlns:p14="http://schemas.microsoft.com/office/powerpoint/2010/main" val="3083615134"/>
+                <p14:modId xmlns:p14="http://schemas.microsoft.com/office/powerpoint/2010/main" val="3348270170"/>
               </p:ext>
             </p:extLst>
           </p:nvPr>
@@ -14219,7 +16436,121 @@
     </p:spTree>
     <p:extLst>
       <p:ext uri="{BB962C8B-B14F-4D97-AF65-F5344CB8AC3E}">
-        <p14:creationId xmlns:p14="http://schemas.microsoft.com/office/powerpoint/2010/main" val="971056430"/>
+        <p14:creationId xmlns:p14="http://schemas.microsoft.com/office/powerpoint/2010/main" val="2318946443"/>
+      </p:ext>
+    </p:extLst>
+  </p:cSld>
+  <p:clrMapOvr>
+    <a:masterClrMapping/>
+  </p:clrMapOvr>
+</p:sld>
+</file>
+
+<file path=ppt/slides/slide6.xml><?xml version="1.0" encoding="utf-8"?>
+<p:sld xmlns:a="http://schemas.openxmlformats.org/drawingml/2006/main" xmlns:r="http://schemas.openxmlformats.org/officeDocument/2006/relationships" xmlns:p="http://schemas.openxmlformats.org/presentationml/2006/main">
+  <p:cSld>
+    <p:spTree>
+      <p:nvGrpSpPr>
+        <p:cNvPr id="1" name=""/>
+        <p:cNvGrpSpPr/>
+        <p:nvPr/>
+      </p:nvGrpSpPr>
+      <p:grpSpPr>
+        <a:xfrm>
+          <a:off x="0" y="0"/>
+          <a:ext cx="0" cy="0"/>
+          <a:chOff x="0" y="0"/>
+          <a:chExt cx="0" cy="0"/>
+        </a:xfrm>
+      </p:grpSpPr>
+      <p:sp>
+        <p:nvSpPr>
+          <p:cNvPr id="2" name="Titel 1">
+            <a:extLst>
+              <a:ext uri="{FF2B5EF4-FFF2-40B4-BE49-F238E27FC236}">
+                <a16:creationId xmlns:a16="http://schemas.microsoft.com/office/drawing/2014/main" id="{EB0A34C2-2826-40E4-2E8B-A817CE527825}"/>
+              </a:ext>
+            </a:extLst>
+          </p:cNvPr>
+          <p:cNvSpPr>
+            <a:spLocks noGrp="1"/>
+          </p:cNvSpPr>
+          <p:nvPr>
+            <p:ph type="title"/>
+          </p:nvPr>
+        </p:nvSpPr>
+        <p:spPr/>
+        <p:txBody>
+          <a:bodyPr/>
+          <a:lstStyle/>
+          <a:p>
+            <a:r>
+              <a:rPr lang="de-DE"/>
+              <a:t>Formatted data label text</a:t>
+            </a:r>
+          </a:p>
+        </p:txBody>
+      </p:sp>
+      <p:graphicFrame>
+        <p:nvGraphicFramePr>
+          <p:cNvPr id="3" name="Diagramm 2">
+            <a:extLst>
+              <a:ext uri="{FF2B5EF4-FFF2-40B4-BE49-F238E27FC236}">
+                <a16:creationId xmlns:a16="http://schemas.microsoft.com/office/drawing/2014/main" id="{CD4E39BD-2656-9D6A-7178-17A16B3FD35F}"/>
+              </a:ext>
+            </a:extLst>
+          </p:cNvPr>
+          <p:cNvGraphicFramePr/>
+          <p:nvPr>
+            <p:extLst>
+              <p:ext uri="{D42A27DB-BD31-4B8C-83A1-F6EECF244321}">
+                <p14:modId xmlns:p14="http://schemas.microsoft.com/office/powerpoint/2010/main" val="243384477"/>
+              </p:ext>
+            </p:extLst>
+          </p:nvPr>
+        </p:nvGraphicFramePr>
+        <p:xfrm>
+          <a:off x="254000" y="1397000"/>
+          <a:ext cx="5842000" cy="5207000"/>
+        </p:xfrm>
+        <a:graphic>
+          <a:graphicData uri="http://schemas.openxmlformats.org/drawingml/2006/chart">
+            <c:chart xmlns:c="http://schemas.openxmlformats.org/drawingml/2006/chart" xmlns:r="http://schemas.openxmlformats.org/officeDocument/2006/relationships" r:id="rId2"/>
+          </a:graphicData>
+        </a:graphic>
+      </p:graphicFrame>
+      <p:graphicFrame>
+        <p:nvGraphicFramePr>
+          <p:cNvPr id="4" name="Diagramm 3">
+            <a:extLst>
+              <a:ext uri="{FF2B5EF4-FFF2-40B4-BE49-F238E27FC236}">
+                <a16:creationId xmlns:a16="http://schemas.microsoft.com/office/drawing/2014/main" id="{322F7FFE-CFB9-7638-2040-493C4AE46003}"/>
+              </a:ext>
+            </a:extLst>
+          </p:cNvPr>
+          <p:cNvGraphicFramePr/>
+          <p:nvPr>
+            <p:extLst>
+              <p:ext uri="{D42A27DB-BD31-4B8C-83A1-F6EECF244321}">
+                <p14:modId xmlns:p14="http://schemas.microsoft.com/office/powerpoint/2010/main" val="3690308995"/>
+              </p:ext>
+            </p:extLst>
+          </p:nvPr>
+        </p:nvGraphicFramePr>
+        <p:xfrm>
+          <a:off x="6223000" y="1397000"/>
+          <a:ext cx="5842000" cy="5207000"/>
+        </p:xfrm>
+        <a:graphic>
+          <a:graphicData uri="http://schemas.openxmlformats.org/drawingml/2006/chart">
+            <c:chart xmlns:c="http://schemas.openxmlformats.org/drawingml/2006/chart" xmlns:r="http://schemas.openxmlformats.org/officeDocument/2006/relationships" r:id="rId3"/>
+          </a:graphicData>
+        </a:graphic>
+      </p:graphicFrame>
+    </p:spTree>
+    <p:extLst>
+      <p:ext uri="{BB962C8B-B14F-4D97-AF65-F5344CB8AC3E}">
+        <p14:creationId xmlns:p14="http://schemas.microsoft.com/office/powerpoint/2010/main" val="3442615891"/>
       </p:ext>
     </p:extLst>
   </p:cSld>
